--- a/manaberu/slides/manaberu-03-lark-basics.pptx
+++ b/manaberu/slides/manaberu-03-lark-basics.pptx
@@ -114,13 +114,13 @@
   <p:extLst>
     <p:ext uri="{521415D9-36F7-43E2-AB2F-B90AF26B5E84}">
       <p14:sectionLst xmlns:p14="http://schemas.microsoft.com/office/powerpoint/2010/main">
-        <p14:section name="導入" id="{ddacc933-1cde-bbb9-9661-975ec686cc19}">
+        <p14:section name="導入" id="{26cda42b-2f40-29a4-7b07-3702495f506e}">
           <p14:sldIdLst>
             <p14:sldId id="256"/>
             <p14:sldId id="257"/>
           </p14:sldIdLst>
         </p14:section>
-        <p14:section name="本編" id="{a62e4cfb-ce6d-0b76-dc07-2d0023fffee9}">
+        <p14:section name="本編" id="{bac4d61a-e8a9-69e4-0b36-c180749128ed}">
           <p14:sldIdLst>
             <p14:sldId id="258"/>
             <p14:sldId id="259"/>
@@ -128,7 +128,7 @@
             <p14:sldId id="261"/>
           </p14:sldIdLst>
         </p14:section>
-        <p14:section name="まとめ" id="{2d6eca3a-0463-b6a2-8cf1-d590ca63c6ba}">
+        <p14:section name="まとめ" id="{a45ea1a2-431c-3948-a3f3-4308f2e4cddf}">
           <p14:sldIdLst>
             <p14:sldId id="262"/>
             <p14:sldId id="263"/>
@@ -1228,12 +1228,19 @@
 
 <file path=ppt/slideLayouts/slideLayout2.xml><?xml version="1.0" encoding="utf-8"?>
 <p:sldLayout xmlns:a="http://schemas.openxmlformats.org/drawingml/2006/main" xmlns:r="http://schemas.openxmlformats.org/officeDocument/2006/relationships" xmlns:p="http://schemas.openxmlformats.org/presentationml/2006/main" preserve="1">
-  <p:cSld name="MANA_TITLE">
+  <p:cSld name="MANA_COVER">
     <p:bg>
       <p:bgPr>
-        <a:solidFill>
-          <a:srgbClr val="FFD600"/>
-        </a:solidFill>
+        <a:blipFill dpi="0" rotWithShape="1">
+          <a:blip r:embed="rId1">
+            <a:lum/>
+          </a:blip>
+          <a:srcRect/>
+          <a:stretch>
+            <a:fillRect/>
+          </a:stretch>
+        </a:blipFill>
+        <a:effectLst/>
       </p:bgPr>
     </p:bg>
     <p:spTree>
@@ -1250,156 +1257,6 @@
           <a:chExt cx="0" cy="0"/>
         </a:xfrm>
       </p:grpSpPr>
-      <p:sp>
-        <p:nvSpPr>
-          <p:cNvPr id="2" name="Text 0"/>
-          <p:cNvSpPr/>
-          <p:nvPr>
-            <p:ph idx="100" type="title" hasCustomPrompt="1"/>
-          </p:nvPr>
-        </p:nvSpPr>
-        <p:spPr>
-          <a:xfrm>
-            <a:off x="548640" y="1691640"/>
-            <a:ext cx="5852160" cy="1371600"/>
-          </a:xfrm>
-          <a:prstGeom prst="rect">
-            <a:avLst/>
-          </a:prstGeom>
-          <a:noFill/>
-          <a:ln/>
-        </p:spPr>
-        <p:txBody>
-          <a:bodyPr wrap="square" rtlCol="0"/>
-          <a:lstStyle>
-            <a:lvl1pPr algn="l" indent="0" marL="0">
-              <a:buNone/>
-              <a:defRPr lang="en-US" sz="3200" b="1" dirty="0">
-                <a:solidFill>
-                  <a:schemeClr val="tx1"/>
-                </a:solidFill>
-              </a:defRPr>
-            </a:lvl1pPr>
-          </a:lstStyle>
-          <a:p>
-            <a:pPr algn="l" indent="0" marL="0">
-              <a:buNone/>
-            </a:pPr>
-            <a:endParaRPr lang="en-US" sz="3200" dirty="0"/>
-          </a:p>
-        </p:txBody>
-      </p:sp>
-      <p:sp>
-        <p:nvSpPr>
-          <p:cNvPr id="3" name="Text 0"/>
-          <p:cNvSpPr/>
-          <p:nvPr>
-            <p:ph idx="101" type="body" hasCustomPrompt="1"/>
-          </p:nvPr>
-        </p:nvSpPr>
-        <p:spPr>
-          <a:xfrm>
-            <a:off x="548640" y="3246120"/>
-            <a:ext cx="5852160" cy="457200"/>
-          </a:xfrm>
-          <a:prstGeom prst="rect">
-            <a:avLst/>
-          </a:prstGeom>
-          <a:noFill/>
-          <a:ln/>
-        </p:spPr>
-        <p:txBody>
-          <a:bodyPr wrap="square" rtlCol="0"/>
-          <a:lstStyle>
-            <a:lvl1pPr indent="0" marL="0">
-              <a:buNone/>
-              <a:defRPr lang="en-US" sz="1400" dirty="0">
-                <a:solidFill>
-                  <a:schemeClr val="tx1"/>
-                </a:solidFill>
-              </a:defRPr>
-            </a:lvl1pPr>
-          </a:lstStyle>
-          <a:p>
-            <a:pPr indent="0" marL="0">
-              <a:buNone/>
-            </a:pPr>
-            <a:endParaRPr lang="en-US" sz="1400" dirty="0"/>
-          </a:p>
-        </p:txBody>
-      </p:sp>
-      <p:sp>
-        <p:nvSpPr>
-          <p:cNvPr id="4" name="Text 0"/>
-          <p:cNvSpPr/>
-          <p:nvPr/>
-        </p:nvSpPr>
-        <p:spPr>
-          <a:xfrm>
-            <a:off x="548640" y="4526280"/>
-            <a:ext cx="5486400" cy="274320"/>
-          </a:xfrm>
-          <a:prstGeom prst="rect">
-            <a:avLst/>
-          </a:prstGeom>
-          <a:noFill/>
-          <a:ln/>
-        </p:spPr>
-        <p:txBody>
-          <a:bodyPr wrap="square" lIns="0" tIns="0" rIns="0" bIns="0" rtlCol="0" anchor="ctr"/>
-          <a:lstStyle/>
-          <a:p>
-            <a:pPr indent="0" marL="0">
-              <a:buNone/>
-            </a:pPr>
-            <a:r>
-              <a:rPr lang="en-US" sz="1000" dirty="0">
-                <a:solidFill>
-                  <a:schemeClr val="tx1"/>
-                </a:solidFill>
-              </a:rPr>
-              <a:t>マナベル｜AI×Lark 構築者育成講座</a:t>
-            </a:r>
-            <a:endParaRPr lang="en-US" sz="1000" dirty="0"/>
-          </a:p>
-        </p:txBody>
-      </p:sp>
-      <p:sp>
-        <p:nvSpPr>
-          <p:cNvPr id="5" name="Text 1"/>
-          <p:cNvSpPr/>
-          <p:nvPr/>
-        </p:nvSpPr>
-        <p:spPr>
-          <a:xfrm>
-            <a:off x="6766560" y="4526280"/>
-            <a:ext cx="1828800" cy="274320"/>
-          </a:xfrm>
-          <a:prstGeom prst="rect">
-            <a:avLst/>
-          </a:prstGeom>
-          <a:noFill/>
-          <a:ln/>
-        </p:spPr>
-        <p:txBody>
-          <a:bodyPr wrap="square" lIns="0" tIns="0" rIns="0" bIns="0" rtlCol="0" anchor="ctr"/>
-          <a:lstStyle/>
-          <a:p>
-            <a:pPr algn="r" indent="0" marL="0">
-              <a:buNone/>
-            </a:pPr>
-            <a:r>
-              <a:rPr lang="en-US" sz="1000" b="1" dirty="0">
-                <a:solidFill>
-                  <a:schemeClr val="tx1"/>
-                </a:solidFill>
-              </a:rPr>
-              <a:t>ささエール</a:t>
-            </a:r>
-            <a:endParaRPr lang="en-US" sz="1000" dirty="0"/>
-          </a:p>
-        </p:txBody>
-      </p:sp>
     </p:spTree>
   </p:cSld>
   <p:clrMapOvr>
@@ -1413,9 +1270,16 @@
   <p:cSld name="MANA_CONTENT">
     <p:bg>
       <p:bgPr>
-        <a:solidFill>
-          <a:srgbClr val="FFFFFF"/>
-        </a:solidFill>
+        <a:blipFill dpi="0" rotWithShape="1">
+          <a:blip r:embed="rId1">
+            <a:lum/>
+          </a:blip>
+          <a:srcRect/>
+          <a:stretch>
+            <a:fillRect/>
+          </a:stretch>
+        </a:blipFill>
+        <a:effectLst/>
       </p:bgPr>
     </p:bg>
     <p:spTree>
@@ -1434,53 +1298,36 @@
       </p:grpSpPr>
       <p:sp>
         <p:nvSpPr>
-          <p:cNvPr id="2" name="Text 0"/>
+          <p:cNvPr id="2" name="Shape 0"/>
           <p:cNvSpPr/>
-          <p:nvPr>
-            <p:ph idx="100" type="title" hasCustomPrompt="1"/>
-          </p:nvPr>
-        </p:nvSpPr>
-        <p:spPr>
-          <a:xfrm>
-            <a:off x="548640" y="658368"/>
-            <a:ext cx="8046720" cy="566928"/>
-          </a:xfrm>
-          <a:prstGeom prst="rect">
-            <a:avLst/>
-          </a:prstGeom>
-          <a:noFill/>
+          <p:nvPr/>
+        </p:nvSpPr>
+        <p:spPr>
+          <a:xfrm>
+            <a:off x="6400800" y="4754880"/>
+            <a:ext cx="2423160" cy="274320"/>
+          </a:xfrm>
+          <a:prstGeom prst="rect">
+            <a:avLst>
+              <a:gd name="adj" fmla="val 50000"/>
+            </a:avLst>
+          </a:prstGeom>
+          <a:solidFill>
+            <a:srgbClr val="1A1A1A"/>
+          </a:solidFill>
           <a:ln/>
         </p:spPr>
-        <p:txBody>
-          <a:bodyPr wrap="square" rtlCol="0"/>
-          <a:lstStyle>
-            <a:lvl1pPr algn="l" indent="0" marL="0">
-              <a:buNone/>
-              <a:defRPr lang="en-US" sz="2400" b="1" dirty="0">
-                <a:solidFill>
-                  <a:schemeClr val="tx1"/>
-                </a:solidFill>
-              </a:defRPr>
-            </a:lvl1pPr>
-          </a:lstStyle>
-          <a:p>
-            <a:pPr algn="l" indent="0" marL="0">
-              <a:buNone/>
-            </a:pPr>
-            <a:endParaRPr lang="en-US" sz="2400" dirty="0"/>
-          </a:p>
-        </p:txBody>
-      </p:sp>
-      <p:sp>
-        <p:nvSpPr>
-          <p:cNvPr id="3" name="Text 0"/>
+      </p:sp>
+      <p:sp>
+        <p:nvSpPr>
+          <p:cNvPr id="3" name="Text 1"/>
           <p:cNvSpPr/>
           <p:nvPr/>
         </p:nvSpPr>
         <p:spPr>
           <a:xfrm>
-            <a:off x="548640" y="4773168"/>
-            <a:ext cx="6400800" cy="228600"/>
+            <a:off x="6510528" y="4754880"/>
+            <a:ext cx="1828800" cy="274320"/>
           </a:xfrm>
           <a:prstGeom prst="rect">
             <a:avLst/>
@@ -1496,14 +1343,56 @@
               <a:buNone/>
             </a:pPr>
             <a:r>
-              <a:rPr lang="en-US" sz="900" dirty="0">
-                <a:solidFill>
-                  <a:schemeClr val="tx2"/>
-                </a:solidFill>
+              <a:rPr lang="ja-JP" altLang="en-US" sz="850" b="1" dirty="0">
+                <a:solidFill>
+                  <a:srgbClr val="FFFFFF"/>
+                </a:solidFill>
+                <a:latin typeface="Noto Sans JP" pitchFamily="34" charset="0"/>
+                <a:ea typeface="Noto Sans JP" pitchFamily="34" charset="-122"/>
+                <a:cs typeface="Noto Sans JP" pitchFamily="34" charset="-120"/>
+              </a:rPr>
+              <a:t>ささエール｜OFFICE PLATA</a:t>
+            </a:r>
+            <a:endParaRPr lang="ja-JP" sz="850" dirty="0"/>
+          </a:p>
+        </p:txBody>
+      </p:sp>
+      <p:sp>
+        <p:nvSpPr>
+          <p:cNvPr id="4" name="Text 2"/>
+          <p:cNvSpPr/>
+          <p:nvPr/>
+        </p:nvSpPr>
+        <p:spPr>
+          <a:xfrm>
+            <a:off x="365760" y="4754880"/>
+            <a:ext cx="5852160" cy="274320"/>
+          </a:xfrm>
+          <a:prstGeom prst="rect">
+            <a:avLst/>
+          </a:prstGeom>
+          <a:noFill/>
+          <a:ln/>
+        </p:spPr>
+        <p:txBody>
+          <a:bodyPr wrap="square" lIns="0" tIns="0" rIns="0" bIns="0" rtlCol="0" anchor="ctr"/>
+          <a:lstStyle/>
+          <a:p>
+            <a:pPr indent="0" marL="0">
+              <a:buNone/>
+            </a:pPr>
+            <a:r>
+              <a:rPr lang="ja-JP" altLang="en-US" sz="850" dirty="0">
+                <a:solidFill>
+                  <a:srgbClr val="1A1A1A"/>
+                </a:solidFill>
+                <a:latin typeface="Noto Sans JP Medium" pitchFamily="34" charset="0"/>
+                <a:ea typeface="Noto Sans JP Medium" pitchFamily="34" charset="-122"/>
+                <a:cs typeface="Noto Sans JP Medium" pitchFamily="34" charset="-120"/>
               </a:rPr>
               <a:t>マナベル　第3回　Larkの基本を使いこなす</a:t>
             </a:r>
-            <a:endParaRPr lang="en-US" sz="900" dirty="0"/>
+            <a:endParaRPr lang="ja-JP" sz="850" dirty="0"/>
           </a:p>
         </p:txBody>
       </p:sp>
@@ -1519,8 +1408,8 @@
         </p:nvSpPr>
         <p:spPr>
           <a:xfrm>
-            <a:off x="8229600" y="4773168"/>
-            <a:ext cx="365760" cy="228600"/>
+            <a:off x="8366760" y="4754880"/>
+            <a:ext cx="365760" cy="274320"/>
           </a:xfrm>
           <a:prstGeom prst="rect">
             <a:avLst/>
@@ -1532,169 +1421,26 @@
           </a:extLst>
         </p:spPr>
         <p:txBody>
-          <a:bodyPr/>
+          <a:bodyPr anchor="ctr"/>
           <a:lstStyle>
             <a:lvl1pPr>
-              <a:defRPr sz="900">
-                <a:solidFill>
-                  <a:srgbClr val="5A6872"/>
-                </a:solidFill>
+              <a:defRPr sz="850">
+                <a:solidFill>
+                  <a:srgbClr val="FFFFFF"/>
+                </a:solidFill>
+                <a:latin typeface="Noto Sans JP"/>
+                <a:ea typeface="Noto Sans JP"/>
+                <a:cs typeface="Noto Sans JP"/>
               </a:defRPr>
             </a:lvl1pPr>
           </a:lstStyle>
           <a:p>
             <a:pPr algn="r"/>
             <a:fld id="{F7021451-1387-4CA6-816F-3879F97B5CBC}" type="slidenum">
-              <a:rPr b="0" lang="en-US"/>
+              <a:rPr b="1" lang="en-US"/>
               <a:t>1003</a:t>
             </a:fld>
             <a:endParaRPr lang="en-US"/>
-          </a:p>
-        </p:txBody>
-      </p:sp>
-    </p:spTree>
-  </p:cSld>
-  <p:clrMapOvr>
-    <a:masterClrMapping/>
-  </p:clrMapOvr>
-</p:sldLayout>
-</file>
-
-<file path=ppt/slideLayouts/slideLayout4.xml><?xml version="1.0" encoding="utf-8"?>
-<p:sldLayout xmlns:a="http://schemas.openxmlformats.org/drawingml/2006/main" xmlns:r="http://schemas.openxmlformats.org/officeDocument/2006/relationships" xmlns:p="http://schemas.openxmlformats.org/presentationml/2006/main" preserve="1">
-  <p:cSld name="MANA_DARK">
-    <p:bg>
-      <p:bgPr>
-        <a:solidFill>
-          <a:srgbClr val="1A1A1A"/>
-        </a:solidFill>
-      </p:bgPr>
-    </p:bg>
-    <p:spTree>
-      <p:nvGrpSpPr>
-        <p:cNvPr id="1" name=""/>
-        <p:cNvGrpSpPr/>
-        <p:nvPr/>
-      </p:nvGrpSpPr>
-      <p:grpSpPr>
-        <a:xfrm>
-          <a:off x="0" y="0"/>
-          <a:ext cx="0" cy="0"/>
-          <a:chOff x="0" y="0"/>
-          <a:chExt cx="0" cy="0"/>
-        </a:xfrm>
-      </p:grpSpPr>
-      <p:sp>
-        <p:nvSpPr>
-          <p:cNvPr id="2" name="Text 0"/>
-          <p:cNvSpPr/>
-          <p:nvPr>
-            <p:ph idx="100" type="title" hasCustomPrompt="1"/>
-          </p:nvPr>
-        </p:nvSpPr>
-        <p:spPr>
-          <a:xfrm>
-            <a:off x="548640" y="1463040"/>
-            <a:ext cx="8046720" cy="1005840"/>
-          </a:xfrm>
-          <a:prstGeom prst="rect">
-            <a:avLst/>
-          </a:prstGeom>
-          <a:noFill/>
-          <a:ln/>
-        </p:spPr>
-        <p:txBody>
-          <a:bodyPr wrap="square" rtlCol="0"/>
-          <a:lstStyle>
-            <a:lvl1pPr algn="l" indent="0" marL="0">
-              <a:buNone/>
-              <a:defRPr lang="en-US" sz="3000" b="1" dirty="0">
-                <a:solidFill>
-                  <a:schemeClr val="accent1"/>
-                </a:solidFill>
-              </a:defRPr>
-            </a:lvl1pPr>
-          </a:lstStyle>
-          <a:p>
-            <a:pPr algn="l" indent="0" marL="0">
-              <a:buNone/>
-            </a:pPr>
-            <a:endParaRPr lang="en-US" sz="3000" dirty="0"/>
-          </a:p>
-        </p:txBody>
-      </p:sp>
-      <p:sp>
-        <p:nvSpPr>
-          <p:cNvPr id="3" name="Text 0"/>
-          <p:cNvSpPr/>
-          <p:nvPr>
-            <p:ph idx="101" type="body" hasCustomPrompt="1"/>
-          </p:nvPr>
-        </p:nvSpPr>
-        <p:spPr>
-          <a:xfrm>
-            <a:off x="548640" y="2606040"/>
-            <a:ext cx="8046720" cy="1097280"/>
-          </a:xfrm>
-          <a:prstGeom prst="rect">
-            <a:avLst/>
-          </a:prstGeom>
-          <a:noFill/>
-          <a:ln/>
-        </p:spPr>
-        <p:txBody>
-          <a:bodyPr wrap="square" rtlCol="0"/>
-          <a:lstStyle>
-            <a:lvl1pPr indent="0" marL="0">
-              <a:buNone/>
-              <a:defRPr lang="en-US" sz="1500" dirty="0">
-                <a:solidFill>
-                  <a:schemeClr val="bg1"/>
-                </a:solidFill>
-              </a:defRPr>
-            </a:lvl1pPr>
-          </a:lstStyle>
-          <a:p>
-            <a:pPr indent="0" marL="0">
-              <a:buNone/>
-            </a:pPr>
-            <a:endParaRPr lang="en-US" sz="1500" dirty="0"/>
-          </a:p>
-        </p:txBody>
-      </p:sp>
-      <p:sp>
-        <p:nvSpPr>
-          <p:cNvPr id="4" name="Text 0"/>
-          <p:cNvSpPr/>
-          <p:nvPr/>
-        </p:nvSpPr>
-        <p:spPr>
-          <a:xfrm>
-            <a:off x="548640" y="4526280"/>
-            <a:ext cx="5486400" cy="274320"/>
-          </a:xfrm>
-          <a:prstGeom prst="rect">
-            <a:avLst/>
-          </a:prstGeom>
-          <a:noFill/>
-          <a:ln/>
-        </p:spPr>
-        <p:txBody>
-          <a:bodyPr wrap="square" lIns="0" tIns="0" rIns="0" bIns="0" rtlCol="0" anchor="ctr"/>
-          <a:lstStyle/>
-          <a:p>
-            <a:pPr indent="0" marL="0">
-              <a:buNone/>
-            </a:pPr>
-            <a:r>
-              <a:rPr lang="en-US" sz="1000" dirty="0">
-                <a:solidFill>
-                  <a:schemeClr val="bg1"/>
-                </a:solidFill>
-              </a:rPr>
-              <a:t>マナベル｜AI×Lark 構築者育成講座</a:t>
-            </a:r>
-            <a:endParaRPr lang="en-US" sz="1000" dirty="0"/>
           </a:p>
         </p:txBody>
       </p:sp>
@@ -1735,8 +1481,8 @@
         </p:nvSpPr>
         <p:spPr>
           <a:xfrm>
-            <a:off x="8229600" y="4773168"/>
-            <a:ext cx="365760" cy="228600"/>
+            <a:off x="8366760" y="4754880"/>
+            <a:ext cx="365760" cy="274320"/>
           </a:xfrm>
           <a:prstGeom prst="rect">
             <a:avLst/>
@@ -1748,20 +1494,23 @@
           </a:extLst>
         </p:spPr>
         <p:txBody>
-          <a:bodyPr/>
+          <a:bodyPr anchor="ctr"/>
           <a:lstStyle>
             <a:lvl1pPr>
-              <a:defRPr sz="900">
-                <a:solidFill>
-                  <a:srgbClr val="5A6872"/>
-                </a:solidFill>
+              <a:defRPr sz="850">
+                <a:solidFill>
+                  <a:srgbClr val="FFFFFF"/>
+                </a:solidFill>
+                <a:latin typeface="Noto Sans JP"/>
+                <a:ea typeface="Noto Sans JP"/>
+                <a:cs typeface="Noto Sans JP"/>
               </a:defRPr>
             </a:lvl1pPr>
           </a:lstStyle>
           <a:p>
             <a:pPr algn="r"/>
             <a:fld id="{F7021451-1387-4CA6-816F-3879F97B5CBC}" type="slidenum">
-              <a:rPr b="0" lang="en-US"/>
+              <a:rPr b="1" lang="en-US"/>
               <a:t>null</a:t>
             </a:fld>
             <a:endParaRPr lang="en-US"/>
@@ -1775,7 +1524,6 @@
     <p:sldLayoutId id="2147483649" r:id="rId1"/>
     <p:sldLayoutId id="2147483650" r:id="rId2"/>
     <p:sldLayoutId id="2147483651" r:id="rId3"/>
-    <p:sldLayoutId id="2147483652" r:id="rId4"/>
   </p:sldLayoutIdLst>
   <p:hf sldNum="0" hdr="0" ftr="0" dt="0"/>
   <p:txStyles>
@@ -2048,57 +1796,60 @@
           <a:chExt cx="0" cy="0"/>
         </a:xfrm>
       </p:grpSpPr>
-      <p:sp>
-        <p:nvSpPr>
-          <p:cNvPr id="2" name="lesson-badge"/>
-          <p:cNvSpPr/>
-          <p:nvPr/>
-        </p:nvSpPr>
-        <p:spPr>
-          <a:xfrm>
-            <a:off x="548640" y="822960"/>
-            <a:ext cx="1828800" cy="566928"/>
-          </a:xfrm>
-          <a:prstGeom prst="roundRect">
-            <a:avLst>
-              <a:gd name="adj" fmla="val 50000"/>
-            </a:avLst>
+      <p:pic>
+        <p:nvPicPr>
+          <p:cNvPr id="2" name="portrait" descr="講師 笹原彰朗">    </p:cNvPr>
+          <p:cNvPicPr>
+            <a:picLocks noChangeAspect="1"/>
+          </p:cNvPicPr>
+          <p:nvPr/>
+        </p:nvPicPr>
+        <p:blipFill>
+          <a:blip r:embed="rId1"/>
+          <a:stretch>
+            <a:fillRect/>
+          </a:stretch>
+        </p:blipFill>
+        <p:spPr>
+          <a:xfrm>
+            <a:off x="6003588" y="1211580"/>
+            <a:ext cx="2866092" cy="3931920"/>
+          </a:xfrm>
+          <a:prstGeom prst="rect">
+            <a:avLst/>
+          </a:prstGeom>
+        </p:spPr>
+      </p:pic>
+      <p:sp>
+        <p:nvSpPr>
+          <p:cNvPr id="3" name="Text 0"/>
+          <p:cNvSpPr txBox="1"/>
+          <p:nvPr/>
+        </p:nvSpPr>
+        <p:spPr>
+          <a:xfrm rot="-240000">
+            <a:off x="457200" y="411480"/>
+            <a:ext cx="1600200" cy="603504"/>
+          </a:xfrm>
+          <a:prstGeom prst="rect">
+            <a:avLst/>
           </a:prstGeom>
           <a:solidFill>
             <a:srgbClr val="1A1A1A"/>
           </a:solidFill>
-          <a:ln w="12700">
+          <a:ln>
             <a:solidFill>
               <a:srgbClr val="1A1A1A"/>
             </a:solidFill>
-            <a:prstDash val="solid"/>
           </a:ln>
           <a:effectLst>
             <a:outerShdw sx="100000" sy="100000" kx="0" ky="0" algn="bl" rotWithShape="0" blurRad="101600" dist="38100" dir="2700000">
-              <a:srgbClr val="000000">
-                <a:alpha val="18000"/>
+              <a:srgbClr val="1A1A1A">
+                <a:alpha val="100000"/>
               </a:srgbClr>
             </a:outerShdw>
           </a:effectLst>
         </p:spPr>
-      </p:sp>
-      <p:sp>
-        <p:nvSpPr>
-          <p:cNvPr id="3" name="Text 1"/>
-          <p:cNvSpPr txBox="1"/>
-          <p:nvPr/>
-        </p:nvSpPr>
-        <p:spPr>
-          <a:xfrm>
-            <a:off x="548640" y="822960"/>
-            <a:ext cx="1828800" cy="566928"/>
-          </a:xfrm>
-          <a:prstGeom prst="rect">
-            <a:avLst/>
-          </a:prstGeom>
-          <a:noFill/>
-          <a:ln/>
-        </p:spPr>
         <p:txBody>
           <a:bodyPr wrap="square" lIns="0" tIns="0" rIns="0" bIns="0" rtlCol="0" anchor="ctr"/>
           <a:lstStyle/>
@@ -2107,29 +1858,30 @@
               <a:buNone/>
             </a:pPr>
             <a:r>
-              <a:rPr lang="en-US" sz="2200" b="1" dirty="0">
-                <a:solidFill>
-                  <a:schemeClr val="accent1"/>
-                </a:solidFill>
+              <a:rPr lang="ja-JP" altLang="en-US" sz="2200" dirty="0">
+                <a:solidFill>
+                  <a:srgbClr val="FFD600"/>
+                </a:solidFill>
+                <a:latin typeface="Dela Gothic One" pitchFamily="34" charset="0"/>
+                <a:ea typeface="けいふぉんと" pitchFamily="34" charset="-122"/>
+                <a:cs typeface="Dela Gothic One" pitchFamily="34" charset="-120"/>
               </a:rPr>
               <a:t>第3回</a:t>
             </a:r>
-            <a:endParaRPr lang="en-US" sz="2200" dirty="0"/>
-          </a:p>
-        </p:txBody>
-      </p:sp>
-      <p:sp>
-        <p:nvSpPr>
-          <p:cNvPr id="4" name="Text 0"/>
-          <p:cNvSpPr/>
-          <p:nvPr>
-            <p:ph idx="100" type="title" hasCustomPrompt="1"/>
-          </p:nvPr>
-        </p:nvSpPr>
-        <p:spPr>
-          <a:xfrm>
-            <a:off x="548640" y="1691640"/>
-            <a:ext cx="5852160" cy="1371600"/>
+            <a:endParaRPr lang="ja-JP" sz="2200" dirty="0"/>
+          </a:p>
+        </p:txBody>
+      </p:sp>
+      <p:sp>
+        <p:nvSpPr>
+          <p:cNvPr id="4" name="Text 1"/>
+          <p:cNvSpPr txBox="1"/>
+          <p:nvPr/>
+        </p:nvSpPr>
+        <p:spPr>
+          <a:xfrm>
+            <a:off x="457200" y="1188720"/>
+            <a:ext cx="6035040" cy="1600200"/>
           </a:xfrm>
           <a:prstGeom prst="rect">
             <a:avLst/>
@@ -2138,78 +1890,102 @@
           <a:ln/>
         </p:spPr>
         <p:txBody>
-          <a:bodyPr wrap="square" lIns="0" tIns="0" rIns="0" bIns="0" rtlCol="0" anchor="t"/>
+          <a:bodyPr wrap="square" lIns="0" tIns="0" rIns="0" bIns="0" rtlCol="0" anchor="ctr">
+            <a:normAutofit/>
+          </a:bodyPr>
           <a:lstStyle/>
           <a:p>
-            <a:pPr algn="l" indent="0" marL="0">
+            <a:pPr indent="0" marL="0">
+              <a:lnSpc>
+                <a:spcPct val="105000"/>
+              </a:lnSpc>
               <a:buNone/>
             </a:pPr>
             <a:r>
-              <a:rPr lang="en-US" sz="3200" b="1" dirty="0">
-                <a:solidFill>
-                  <a:schemeClr val="tx1"/>
-                </a:solidFill>
+              <a:rPr lang="ja-JP" altLang="en-US" sz="3800" dirty="0">
+                <a:solidFill>
+                  <a:srgbClr val="1A1A1A"/>
+                </a:solidFill>
+                <a:latin typeface="Dela Gothic One" pitchFamily="34" charset="0"/>
+                <a:ea typeface="けいふぉんと" pitchFamily="34" charset="-122"/>
+                <a:cs typeface="Dela Gothic One" pitchFamily="34" charset="-120"/>
               </a:rPr>
               <a:t>Larkの基本を使いこなす</a:t>
             </a:r>
-            <a:endParaRPr lang="en-US" sz="3200" dirty="0"/>
-          </a:p>
-        </p:txBody>
-      </p:sp>
-      <p:sp>
-        <p:nvSpPr>
-          <p:cNvPr id="5" name="Text 0"/>
-          <p:cNvSpPr/>
-          <p:nvPr>
-            <p:ph idx="101" type="body" hasCustomPrompt="1"/>
-          </p:nvPr>
-        </p:nvSpPr>
-        <p:spPr>
-          <a:xfrm>
-            <a:off x="548640" y="3246120"/>
-            <a:ext cx="5852160" cy="457200"/>
-          </a:xfrm>
-          <a:prstGeom prst="rect">
-            <a:avLst/>
-          </a:prstGeom>
-          <a:noFill/>
-          <a:ln/>
-        </p:spPr>
-        <p:txBody>
-          <a:bodyPr wrap="square" lIns="0" tIns="0" rIns="0" bIns="0" rtlCol="0"/>
+            <a:endParaRPr lang="ja-JP" sz="3800" dirty="0"/>
+          </a:p>
+        </p:txBody>
+      </p:sp>
+      <p:sp>
+        <p:nvSpPr>
+          <p:cNvPr id="5" name="Text 2"/>
+          <p:cNvSpPr txBox="1"/>
+          <p:nvPr/>
+        </p:nvSpPr>
+        <p:spPr>
+          <a:xfrm rot="-120000">
+            <a:off x="457200" y="2971800"/>
+            <a:ext cx="4937760" cy="502920"/>
+          </a:xfrm>
+          <a:prstGeom prst="rect">
+            <a:avLst/>
+          </a:prstGeom>
+          <a:solidFill>
+            <a:srgbClr val="DD6420"/>
+          </a:solidFill>
+          <a:ln w="19050">
+            <a:solidFill>
+              <a:srgbClr val="1A1A1A"/>
+            </a:solidFill>
+          </a:ln>
+          <a:effectLst>
+            <a:outerShdw sx="100000" sy="100000" kx="0" ky="0" algn="bl" rotWithShape="0" blurRad="101600" dist="38100" dir="2700000">
+              <a:srgbClr val="1A1A1A">
+                <a:alpha val="100000"/>
+              </a:srgbClr>
+            </a:outerShdw>
+          </a:effectLst>
+        </p:spPr>
+        <p:txBody>
+          <a:bodyPr wrap="square" lIns="0" tIns="0" rIns="0" bIns="0" rtlCol="0" anchor="ctr"/>
           <a:lstStyle/>
           <a:p>
-            <a:pPr indent="0" marL="0">
+            <a:pPr algn="ctr" indent="0" marL="0">
               <a:buNone/>
             </a:pPr>
             <a:r>
-              <a:rPr lang="en-US" sz="1400" dirty="0">
-                <a:solidFill>
-                  <a:schemeClr val="tx1"/>
-                </a:solidFill>
+              <a:rPr lang="ja-JP" altLang="en-US" sz="1600" b="1" dirty="0">
+                <a:solidFill>
+                  <a:srgbClr val="FFFFFF"/>
+                </a:solidFill>
+                <a:latin typeface="Noto Sans JP" pitchFamily="34" charset="0"/>
+                <a:ea typeface="Noto Sans JP" pitchFamily="34" charset="-122"/>
+                <a:cs typeface="Noto Sans JP" pitchFamily="34" charset="-120"/>
               </a:rPr>
-              <a:t>フェーズ1 土台をつくる　｜　第2週</a:t>
-            </a:r>
-            <a:endParaRPr lang="en-US" sz="1400" dirty="0"/>
-          </a:p>
-        </p:txBody>
-      </p:sp>
-      <p:sp>
-        <p:nvSpPr>
-          <p:cNvPr id="6" name="title-circle"/>
+              <a:t>フェーズ1 土台をつくる｜第2週</a:t>
+            </a:r>
+            <a:endParaRPr lang="ja-JP" sz="1600" dirty="0"/>
+          </a:p>
+        </p:txBody>
+      </p:sp>
+      <p:sp>
+        <p:nvSpPr>
+          <p:cNvPr id="6" name="card"/>
           <p:cNvSpPr/>
           <p:nvPr/>
         </p:nvSpPr>
         <p:spPr>
           <a:xfrm>
-            <a:off x="6537960" y="1188720"/>
-            <a:ext cx="2103120" cy="2103120"/>
-          </a:xfrm>
-          <a:prstGeom prst="ellipse">
-            <a:avLst/>
+            <a:off x="457200" y="3730752"/>
+            <a:ext cx="4937760" cy="896112"/>
+          </a:xfrm>
+          <a:prstGeom prst="roundRect">
+            <a:avLst>
+              <a:gd name="adj" fmla="val 10204"/>
+            </a:avLst>
           </a:prstGeom>
           <a:solidFill>
-            <a:schemeClr val="bg1"/>
+            <a:srgbClr val="FFFFFF"/>
           </a:solidFill>
           <a:ln w="25400">
             <a:solidFill>
@@ -2218,38 +1994,76 @@
             <a:prstDash val="solid"/>
           </a:ln>
           <a:effectLst>
-            <a:outerShdw sx="100000" sy="100000" kx="0" ky="0" algn="bl" rotWithShape="0" blurRad="101600" dist="38100" dir="2700000">
-              <a:srgbClr val="000000">
-                <a:alpha val="18000"/>
+            <a:outerShdw sx="100000" sy="100000" kx="0" ky="0" algn="bl" rotWithShape="0" blurRad="101600" dist="50800" dir="2700000">
+              <a:srgbClr val="1A1A1A">
+                <a:alpha val="100000"/>
               </a:srgbClr>
             </a:outerShdw>
           </a:effectLst>
         </p:spPr>
       </p:sp>
-      <p:pic>
-        <p:nvPicPr>
-          <p:cNvPr id="7" name="title-icon" descr="preencoded.png">    </p:cNvPr>
-          <p:cNvPicPr>
-            <a:picLocks noChangeAspect="1"/>
-          </p:cNvPicPr>
-          <p:nvPr/>
-        </p:nvPicPr>
-        <p:blipFill>
-          <a:blip r:embed="rId1"/>
-          <a:stretch>
-            <a:fillRect/>
-          </a:stretch>
-        </p:blipFill>
-        <p:spPr>
-          <a:xfrm>
-            <a:off x="7086600" y="1737360"/>
-            <a:ext cx="1005840" cy="1005840"/>
-          </a:xfrm>
-          <a:prstGeom prst="rect">
-            <a:avLst/>
-          </a:prstGeom>
-        </p:spPr>
-      </p:pic>
+      <p:sp>
+        <p:nvSpPr>
+          <p:cNvPr id="7" name="Text 4"/>
+          <p:cNvSpPr txBox="1"/>
+          <p:nvPr/>
+        </p:nvSpPr>
+        <p:spPr>
+          <a:xfrm>
+            <a:off x="658368" y="3767328"/>
+            <a:ext cx="4572000" cy="822960"/>
+          </a:xfrm>
+          <a:prstGeom prst="rect">
+            <a:avLst/>
+          </a:prstGeom>
+          <a:noFill/>
+          <a:ln/>
+        </p:spPr>
+        <p:txBody>
+          <a:bodyPr wrap="square" lIns="0" tIns="0" rIns="0" bIns="0" rtlCol="0" anchor="ctr"/>
+          <a:lstStyle/>
+          <a:p>
+            <a:pPr indent="0" marL="0">
+              <a:spcAft>
+                <a:spcPts val="200"/>
+              </a:spcAft>
+              <a:buNone/>
+            </a:pPr>
+            <a:r>
+              <a:rPr lang="ja-JP" altLang="en-US" sz="1500" b="1" dirty="0">
+                <a:solidFill>
+                  <a:srgbClr val="1A1A1A"/>
+                </a:solidFill>
+                <a:latin typeface="Noto Sans JP" pitchFamily="34" charset="0"/>
+                <a:ea typeface="Noto Sans JP" pitchFamily="34" charset="-122"/>
+                <a:cs typeface="Noto Sans JP" pitchFamily="34" charset="-120"/>
+              </a:rPr>
+              <a:t>マナベル｜AI×Lark 構築者育成講座</a:t>
+            </a:r>
+            <a:endParaRPr lang="ja-JP" sz="1500" dirty="0"/>
+          </a:p>
+          <a:p>
+            <a:pPr indent="0" marL="0">
+              <a:spcAft>
+                <a:spcPts val="200"/>
+              </a:spcAft>
+              <a:buNone/>
+            </a:pPr>
+            <a:r>
+              <a:rPr lang="ja-JP" altLang="en-US" sz="1150" b="1" dirty="0">
+                <a:solidFill>
+                  <a:srgbClr val="DD6420"/>
+                </a:solidFill>
+                <a:latin typeface="Noto Sans JP" pitchFamily="34" charset="0"/>
+                <a:ea typeface="Noto Sans JP" pitchFamily="34" charset="-122"/>
+                <a:cs typeface="Noto Sans JP" pitchFamily="34" charset="-120"/>
+              </a:rPr>
+              <a:t>ささエール ／ OFFICE PLATA　笹原 彰朗</a:t>
+            </a:r>
+            <a:endParaRPr lang="ja-JP" sz="1500" dirty="0"/>
+          </a:p>
+        </p:txBody>
+      </p:sp>
     </p:spTree>
   </p:cSld>
   <p:clrMapOvr>
@@ -2278,15 +2092,58 @@
       <p:sp>
         <p:nvSpPr>
           <p:cNvPr id="2" name="Text 0"/>
-          <p:cNvSpPr/>
-          <p:nvPr>
-            <p:ph idx="100" type="title" hasCustomPrompt="1"/>
-          </p:nvPr>
-        </p:nvSpPr>
-        <p:spPr>
-          <a:xfrm>
-            <a:off x="548640" y="658368"/>
-            <a:ext cx="8046720" cy="566928"/>
+          <p:cNvSpPr txBox="1"/>
+          <p:nvPr/>
+        </p:nvSpPr>
+        <p:spPr>
+          <a:xfrm rot="-180000">
+            <a:off x="411480" y="201168"/>
+            <a:ext cx="1040587" cy="352044"/>
+          </a:xfrm>
+          <a:prstGeom prst="rect">
+            <a:avLst/>
+          </a:prstGeom>
+          <a:solidFill>
+            <a:srgbClr val="1A1A1A"/>
+          </a:solidFill>
+          <a:ln>
+            <a:solidFill>
+              <a:srgbClr val="1A1A1A"/>
+            </a:solidFill>
+          </a:ln>
+        </p:spPr>
+        <p:txBody>
+          <a:bodyPr wrap="square" lIns="0" tIns="0" rIns="0" bIns="0" rtlCol="0" anchor="ctr"/>
+          <a:lstStyle/>
+          <a:p>
+            <a:pPr algn="ctr" indent="0" marL="0">
+              <a:buNone/>
+            </a:pPr>
+            <a:r>
+              <a:rPr lang="ja-JP" altLang="en-US" sz="1100" dirty="0">
+                <a:solidFill>
+                  <a:srgbClr val="FFFFFF"/>
+                </a:solidFill>
+                <a:latin typeface="Dela Gothic One" pitchFamily="34" charset="0"/>
+                <a:ea typeface="けいふぉんと" pitchFamily="34" charset="-122"/>
+                <a:cs typeface="Dela Gothic One" pitchFamily="34" charset="-120"/>
+              </a:rPr>
+              <a:t>はじめに</a:t>
+            </a:r>
+            <a:endParaRPr lang="ja-JP" sz="1100" dirty="0"/>
+          </a:p>
+        </p:txBody>
+      </p:sp>
+      <p:sp>
+        <p:nvSpPr>
+          <p:cNvPr id="3" name="Text 1"/>
+          <p:cNvSpPr txBox="1"/>
+          <p:nvPr/>
+        </p:nvSpPr>
+        <p:spPr>
+          <a:xfrm>
+            <a:off x="411480" y="502920"/>
+            <a:ext cx="8321040" cy="685800"/>
           </a:xfrm>
           <a:prstGeom prst="rect">
             <a:avLst/>
@@ -2295,105 +2152,79 @@
           <a:ln/>
         </p:spPr>
         <p:txBody>
-          <a:bodyPr wrap="square" lIns="0" tIns="0" rIns="0" bIns="0" rtlCol="0" anchor="ctr"/>
+          <a:bodyPr wrap="square" lIns="0" tIns="0" rIns="0" bIns="0" rtlCol="0" anchor="ctr">
+            <a:normAutofit/>
+          </a:bodyPr>
           <a:lstStyle/>
           <a:p>
-            <a:pPr algn="l" indent="0" marL="0">
+            <a:pPr indent="0" marL="0">
               <a:buNone/>
             </a:pPr>
             <a:r>
-              <a:rPr lang="en-US" sz="2400" b="1" dirty="0">
-                <a:solidFill>
-                  <a:schemeClr val="tx1"/>
-                </a:solidFill>
+              <a:rPr lang="ja-JP" altLang="en-US" sz="2600" dirty="0">
+                <a:solidFill>
+                  <a:srgbClr val="1A1A1A"/>
+                </a:solidFill>
+                <a:latin typeface="Dela Gothic One" pitchFamily="34" charset="0"/>
+                <a:ea typeface="けいふぉんと" pitchFamily="34" charset="-122"/>
+                <a:cs typeface="Dela Gothic One" pitchFamily="34" charset="-120"/>
               </a:rPr>
               <a:t>今日のゴールと流れ</a:t>
             </a:r>
-            <a:endParaRPr lang="en-US" sz="2400" dirty="0"/>
-          </a:p>
-        </p:txBody>
-      </p:sp>
-      <p:sp>
-        <p:nvSpPr>
-          <p:cNvPr id="3" name="chip"/>
+            <a:endParaRPr lang="ja-JP" sz="2600" dirty="0"/>
+          </a:p>
+        </p:txBody>
+      </p:sp>
+      <p:sp>
+        <p:nvSpPr>
+          <p:cNvPr id="4" name="card"/>
           <p:cNvSpPr/>
           <p:nvPr/>
         </p:nvSpPr>
         <p:spPr>
           <a:xfrm>
-            <a:off x="548640" y="292608"/>
-            <a:ext cx="932688" cy="292608"/>
+            <a:off x="502920" y="1371600"/>
+            <a:ext cx="3941064" cy="1280160"/>
           </a:xfrm>
           <a:prstGeom prst="roundRect">
             <a:avLst>
-              <a:gd name="adj" fmla="val 50000"/>
+              <a:gd name="adj" fmla="val 7143"/>
             </a:avLst>
           </a:prstGeom>
           <a:solidFill>
-            <a:schemeClr val="tx1"/>
+            <a:srgbClr val="FFFFFF"/>
           </a:solidFill>
-          <a:ln w="12700">
+          <a:ln w="25400">
             <a:solidFill>
-              <a:schemeClr val="tx1"/>
+              <a:srgbClr val="1A1A1A"/>
             </a:solidFill>
             <a:prstDash val="solid"/>
           </a:ln>
-        </p:spPr>
-      </p:sp>
-      <p:sp>
-        <p:nvSpPr>
-          <p:cNvPr id="4" name="chip-text"/>
-          <p:cNvSpPr txBox="1"/>
-          <p:nvPr/>
-        </p:nvSpPr>
-        <p:spPr>
-          <a:xfrm>
-            <a:off x="548640" y="292608"/>
-            <a:ext cx="932688" cy="292608"/>
-          </a:xfrm>
-          <a:prstGeom prst="rect">
-            <a:avLst/>
-          </a:prstGeom>
-          <a:noFill/>
-          <a:ln/>
-        </p:spPr>
-        <p:txBody>
-          <a:bodyPr wrap="square" lIns="0" tIns="0" rIns="0" bIns="0" rtlCol="0" anchor="ctr"/>
-          <a:lstStyle/>
-          <a:p>
-            <a:pPr algn="ctr" indent="0" marL="0">
-              <a:buNone/>
-            </a:pPr>
-            <a:r>
-              <a:rPr lang="en-US" sz="1100" b="1" dirty="0">
-                <a:solidFill>
-                  <a:schemeClr val="accent1"/>
-                </a:solidFill>
-              </a:rPr>
-              <a:t>はじめに</a:t>
-            </a:r>
-            <a:endParaRPr lang="en-US" sz="1100" dirty="0"/>
-          </a:p>
-        </p:txBody>
-      </p:sp>
-      <p:sp>
-        <p:nvSpPr>
-          <p:cNvPr id="5" name="card"/>
+          <a:effectLst>
+            <a:outerShdw sx="100000" sy="100000" kx="0" ky="0" algn="bl" rotWithShape="0" blurRad="101600" dist="50800" dir="2700000">
+              <a:srgbClr val="1A1A1A">
+                <a:alpha val="100000"/>
+              </a:srgbClr>
+            </a:outerShdw>
+          </a:effectLst>
+        </p:spPr>
+      </p:sp>
+      <p:sp>
+        <p:nvSpPr>
+          <p:cNvPr id="5" name="icon-circle"/>
           <p:cNvSpPr/>
           <p:nvPr/>
         </p:nvSpPr>
         <p:spPr>
           <a:xfrm>
-            <a:off x="548640" y="1417320"/>
-            <a:ext cx="3909060" cy="1280160"/>
-          </a:xfrm>
-          <a:prstGeom prst="roundRect">
-            <a:avLst>
-              <a:gd name="adj" fmla="val 8571"/>
-            </a:avLst>
+            <a:off x="685800" y="1572768"/>
+            <a:ext cx="438912" cy="438912"/>
+          </a:xfrm>
+          <a:prstGeom prst="ellipse">
+            <a:avLst/>
           </a:prstGeom>
           <a:solidFill>
-            <a:schemeClr val="bg2"/>
+            <a:srgbClr val="DD6420"/>
           </a:solidFill>
           <a:ln w="19050">
             <a:solidFill>
@@ -2401,43 +2232,11 @@
             </a:solidFill>
             <a:prstDash val="solid"/>
           </a:ln>
-          <a:effectLst>
-            <a:outerShdw sx="100000" sy="100000" kx="0" ky="0" algn="bl" rotWithShape="0" blurRad="101600" dist="38100" dir="2700000">
-              <a:srgbClr val="000000">
-                <a:alpha val="18000"/>
-              </a:srgbClr>
-            </a:outerShdw>
-          </a:effectLst>
-        </p:spPr>
-      </p:sp>
-      <p:sp>
-        <p:nvSpPr>
-          <p:cNvPr id="6" name="icon-circle"/>
-          <p:cNvSpPr/>
-          <p:nvPr/>
-        </p:nvSpPr>
-        <p:spPr>
-          <a:xfrm>
-            <a:off x="731520" y="1600200"/>
-            <a:ext cx="411480" cy="411480"/>
-          </a:xfrm>
-          <a:prstGeom prst="ellipse">
-            <a:avLst/>
-          </a:prstGeom>
-          <a:solidFill>
-            <a:schemeClr val="accent1"/>
-          </a:solidFill>
-          <a:ln w="15875">
-            <a:solidFill>
-              <a:srgbClr val="1A1A1A"/>
-            </a:solidFill>
-            <a:prstDash val="solid"/>
-          </a:ln>
         </p:spPr>
       </p:sp>
       <p:pic>
         <p:nvPicPr>
-          <p:cNvPr id="7" name="icon" descr="preencoded.png">    </p:cNvPr>
+          <p:cNvPr id="6" name="icon" descr="preencoded.png">    </p:cNvPr>
           <p:cNvPicPr>
             <a:picLocks noChangeAspect="1"/>
           </p:cNvPicPr>
@@ -2451,8 +2250,8 @@
         </p:blipFill>
         <p:spPr>
           <a:xfrm>
-            <a:off x="838505" y="1707185"/>
-            <a:ext cx="197510" cy="197510"/>
+            <a:off x="795528" y="1682496"/>
+            <a:ext cx="219456" cy="219456"/>
           </a:xfrm>
           <a:prstGeom prst="rect">
             <a:avLst/>
@@ -2461,14 +2260,14 @@
       </p:pic>
       <p:sp>
         <p:nvSpPr>
-          <p:cNvPr id="8" name="goal"/>
+          <p:cNvPr id="7" name="goal"/>
           <p:cNvSpPr txBox="1"/>
           <p:nvPr/>
         </p:nvSpPr>
         <p:spPr>
           <a:xfrm>
-            <a:off x="1280160" y="1508760"/>
-            <a:ext cx="2994660" cy="1097280"/>
+            <a:off x="1252728" y="1463040"/>
+            <a:ext cx="3026664" cy="1097280"/>
           </a:xfrm>
           <a:prstGeom prst="rect">
             <a:avLst/>
@@ -2477,42 +2276,79 @@
           <a:ln/>
         </p:spPr>
         <p:txBody>
-          <a:bodyPr wrap="square" lIns="0" tIns="0" rIns="0" bIns="0" rtlCol="0" anchor="ctr"/>
+          <a:bodyPr wrap="square" lIns="0" tIns="0" rIns="0" bIns="0" rtlCol="0" anchor="ctr">
+            <a:normAutofit/>
+          </a:bodyPr>
           <a:lstStyle/>
           <a:p>
             <a:pPr indent="0" marL="0">
               <a:buNone/>
             </a:pPr>
             <a:r>
-              <a:rPr lang="en-US" sz="1400" b="1" dirty="0">
-                <a:solidFill>
-                  <a:schemeClr val="tx1"/>
-                </a:solidFill>
+              <a:rPr lang="ja-JP" altLang="en-US" sz="1400" b="1" dirty="0">
+                <a:solidFill>
+                  <a:srgbClr val="1A1A1A"/>
+                </a:solidFill>
+                <a:latin typeface="Noto Sans JP" pitchFamily="34" charset="0"/>
+                <a:ea typeface="Noto Sans JP" pitchFamily="34" charset="-122"/>
+                <a:cs typeface="Noto Sans JP" pitchFamily="34" charset="-120"/>
               </a:rPr>
               <a:t>Larkの主な機能と、情報の置き場所がわかる</a:t>
             </a:r>
-            <a:endParaRPr lang="en-US" sz="1400" dirty="0"/>
-          </a:p>
-        </p:txBody>
-      </p:sp>
-      <p:sp>
-        <p:nvSpPr>
-          <p:cNvPr id="9" name="card"/>
+            <a:endParaRPr lang="ja-JP" sz="1400" dirty="0"/>
+          </a:p>
+        </p:txBody>
+      </p:sp>
+      <p:sp>
+        <p:nvSpPr>
+          <p:cNvPr id="8" name="card"/>
           <p:cNvSpPr/>
           <p:nvPr/>
         </p:nvSpPr>
         <p:spPr>
           <a:xfrm>
-            <a:off x="4686300" y="1417320"/>
-            <a:ext cx="3909060" cy="1280160"/>
+            <a:off x="4700016" y="1371600"/>
+            <a:ext cx="3941064" cy="1280160"/>
           </a:xfrm>
           <a:prstGeom prst="roundRect">
             <a:avLst>
-              <a:gd name="adj" fmla="val 8571"/>
+              <a:gd name="adj" fmla="val 7143"/>
             </a:avLst>
           </a:prstGeom>
           <a:solidFill>
-            <a:schemeClr val="bg2"/>
+            <a:srgbClr val="FFFFFF"/>
+          </a:solidFill>
+          <a:ln w="25400">
+            <a:solidFill>
+              <a:srgbClr val="1A1A1A"/>
+            </a:solidFill>
+            <a:prstDash val="solid"/>
+          </a:ln>
+          <a:effectLst>
+            <a:outerShdw sx="100000" sy="100000" kx="0" ky="0" algn="bl" rotWithShape="0" blurRad="101600" dist="50800" dir="2700000">
+              <a:srgbClr val="1A1A1A">
+                <a:alpha val="100000"/>
+              </a:srgbClr>
+            </a:outerShdw>
+          </a:effectLst>
+        </p:spPr>
+      </p:sp>
+      <p:sp>
+        <p:nvSpPr>
+          <p:cNvPr id="9" name="icon-circle"/>
+          <p:cNvSpPr/>
+          <p:nvPr/>
+        </p:nvSpPr>
+        <p:spPr>
+          <a:xfrm>
+            <a:off x="4882896" y="1572768"/>
+            <a:ext cx="438912" cy="438912"/>
+          </a:xfrm>
+          <a:prstGeom prst="ellipse">
+            <a:avLst/>
+          </a:prstGeom>
+          <a:solidFill>
+            <a:srgbClr val="DD6420"/>
           </a:solidFill>
           <a:ln w="19050">
             <a:solidFill>
@@ -2520,43 +2356,11 @@
             </a:solidFill>
             <a:prstDash val="solid"/>
           </a:ln>
-          <a:effectLst>
-            <a:outerShdw sx="100000" sy="100000" kx="0" ky="0" algn="bl" rotWithShape="0" blurRad="101600" dist="38100" dir="2700000">
-              <a:srgbClr val="000000">
-                <a:alpha val="18000"/>
-              </a:srgbClr>
-            </a:outerShdw>
-          </a:effectLst>
-        </p:spPr>
-      </p:sp>
-      <p:sp>
-        <p:nvSpPr>
-          <p:cNvPr id="10" name="icon-circle"/>
-          <p:cNvSpPr/>
-          <p:nvPr/>
-        </p:nvSpPr>
-        <p:spPr>
-          <a:xfrm>
-            <a:off x="4869180" y="1600200"/>
-            <a:ext cx="411480" cy="411480"/>
-          </a:xfrm>
-          <a:prstGeom prst="ellipse">
-            <a:avLst/>
-          </a:prstGeom>
-          <a:solidFill>
-            <a:schemeClr val="accent1"/>
-          </a:solidFill>
-          <a:ln w="15875">
-            <a:solidFill>
-              <a:srgbClr val="1A1A1A"/>
-            </a:solidFill>
-            <a:prstDash val="solid"/>
-          </a:ln>
         </p:spPr>
       </p:sp>
       <p:pic>
         <p:nvPicPr>
-          <p:cNvPr id="11" name="icon" descr="preencoded.png">    </p:cNvPr>
+          <p:cNvPr id="10" name="icon" descr="preencoded.png">    </p:cNvPr>
           <p:cNvPicPr>
             <a:picLocks noChangeAspect="1"/>
           </p:cNvPicPr>
@@ -2570,8 +2374,8 @@
         </p:blipFill>
         <p:spPr>
           <a:xfrm>
-            <a:off x="4976165" y="1707185"/>
-            <a:ext cx="197510" cy="197510"/>
+            <a:off x="4992624" y="1682496"/>
+            <a:ext cx="219456" cy="219456"/>
           </a:xfrm>
           <a:prstGeom prst="rect">
             <a:avLst/>
@@ -2580,14 +2384,14 @@
       </p:pic>
       <p:sp>
         <p:nvSpPr>
-          <p:cNvPr id="12" name="goal"/>
+          <p:cNvPr id="11" name="goal"/>
           <p:cNvSpPr txBox="1"/>
           <p:nvPr/>
         </p:nvSpPr>
         <p:spPr>
           <a:xfrm>
-            <a:off x="5417820" y="1508760"/>
-            <a:ext cx="2994660" cy="1097280"/>
+            <a:off x="5449824" y="1463040"/>
+            <a:ext cx="3026664" cy="1097280"/>
           </a:xfrm>
           <a:prstGeom prst="rect">
             <a:avLst/>
@@ -2596,59 +2400,105 @@
           <a:ln/>
         </p:spPr>
         <p:txBody>
-          <a:bodyPr wrap="square" lIns="0" tIns="0" rIns="0" bIns="0" rtlCol="0" anchor="ctr"/>
+          <a:bodyPr wrap="square" lIns="0" tIns="0" rIns="0" bIns="0" rtlCol="0" anchor="ctr">
+            <a:normAutofit/>
+          </a:bodyPr>
           <a:lstStyle/>
           <a:p>
             <a:pPr indent="0" marL="0">
               <a:buNone/>
             </a:pPr>
             <a:r>
-              <a:rPr lang="en-US" sz="1400" b="1" dirty="0">
-                <a:solidFill>
-                  <a:schemeClr val="tx1"/>
-                </a:solidFill>
+              <a:rPr lang="ja-JP" altLang="en-US" sz="1400" b="1" dirty="0">
+                <a:solidFill>
+                  <a:srgbClr val="1A1A1A"/>
+                </a:solidFill>
+                <a:latin typeface="Noto Sans JP" pitchFamily="34" charset="0"/>
+                <a:ea typeface="Noto Sans JP" pitchFamily="34" charset="-122"/>
+                <a:cs typeface="Noto Sans JP" pitchFamily="34" charset="-120"/>
               </a:rPr>
               <a:t>講座用のWikiスペースを作り、設計シートを置けている</a:t>
             </a:r>
-            <a:endParaRPr lang="en-US" sz="1400" dirty="0"/>
-          </a:p>
-        </p:txBody>
-      </p:sp>
-      <p:sp>
-        <p:nvSpPr>
-          <p:cNvPr id="13" name="Text 9"/>
+            <a:endParaRPr lang="ja-JP" sz="1400" dirty="0"/>
+          </a:p>
+        </p:txBody>
+      </p:sp>
+      <p:sp>
+        <p:nvSpPr>
+          <p:cNvPr id="12" name="Text 8"/>
           <p:cNvSpPr txBox="1"/>
           <p:nvPr/>
         </p:nvSpPr>
         <p:spPr>
-          <a:xfrm>
-            <a:off x="548640" y="2971800"/>
-            <a:ext cx="3657600" cy="320040"/>
-          </a:xfrm>
-          <a:prstGeom prst="rect">
-            <a:avLst/>
-          </a:prstGeom>
-          <a:noFill/>
-          <a:ln/>
+          <a:xfrm rot="-120000">
+            <a:off x="457200" y="2907792"/>
+            <a:ext cx="1915668" cy="352044"/>
+          </a:xfrm>
+          <a:prstGeom prst="rect">
+            <a:avLst/>
+          </a:prstGeom>
+          <a:solidFill>
+            <a:srgbClr val="1A1A1A"/>
+          </a:solidFill>
+          <a:ln>
+            <a:solidFill>
+              <a:srgbClr val="1A1A1A"/>
+            </a:solidFill>
+          </a:ln>
         </p:spPr>
         <p:txBody>
           <a:bodyPr wrap="square" lIns="0" tIns="0" rIns="0" bIns="0" rtlCol="0" anchor="ctr"/>
           <a:lstStyle/>
           <a:p>
-            <a:pPr indent="0" marL="0">
+            <a:pPr algn="ctr" indent="0" marL="0">
               <a:buNone/>
             </a:pPr>
             <a:r>
-              <a:rPr lang="en-US" sz="1300" b="1" dirty="0">
-                <a:solidFill>
-                  <a:schemeClr val="tx1"/>
-                </a:solidFill>
+              <a:rPr lang="ja-JP" altLang="en-US" sz="1100" dirty="0">
+                <a:solidFill>
+                  <a:srgbClr val="FFFFFF"/>
+                </a:solidFill>
+                <a:latin typeface="Dela Gothic One" pitchFamily="34" charset="0"/>
+                <a:ea typeface="けいふぉんと" pitchFamily="34" charset="-122"/>
+                <a:cs typeface="Dela Gothic One" pitchFamily="34" charset="-120"/>
               </a:rPr>
               <a:t>今日の流れ（90分）</a:t>
             </a:r>
-            <a:endParaRPr lang="en-US" sz="1300" dirty="0"/>
-          </a:p>
-        </p:txBody>
+            <a:endParaRPr lang="ja-JP" sz="1100" dirty="0"/>
+          </a:p>
+        </p:txBody>
+      </p:sp>
+      <p:sp>
+        <p:nvSpPr>
+          <p:cNvPr id="13" name="Shape 9"/>
+          <p:cNvSpPr/>
+          <p:nvPr/>
+        </p:nvSpPr>
+        <p:spPr>
+          <a:xfrm>
+            <a:off x="502920" y="3364992"/>
+            <a:ext cx="8138160" cy="685800"/>
+          </a:xfrm>
+          <a:prstGeom prst="rect">
+            <a:avLst/>
+          </a:prstGeom>
+          <a:solidFill>
+            <a:srgbClr val="FFFFFF"/>
+          </a:solidFill>
+          <a:ln w="25400">
+            <a:solidFill>
+              <a:srgbClr val="1A1A1A"/>
+            </a:solidFill>
+            <a:prstDash val="solid"/>
+          </a:ln>
+          <a:effectLst>
+            <a:outerShdw sx="100000" sy="100000" kx="0" ky="0" algn="bl" rotWithShape="0" blurRad="101600" dist="50800" dir="2700000">
+              <a:srgbClr val="1A1A1A">
+                <a:alpha val="100000"/>
+              </a:srgbClr>
+            </a:outerShdw>
+          </a:effectLst>
+        </p:spPr>
       </p:sp>
       <p:sp>
         <p:nvSpPr>
@@ -2658,8 +2508,8 @@
         </p:nvSpPr>
         <p:spPr>
           <a:xfrm>
-            <a:off x="548640" y="3383280"/>
-            <a:ext cx="894080" cy="685800"/>
+            <a:off x="502920" y="3364992"/>
+            <a:ext cx="904240" cy="685800"/>
           </a:xfrm>
           <a:prstGeom prst="rect">
             <a:avLst/>
@@ -2683,8 +2533,8 @@
         </p:nvSpPr>
         <p:spPr>
           <a:xfrm>
-            <a:off x="548640" y="3383280"/>
-            <a:ext cx="894080" cy="685800"/>
+            <a:off x="502920" y="3364992"/>
+            <a:ext cx="904240" cy="685800"/>
           </a:xfrm>
           <a:prstGeom prst="rect">
             <a:avLst/>
@@ -2700,28 +2550,34 @@
               <a:buNone/>
             </a:pPr>
             <a:r>
-              <a:rPr lang="en-US" sz="1050" b="1" dirty="0">
+              <a:rPr lang="ja-JP" altLang="en-US" sz="1050" b="1" dirty="0">
                 <a:solidFill>
                   <a:srgbClr val="FFD600"/>
                 </a:solidFill>
+                <a:latin typeface="Noto Sans JP" pitchFamily="34" charset="0"/>
+                <a:ea typeface="Noto Sans JP" pitchFamily="34" charset="-122"/>
+                <a:cs typeface="Noto Sans JP" pitchFamily="34" charset="-120"/>
               </a:rPr>
               <a:t>ふりかえり</a:t>
             </a:r>
-            <a:endParaRPr lang="en-US" sz="1050" dirty="0"/>
+            <a:endParaRPr lang="ja-JP" sz="1050" dirty="0"/>
           </a:p>
           <a:p>
             <a:pPr algn="ctr" indent="0" marL="0">
               <a:buNone/>
             </a:pPr>
             <a:r>
-              <a:rPr lang="en-US" sz="900" b="1" dirty="0">
+              <a:rPr lang="ja-JP" altLang="en-US" sz="900" b="1" dirty="0">
                 <a:solidFill>
                   <a:srgbClr val="FFD600"/>
                 </a:solidFill>
+                <a:latin typeface="Noto Sans JP" pitchFamily="34" charset="0"/>
+                <a:ea typeface="Noto Sans JP" pitchFamily="34" charset="-122"/>
+                <a:cs typeface="Noto Sans JP" pitchFamily="34" charset="-120"/>
               </a:rPr>
               <a:t>10分</a:t>
             </a:r>
-            <a:endParaRPr lang="en-US" sz="1050" dirty="0"/>
+            <a:endParaRPr lang="ja-JP" sz="1050" dirty="0"/>
           </a:p>
         </p:txBody>
       </p:sp>
@@ -2733,8 +2589,8 @@
         </p:nvSpPr>
         <p:spPr>
           <a:xfrm>
-            <a:off x="1442720" y="3383280"/>
-            <a:ext cx="894080" cy="685800"/>
+            <a:off x="1407160" y="3364992"/>
+            <a:ext cx="904240" cy="685800"/>
           </a:xfrm>
           <a:prstGeom prst="rect">
             <a:avLst/>
@@ -2758,8 +2614,8 @@
         </p:nvSpPr>
         <p:spPr>
           <a:xfrm>
-            <a:off x="1442720" y="3383280"/>
-            <a:ext cx="894080" cy="685800"/>
+            <a:off x="1407160" y="3364992"/>
+            <a:ext cx="904240" cy="685800"/>
           </a:xfrm>
           <a:prstGeom prst="rect">
             <a:avLst/>
@@ -2775,28 +2631,34 @@
               <a:buNone/>
             </a:pPr>
             <a:r>
-              <a:rPr lang="en-US" sz="1050" b="1" dirty="0">
+              <a:rPr lang="ja-JP" altLang="en-US" sz="1050" b="1" dirty="0">
                 <a:solidFill>
                   <a:srgbClr val="FFD600"/>
                 </a:solidFill>
+                <a:latin typeface="Noto Sans JP" pitchFamily="34" charset="0"/>
+                <a:ea typeface="Noto Sans JP" pitchFamily="34" charset="-122"/>
+                <a:cs typeface="Noto Sans JP" pitchFamily="34" charset="-120"/>
               </a:rPr>
               <a:t>説明①</a:t>
             </a:r>
-            <a:endParaRPr lang="en-US" sz="1050" dirty="0"/>
+            <a:endParaRPr lang="ja-JP" sz="1050" dirty="0"/>
           </a:p>
           <a:p>
             <a:pPr algn="ctr" indent="0" marL="0">
               <a:buNone/>
             </a:pPr>
             <a:r>
-              <a:rPr lang="en-US" sz="900" b="1" dirty="0">
+              <a:rPr lang="ja-JP" altLang="en-US" sz="900" b="1" dirty="0">
                 <a:solidFill>
                   <a:srgbClr val="FFD600"/>
                 </a:solidFill>
+                <a:latin typeface="Noto Sans JP" pitchFamily="34" charset="0"/>
+                <a:ea typeface="Noto Sans JP" pitchFamily="34" charset="-122"/>
+                <a:cs typeface="Noto Sans JP" pitchFamily="34" charset="-120"/>
               </a:rPr>
               <a:t>10分</a:t>
             </a:r>
-            <a:endParaRPr lang="en-US" sz="1050" dirty="0"/>
+            <a:endParaRPr lang="ja-JP" sz="1050" dirty="0"/>
           </a:p>
         </p:txBody>
       </p:sp>
@@ -2808,8 +2670,8 @@
         </p:nvSpPr>
         <p:spPr>
           <a:xfrm>
-            <a:off x="2336800" y="3383280"/>
-            <a:ext cx="1788160" cy="685800"/>
+            <a:off x="2311400" y="3364992"/>
+            <a:ext cx="1808480" cy="685800"/>
           </a:xfrm>
           <a:prstGeom prst="rect">
             <a:avLst/>
@@ -2833,8 +2695,8 @@
         </p:nvSpPr>
         <p:spPr>
           <a:xfrm>
-            <a:off x="2336800" y="3383280"/>
-            <a:ext cx="1788160" cy="685800"/>
+            <a:off x="2311400" y="3364992"/>
+            <a:ext cx="1808480" cy="685800"/>
           </a:xfrm>
           <a:prstGeom prst="rect">
             <a:avLst/>
@@ -2850,28 +2712,34 @@
               <a:buNone/>
             </a:pPr>
             <a:r>
-              <a:rPr lang="en-US" sz="1050" b="1" dirty="0">
+              <a:rPr lang="ja-JP" altLang="en-US" sz="1050" b="1" dirty="0">
                 <a:solidFill>
                   <a:srgbClr val="FFFFFF"/>
                 </a:solidFill>
+                <a:latin typeface="Noto Sans JP" pitchFamily="34" charset="0"/>
+                <a:ea typeface="Noto Sans JP" pitchFamily="34" charset="-122"/>
+                <a:cs typeface="Noto Sans JP" pitchFamily="34" charset="-120"/>
               </a:rPr>
               <a:t>ハンズオン①</a:t>
             </a:r>
-            <a:endParaRPr lang="en-US" sz="1050" dirty="0"/>
+            <a:endParaRPr lang="ja-JP" sz="1050" dirty="0"/>
           </a:p>
           <a:p>
             <a:pPr algn="ctr" indent="0" marL="0">
               <a:buNone/>
             </a:pPr>
             <a:r>
-              <a:rPr lang="en-US" sz="900" b="1" dirty="0">
+              <a:rPr lang="ja-JP" altLang="en-US" sz="900" b="1" dirty="0">
                 <a:solidFill>
                   <a:srgbClr val="FFFFFF"/>
                 </a:solidFill>
+                <a:latin typeface="Noto Sans JP" pitchFamily="34" charset="0"/>
+                <a:ea typeface="Noto Sans JP" pitchFamily="34" charset="-122"/>
+                <a:cs typeface="Noto Sans JP" pitchFamily="34" charset="-120"/>
               </a:rPr>
               <a:t>20分</a:t>
             </a:r>
-            <a:endParaRPr lang="en-US" sz="1050" dirty="0"/>
+            <a:endParaRPr lang="ja-JP" sz="1050" dirty="0"/>
           </a:p>
         </p:txBody>
       </p:sp>
@@ -2883,8 +2751,8 @@
         </p:nvSpPr>
         <p:spPr>
           <a:xfrm>
-            <a:off x="4124960" y="3383280"/>
-            <a:ext cx="894080" cy="685800"/>
+            <a:off x="4119880" y="3364992"/>
+            <a:ext cx="904240" cy="685800"/>
           </a:xfrm>
           <a:prstGeom prst="rect">
             <a:avLst/>
@@ -2908,8 +2776,8 @@
         </p:nvSpPr>
         <p:spPr>
           <a:xfrm>
-            <a:off x="4124960" y="3383280"/>
-            <a:ext cx="894080" cy="685800"/>
+            <a:off x="4119880" y="3364992"/>
+            <a:ext cx="904240" cy="685800"/>
           </a:xfrm>
           <a:prstGeom prst="rect">
             <a:avLst/>
@@ -2925,28 +2793,34 @@
               <a:buNone/>
             </a:pPr>
             <a:r>
-              <a:rPr lang="en-US" sz="1050" b="1" dirty="0">
+              <a:rPr lang="ja-JP" altLang="en-US" sz="1050" b="1" dirty="0">
                 <a:solidFill>
                   <a:srgbClr val="FFD600"/>
                 </a:solidFill>
+                <a:latin typeface="Noto Sans JP" pitchFamily="34" charset="0"/>
+                <a:ea typeface="Noto Sans JP" pitchFamily="34" charset="-122"/>
+                <a:cs typeface="Noto Sans JP" pitchFamily="34" charset="-120"/>
               </a:rPr>
               <a:t>説明②</a:t>
             </a:r>
-            <a:endParaRPr lang="en-US" sz="1050" dirty="0"/>
+            <a:endParaRPr lang="ja-JP" sz="1050" dirty="0"/>
           </a:p>
           <a:p>
             <a:pPr algn="ctr" indent="0" marL="0">
               <a:buNone/>
             </a:pPr>
             <a:r>
-              <a:rPr lang="en-US" sz="900" b="1" dirty="0">
+              <a:rPr lang="ja-JP" altLang="en-US" sz="900" b="1" dirty="0">
                 <a:solidFill>
                   <a:srgbClr val="FFD600"/>
                 </a:solidFill>
+                <a:latin typeface="Noto Sans JP" pitchFamily="34" charset="0"/>
+                <a:ea typeface="Noto Sans JP" pitchFamily="34" charset="-122"/>
+                <a:cs typeface="Noto Sans JP" pitchFamily="34" charset="-120"/>
               </a:rPr>
               <a:t>10分</a:t>
             </a:r>
-            <a:endParaRPr lang="en-US" sz="1050" dirty="0"/>
+            <a:endParaRPr lang="ja-JP" sz="1050" dirty="0"/>
           </a:p>
         </p:txBody>
       </p:sp>
@@ -2958,8 +2832,8 @@
         </p:nvSpPr>
         <p:spPr>
           <a:xfrm>
-            <a:off x="5019040" y="3383280"/>
-            <a:ext cx="1788160" cy="685800"/>
+            <a:off x="5024120" y="3364992"/>
+            <a:ext cx="1808480" cy="685800"/>
           </a:xfrm>
           <a:prstGeom prst="rect">
             <a:avLst/>
@@ -2983,8 +2857,8 @@
         </p:nvSpPr>
         <p:spPr>
           <a:xfrm>
-            <a:off x="5019040" y="3383280"/>
-            <a:ext cx="1788160" cy="685800"/>
+            <a:off x="5024120" y="3364992"/>
+            <a:ext cx="1808480" cy="685800"/>
           </a:xfrm>
           <a:prstGeom prst="rect">
             <a:avLst/>
@@ -3000,28 +2874,34 @@
               <a:buNone/>
             </a:pPr>
             <a:r>
-              <a:rPr lang="en-US" sz="1050" b="1" dirty="0">
+              <a:rPr lang="ja-JP" altLang="en-US" sz="1050" b="1" dirty="0">
                 <a:solidFill>
                   <a:srgbClr val="FFFFFF"/>
                 </a:solidFill>
+                <a:latin typeface="Noto Sans JP" pitchFamily="34" charset="0"/>
+                <a:ea typeface="Noto Sans JP" pitchFamily="34" charset="-122"/>
+                <a:cs typeface="Noto Sans JP" pitchFamily="34" charset="-120"/>
               </a:rPr>
               <a:t>ハンズオン②</a:t>
             </a:r>
-            <a:endParaRPr lang="en-US" sz="1050" dirty="0"/>
+            <a:endParaRPr lang="ja-JP" sz="1050" dirty="0"/>
           </a:p>
           <a:p>
             <a:pPr algn="ctr" indent="0" marL="0">
               <a:buNone/>
             </a:pPr>
             <a:r>
-              <a:rPr lang="en-US" sz="900" b="1" dirty="0">
+              <a:rPr lang="ja-JP" altLang="en-US" sz="900" b="1" dirty="0">
                 <a:solidFill>
                   <a:srgbClr val="FFFFFF"/>
                 </a:solidFill>
+                <a:latin typeface="Noto Sans JP" pitchFamily="34" charset="0"/>
+                <a:ea typeface="Noto Sans JP" pitchFamily="34" charset="-122"/>
+                <a:cs typeface="Noto Sans JP" pitchFamily="34" charset="-120"/>
               </a:rPr>
               <a:t>20分</a:t>
             </a:r>
-            <a:endParaRPr lang="en-US" sz="1050" dirty="0"/>
+            <a:endParaRPr lang="ja-JP" sz="1050" dirty="0"/>
           </a:p>
         </p:txBody>
       </p:sp>
@@ -3033,8 +2913,8 @@
         </p:nvSpPr>
         <p:spPr>
           <a:xfrm>
-            <a:off x="6807200" y="3383280"/>
-            <a:ext cx="1341120" cy="685800"/>
+            <a:off x="6832600" y="3364992"/>
+            <a:ext cx="1356360" cy="685800"/>
           </a:xfrm>
           <a:prstGeom prst="rect">
             <a:avLst/>
@@ -3058,8 +2938,8 @@
         </p:nvSpPr>
         <p:spPr>
           <a:xfrm>
-            <a:off x="6807200" y="3383280"/>
-            <a:ext cx="1341120" cy="685800"/>
+            <a:off x="6832600" y="3364992"/>
+            <a:ext cx="1356360" cy="685800"/>
           </a:xfrm>
           <a:prstGeom prst="rect">
             <a:avLst/>
@@ -3075,28 +2955,34 @@
               <a:buNone/>
             </a:pPr>
             <a:r>
-              <a:rPr lang="en-US" sz="1050" b="1" dirty="0">
+              <a:rPr lang="ja-JP" altLang="en-US" sz="1050" b="1" dirty="0">
                 <a:solidFill>
                   <a:srgbClr val="FFD600"/>
                 </a:solidFill>
+                <a:latin typeface="Noto Sans JP" pitchFamily="34" charset="0"/>
+                <a:ea typeface="Noto Sans JP" pitchFamily="34" charset="-122"/>
+                <a:cs typeface="Noto Sans JP" pitchFamily="34" charset="-120"/>
               </a:rPr>
               <a:t>質問・共有</a:t>
             </a:r>
-            <a:endParaRPr lang="en-US" sz="1050" dirty="0"/>
+            <a:endParaRPr lang="ja-JP" sz="1050" dirty="0"/>
           </a:p>
           <a:p>
             <a:pPr algn="ctr" indent="0" marL="0">
               <a:buNone/>
             </a:pPr>
             <a:r>
-              <a:rPr lang="en-US" sz="900" b="1" dirty="0">
+              <a:rPr lang="ja-JP" altLang="en-US" sz="900" b="1" dirty="0">
                 <a:solidFill>
                   <a:srgbClr val="FFD600"/>
                 </a:solidFill>
+                <a:latin typeface="Noto Sans JP" pitchFamily="34" charset="0"/>
+                <a:ea typeface="Noto Sans JP" pitchFamily="34" charset="-122"/>
+                <a:cs typeface="Noto Sans JP" pitchFamily="34" charset="-120"/>
               </a:rPr>
               <a:t>15分</a:t>
             </a:r>
-            <a:endParaRPr lang="en-US" sz="1050" dirty="0"/>
+            <a:endParaRPr lang="ja-JP" sz="1050" dirty="0"/>
           </a:p>
         </p:txBody>
       </p:sp>
@@ -3108,8 +2994,8 @@
         </p:nvSpPr>
         <p:spPr>
           <a:xfrm>
-            <a:off x="8148320" y="3383280"/>
-            <a:ext cx="447040" cy="685800"/>
+            <a:off x="8188960" y="3364992"/>
+            <a:ext cx="452120" cy="685800"/>
           </a:xfrm>
           <a:prstGeom prst="rect">
             <a:avLst/>
@@ -3133,8 +3019,8 @@
         </p:nvSpPr>
         <p:spPr>
           <a:xfrm>
-            <a:off x="8148320" y="3383280"/>
-            <a:ext cx="447040" cy="685800"/>
+            <a:off x="8188960" y="3364992"/>
+            <a:ext cx="452120" cy="685800"/>
           </a:xfrm>
           <a:prstGeom prst="rect">
             <a:avLst/>
@@ -3150,28 +3036,34 @@
               <a:buNone/>
             </a:pPr>
             <a:r>
-              <a:rPr lang="en-US" sz="850" b="1" dirty="0">
+              <a:rPr lang="ja-JP" altLang="en-US" sz="850" b="1" dirty="0">
                 <a:solidFill>
                   <a:srgbClr val="FFD600"/>
                 </a:solidFill>
+                <a:latin typeface="Noto Sans JP" pitchFamily="34" charset="0"/>
+                <a:ea typeface="Noto Sans JP" pitchFamily="34" charset="-122"/>
+                <a:cs typeface="Noto Sans JP" pitchFamily="34" charset="-120"/>
               </a:rPr>
               <a:t>宿題</a:t>
             </a:r>
-            <a:endParaRPr lang="en-US" sz="850" dirty="0"/>
+            <a:endParaRPr lang="ja-JP" sz="850" dirty="0"/>
           </a:p>
           <a:p>
             <a:pPr algn="ctr" indent="0" marL="0">
               <a:buNone/>
             </a:pPr>
             <a:r>
-              <a:rPr lang="en-US" sz="900" b="1" dirty="0">
+              <a:rPr lang="ja-JP" altLang="en-US" sz="900" b="1" dirty="0">
                 <a:solidFill>
                   <a:srgbClr val="FFD600"/>
                 </a:solidFill>
+                <a:latin typeface="Noto Sans JP" pitchFamily="34" charset="0"/>
+                <a:ea typeface="Noto Sans JP" pitchFamily="34" charset="-122"/>
+                <a:cs typeface="Noto Sans JP" pitchFamily="34" charset="-120"/>
               </a:rPr>
               <a:t>5分</a:t>
             </a:r>
-            <a:endParaRPr lang="en-US" sz="850" dirty="0"/>
+            <a:endParaRPr lang="ja-JP" sz="850" dirty="0"/>
           </a:p>
         </p:txBody>
       </p:sp>
@@ -3183,7 +3075,7 @@
         </p:nvSpPr>
         <p:spPr>
           <a:xfrm>
-            <a:off x="548640" y="4160520"/>
+            <a:off x="502920" y="4187952"/>
             <a:ext cx="3657600" cy="274320"/>
           </a:xfrm>
           <a:prstGeom prst="rect">
@@ -3200,10 +3092,13 @@
               <a:buNone/>
             </a:pPr>
             <a:r>
-              <a:rPr lang="en-US" sz="1000" dirty="0">
+              <a:rPr lang="ja-JP" altLang="en-US" sz="1050" b="1" dirty="0">
                 <a:solidFill>
                   <a:srgbClr val="1A1A1A"/>
                 </a:solidFill>
+                <a:latin typeface="Noto Sans JP" pitchFamily="34" charset="0"/>
+                <a:ea typeface="Noto Sans JP" pitchFamily="34" charset="-122"/>
+                <a:cs typeface="Noto Sans JP" pitchFamily="34" charset="-120"/>
               </a:rPr>
               <a:t>■ </a:t>
             </a:r>
@@ -3211,10 +3106,13 @@
               <a:buNone/>
             </a:pPr>
             <a:r>
-              <a:rPr lang="en-US" sz="1000" dirty="0">
-                <a:solidFill>
-                  <a:schemeClr val="tx2"/>
-                </a:solidFill>
+              <a:rPr lang="ja-JP" altLang="en-US" sz="1050" b="1" dirty="0">
+                <a:solidFill>
+                  <a:srgbClr val="1A1A1A"/>
+                </a:solidFill>
+                <a:latin typeface="Noto Sans JP" pitchFamily="34" charset="0"/>
+                <a:ea typeface="Noto Sans JP" pitchFamily="34" charset="-122"/>
+                <a:cs typeface="Noto Sans JP" pitchFamily="34" charset="-120"/>
               </a:rPr>
               <a:t>聞く　</a:t>
             </a:r>
@@ -3222,10 +3120,13 @@
               <a:buNone/>
             </a:pPr>
             <a:r>
-              <a:rPr lang="en-US" sz="1000" dirty="0">
+              <a:rPr lang="ja-JP" altLang="en-US" sz="1050" b="1" dirty="0">
                 <a:solidFill>
                   <a:srgbClr val="DD6420"/>
                 </a:solidFill>
+                <a:latin typeface="Noto Sans JP" pitchFamily="34" charset="0"/>
+                <a:ea typeface="Noto Sans JP" pitchFamily="34" charset="-122"/>
+                <a:cs typeface="Noto Sans JP" pitchFamily="34" charset="-120"/>
               </a:rPr>
               <a:t>■ </a:t>
             </a:r>
@@ -3233,14 +3134,17 @@
               <a:buNone/>
             </a:pPr>
             <a:r>
-              <a:rPr lang="en-US" sz="1000" dirty="0">
-                <a:solidFill>
-                  <a:schemeClr val="tx2"/>
-                </a:solidFill>
+              <a:rPr lang="ja-JP" altLang="en-US" sz="1050" b="1" dirty="0">
+                <a:solidFill>
+                  <a:srgbClr val="1A1A1A"/>
+                </a:solidFill>
+                <a:latin typeface="Noto Sans JP" pitchFamily="34" charset="0"/>
+                <a:ea typeface="Noto Sans JP" pitchFamily="34" charset="-122"/>
+                <a:cs typeface="Noto Sans JP" pitchFamily="34" charset="-120"/>
               </a:rPr>
               <a:t>手を動かす</a:t>
             </a:r>
-            <a:endParaRPr lang="en-US" sz="1000" dirty="0"/>
+            <a:endParaRPr lang="ja-JP" sz="1050" dirty="0"/>
           </a:p>
         </p:txBody>
       </p:sp>
@@ -3256,8 +3160,8 @@
         </p:nvSpPr>
         <p:spPr>
           <a:xfrm>
-            <a:off x="8229600" y="4773168"/>
-            <a:ext cx="365760" cy="228600"/>
+            <a:off x="8366760" y="4754880"/>
+            <a:ext cx="365760" cy="274320"/>
           </a:xfrm>
           <a:prstGeom prst="rect">
             <a:avLst/>
@@ -3269,20 +3173,23 @@
           </a:extLst>
         </p:spPr>
         <p:txBody>
-          <a:bodyPr/>
+          <a:bodyPr anchor="ctr"/>
           <a:lstStyle>
             <a:lvl1pPr>
-              <a:defRPr sz="900">
-                <a:solidFill>
-                  <a:srgbClr val="5A6872"/>
-                </a:solidFill>
+              <a:defRPr sz="850">
+                <a:solidFill>
+                  <a:srgbClr val="FFFFFF"/>
+                </a:solidFill>
+                <a:latin typeface="Noto Sans JP"/>
+                <a:ea typeface="Noto Sans JP"/>
+                <a:cs typeface="Noto Sans JP"/>
               </a:defRPr>
             </a:lvl1pPr>
           </a:lstStyle>
           <a:p>
             <a:pPr algn="r"/>
             <a:fld id="{F7021451-1387-4CA6-816F-3879F97B5CBC}" type="slidenum">
-              <a:rPr b="0" lang="en-US"/>
+              <a:rPr b="1" lang="en-US"/>
               <a:t>2</a:t>
             </a:fld>
             <a:endParaRPr lang="en-US"/>
@@ -3317,15 +3224,58 @@
       <p:sp>
         <p:nvSpPr>
           <p:cNvPr id="2" name="Text 0"/>
-          <p:cNvSpPr/>
-          <p:nvPr>
-            <p:ph idx="100" type="title" hasCustomPrompt="1"/>
-          </p:nvPr>
-        </p:nvSpPr>
-        <p:spPr>
-          <a:xfrm>
-            <a:off x="548640" y="658368"/>
-            <a:ext cx="8046720" cy="566928"/>
+          <p:cNvSpPr txBox="1"/>
+          <p:nvPr/>
+        </p:nvSpPr>
+        <p:spPr>
+          <a:xfrm rot="-180000">
+            <a:off x="411480" y="201168"/>
+            <a:ext cx="1478128" cy="352044"/>
+          </a:xfrm>
+          <a:prstGeom prst="rect">
+            <a:avLst/>
+          </a:prstGeom>
+          <a:solidFill>
+            <a:srgbClr val="1A1A1A"/>
+          </a:solidFill>
+          <a:ln>
+            <a:solidFill>
+              <a:srgbClr val="1A1A1A"/>
+            </a:solidFill>
+          </a:ln>
+        </p:spPr>
+        <p:txBody>
+          <a:bodyPr wrap="square" lIns="0" tIns="0" rIns="0" bIns="0" rtlCol="0" anchor="ctr"/>
+          <a:lstStyle/>
+          <a:p>
+            <a:pPr algn="ctr" indent="0" marL="0">
+              <a:buNone/>
+            </a:pPr>
+            <a:r>
+              <a:rPr lang="ja-JP" altLang="en-US" sz="1100" dirty="0">
+                <a:solidFill>
+                  <a:srgbClr val="FFFFFF"/>
+                </a:solidFill>
+                <a:latin typeface="Dela Gothic One" pitchFamily="34" charset="0"/>
+                <a:ea typeface="けいふぉんと" pitchFamily="34" charset="-122"/>
+                <a:cs typeface="Dela Gothic One" pitchFamily="34" charset="-120"/>
+              </a:rPr>
+              <a:t>説明① 10分</a:t>
+            </a:r>
+            <a:endParaRPr lang="ja-JP" sz="1100" dirty="0"/>
+          </a:p>
+        </p:txBody>
+      </p:sp>
+      <p:sp>
+        <p:nvSpPr>
+          <p:cNvPr id="3" name="Text 1"/>
+          <p:cNvSpPr txBox="1"/>
+          <p:nvPr/>
+        </p:nvSpPr>
+        <p:spPr>
+          <a:xfrm>
+            <a:off x="411480" y="502920"/>
+            <a:ext cx="8321040" cy="685800"/>
           </a:xfrm>
           <a:prstGeom prst="rect">
             <a:avLst/>
@@ -3334,86 +3284,60 @@
           <a:ln/>
         </p:spPr>
         <p:txBody>
-          <a:bodyPr wrap="square" lIns="0" tIns="0" rIns="0" bIns="0" rtlCol="0" anchor="ctr"/>
+          <a:bodyPr wrap="square" lIns="0" tIns="0" rIns="0" bIns="0" rtlCol="0" anchor="ctr">
+            <a:normAutofit/>
+          </a:bodyPr>
           <a:lstStyle/>
           <a:p>
-            <a:pPr algn="l" indent="0" marL="0">
+            <a:pPr indent="0" marL="0">
               <a:buNone/>
             </a:pPr>
             <a:r>
-              <a:rPr lang="en-US" sz="2400" b="1" dirty="0">
-                <a:solidFill>
-                  <a:schemeClr val="tx1"/>
-                </a:solidFill>
+              <a:rPr lang="ja-JP" altLang="en-US" sz="2600" dirty="0">
+                <a:solidFill>
+                  <a:srgbClr val="1A1A1A"/>
+                </a:solidFill>
+                <a:latin typeface="Dela Gothic One" pitchFamily="34" charset="0"/>
+                <a:ea typeface="けいふぉんと" pitchFamily="34" charset="-122"/>
+                <a:cs typeface="Dela Gothic One" pitchFamily="34" charset="-120"/>
               </a:rPr>
               <a:t>Larkの全体像</a:t>
             </a:r>
-            <a:endParaRPr lang="en-US" sz="2400" dirty="0"/>
-          </a:p>
-        </p:txBody>
-      </p:sp>
-      <p:sp>
-        <p:nvSpPr>
-          <p:cNvPr id="3" name="chip"/>
+            <a:endParaRPr lang="ja-JP" sz="2600" dirty="0"/>
+          </a:p>
+        </p:txBody>
+      </p:sp>
+      <p:sp>
+        <p:nvSpPr>
+          <p:cNvPr id="5" name="Shape 2"/>
           <p:cNvSpPr/>
           <p:nvPr/>
         </p:nvSpPr>
         <p:spPr>
           <a:xfrm>
-            <a:off x="548640" y="292608"/>
-            <a:ext cx="1344168" cy="292608"/>
-          </a:xfrm>
-          <a:prstGeom prst="roundRect">
-            <a:avLst>
-              <a:gd name="adj" fmla="val 50000"/>
-            </a:avLst>
+            <a:off x="502920" y="1417320"/>
+            <a:ext cx="8138160" cy="2194560"/>
+          </a:xfrm>
+          <a:prstGeom prst="rect">
+            <a:avLst/>
           </a:prstGeom>
           <a:solidFill>
-            <a:schemeClr val="tx1"/>
+            <a:srgbClr val="FFFFFF"/>
           </a:solidFill>
-          <a:ln w="12700">
+          <a:ln w="25400">
             <a:solidFill>
-              <a:schemeClr val="tx1"/>
+              <a:srgbClr val="1A1A1A"/>
             </a:solidFill>
             <a:prstDash val="solid"/>
           </a:ln>
-        </p:spPr>
-      </p:sp>
-      <p:sp>
-        <p:nvSpPr>
-          <p:cNvPr id="4" name="chip-text"/>
-          <p:cNvSpPr txBox="1"/>
-          <p:nvPr/>
-        </p:nvSpPr>
-        <p:spPr>
-          <a:xfrm>
-            <a:off x="548640" y="292608"/>
-            <a:ext cx="1344168" cy="292608"/>
-          </a:xfrm>
-          <a:prstGeom prst="rect">
-            <a:avLst/>
-          </a:prstGeom>
-          <a:noFill/>
-          <a:ln/>
-        </p:spPr>
-        <p:txBody>
-          <a:bodyPr wrap="square" lIns="0" tIns="0" rIns="0" bIns="0" rtlCol="0" anchor="ctr"/>
-          <a:lstStyle/>
-          <a:p>
-            <a:pPr algn="ctr" indent="0" marL="0">
-              <a:buNone/>
-            </a:pPr>
-            <a:r>
-              <a:rPr lang="en-US" sz="1100" b="1" dirty="0">
-                <a:solidFill>
-                  <a:schemeClr val="accent1"/>
-                </a:solidFill>
-              </a:rPr>
-              <a:t>説明① 10分</a:t>
-            </a:r>
-            <a:endParaRPr lang="en-US" sz="1100" dirty="0"/>
-          </a:p>
-        </p:txBody>
+          <a:effectLst>
+            <a:outerShdw sx="100000" sy="100000" kx="0" ky="0" algn="bl" rotWithShape="0" blurRad="101600" dist="50800" dir="2700000">
+              <a:srgbClr val="1A1A1A">
+                <a:alpha val="100000"/>
+              </a:srgbClr>
+            </a:outerShdw>
+          </a:effectLst>
+        </p:spPr>
       </p:sp>
       <p:graphicFrame>
         <p:nvGraphicFramePr>
@@ -3430,17 +3354,17 @@
           </p:nvPr>
         </p:nvGraphicFramePr>
         <p:xfrm>
-          <a:off x="548640" y="1463040"/>
-          <a:ext cx="8046720" cy="914400"/>
+          <a:off x="502920" y="1417320"/>
+          <a:ext cx="8138160" cy="914400"/>
         </p:xfrm>
         <a:graphic>
           <a:graphicData uri="http://schemas.openxmlformats.org/drawingml/2006/table">
             <a:tbl>
               <a:tblPr/>
               <a:tblGrid>
-                <a:gridCol w="1788160"/>
-                <a:gridCol w="2503424"/>
-                <a:gridCol w="3755136"/>
+                <a:gridCol w="1808480"/>
+                <a:gridCol w="2531872"/>
+                <a:gridCol w="3797808"/>
               </a:tblGrid>
               <a:tr h="365760">
                 <a:tc>
@@ -3452,47 +3376,54 @@
                         <a:buNone/>
                       </a:pPr>
                       <a:r>
-                        <a:rPr lang="en-US" sz="1200" b="1" dirty="0">
+                        <a:rPr lang="en-US" sz="1250" b="1" dirty="0">
                           <a:solidFill>
-                            <a:srgbClr val="FFD600"/>
+                            <a:srgbClr val="FFFFFF"/>
                           </a:solidFill>
+                          <a:latin typeface="Noto Sans JP" pitchFamily="34" charset="0"/>
+                          <a:ea typeface="Noto Sans JP" pitchFamily="34" charset="-122"/>
+                          <a:cs typeface="Noto Sans JP" pitchFamily="34" charset="-120"/>
                         </a:rPr>
                         <a:t>機能</a:t>
                       </a:r>
-                      <a:endParaRPr lang="en-US" sz="1200" dirty="0"/>
+                      <a:endParaRPr lang="en-US" sz="1250" dirty="0">
+                        <a:latin typeface="Noto Sans JP" charset="0"/>
+                        <a:ea typeface="Noto Sans JP" charset="0"/>
+                        <a:cs typeface="Noto Sans JP" charset="0"/>
+                      </a:endParaRPr>
                     </a:p>
                   </a:txBody>
                   <a:tcPr marL="91440" marR="91440" marT="0" marB="0" anchor="ctr">
-                    <a:lnL w="9525" cap="flat" cmpd="sng" algn="ctr">
+                    <a:lnL w="12700" cap="flat" cmpd="sng" algn="ctr">
                       <a:solidFill>
-                        <a:srgbClr val="BBBBBB"/>
+                        <a:srgbClr val="1A1A1A"/>
                       </a:solidFill>
                       <a:prstDash val="solid"/>
                       <a:round/>
                       <a:headEnd type="none" w="med" len="med"/>
                       <a:tailEnd type="none" w="med" len="med"/>
                     </a:lnL>
-                    <a:lnR w="9525" cap="flat" cmpd="sng" algn="ctr">
+                    <a:lnR w="12700" cap="flat" cmpd="sng" algn="ctr">
                       <a:solidFill>
-                        <a:srgbClr val="BBBBBB"/>
+                        <a:srgbClr val="1A1A1A"/>
                       </a:solidFill>
                       <a:prstDash val="solid"/>
                       <a:round/>
                       <a:headEnd type="none" w="med" len="med"/>
                       <a:tailEnd type="none" w="med" len="med"/>
                     </a:lnR>
-                    <a:lnT w="9525" cap="flat" cmpd="sng" algn="ctr">
+                    <a:lnT w="12700" cap="flat" cmpd="sng" algn="ctr">
                       <a:solidFill>
-                        <a:srgbClr val="BBBBBB"/>
+                        <a:srgbClr val="1A1A1A"/>
                       </a:solidFill>
                       <a:prstDash val="solid"/>
                       <a:round/>
                       <a:headEnd type="none" w="med" len="med"/>
                       <a:tailEnd type="none" w="med" len="med"/>
                     </a:lnT>
-                    <a:lnB w="9525" cap="flat" cmpd="sng" algn="ctr">
+                    <a:lnB w="12700" cap="flat" cmpd="sng" algn="ctr">
                       <a:solidFill>
-                        <a:srgbClr val="BBBBBB"/>
+                        <a:srgbClr val="1A1A1A"/>
                       </a:solidFill>
                       <a:prstDash val="solid"/>
                       <a:round/>
@@ -3513,47 +3444,54 @@
                         <a:buNone/>
                       </a:pPr>
                       <a:r>
-                        <a:rPr lang="en-US" sz="1200" b="1" dirty="0">
+                        <a:rPr lang="en-US" sz="1250" b="1" dirty="0">
                           <a:solidFill>
-                            <a:srgbClr val="FFD600"/>
+                            <a:srgbClr val="FFFFFF"/>
                           </a:solidFill>
+                          <a:latin typeface="Noto Sans JP" pitchFamily="34" charset="0"/>
+                          <a:ea typeface="Noto Sans JP" pitchFamily="34" charset="-122"/>
+                          <a:cs typeface="Noto Sans JP" pitchFamily="34" charset="-120"/>
                         </a:rPr>
                         <a:t>ひとことで</a:t>
                       </a:r>
-                      <a:endParaRPr lang="en-US" sz="1200" dirty="0"/>
+                      <a:endParaRPr lang="en-US" sz="1250" dirty="0">
+                        <a:latin typeface="Noto Sans JP" charset="0"/>
+                        <a:ea typeface="Noto Sans JP" charset="0"/>
+                        <a:cs typeface="Noto Sans JP" charset="0"/>
+                      </a:endParaRPr>
                     </a:p>
                   </a:txBody>
                   <a:tcPr marL="91440" marR="91440" marT="0" marB="0" anchor="ctr">
-                    <a:lnL w="9525" cap="flat" cmpd="sng" algn="ctr">
+                    <a:lnL w="12700" cap="flat" cmpd="sng" algn="ctr">
                       <a:solidFill>
-                        <a:srgbClr val="BBBBBB"/>
+                        <a:srgbClr val="1A1A1A"/>
                       </a:solidFill>
                       <a:prstDash val="solid"/>
                       <a:round/>
                       <a:headEnd type="none" w="med" len="med"/>
                       <a:tailEnd type="none" w="med" len="med"/>
                     </a:lnL>
-                    <a:lnR w="9525" cap="flat" cmpd="sng" algn="ctr">
+                    <a:lnR w="12700" cap="flat" cmpd="sng" algn="ctr">
                       <a:solidFill>
-                        <a:srgbClr val="BBBBBB"/>
+                        <a:srgbClr val="1A1A1A"/>
                       </a:solidFill>
                       <a:prstDash val="solid"/>
                       <a:round/>
                       <a:headEnd type="none" w="med" len="med"/>
                       <a:tailEnd type="none" w="med" len="med"/>
                     </a:lnR>
-                    <a:lnT w="9525" cap="flat" cmpd="sng" algn="ctr">
+                    <a:lnT w="12700" cap="flat" cmpd="sng" algn="ctr">
                       <a:solidFill>
-                        <a:srgbClr val="BBBBBB"/>
+                        <a:srgbClr val="1A1A1A"/>
                       </a:solidFill>
                       <a:prstDash val="solid"/>
                       <a:round/>
                       <a:headEnd type="none" w="med" len="med"/>
                       <a:tailEnd type="none" w="med" len="med"/>
                     </a:lnT>
-                    <a:lnB w="9525" cap="flat" cmpd="sng" algn="ctr">
+                    <a:lnB w="12700" cap="flat" cmpd="sng" algn="ctr">
                       <a:solidFill>
-                        <a:srgbClr val="BBBBBB"/>
+                        <a:srgbClr val="1A1A1A"/>
                       </a:solidFill>
                       <a:prstDash val="solid"/>
                       <a:round/>
@@ -3574,47 +3512,54 @@
                         <a:buNone/>
                       </a:pPr>
                       <a:r>
-                        <a:rPr lang="en-US" sz="1200" b="1" dirty="0">
+                        <a:rPr lang="en-US" sz="1250" b="1" dirty="0">
                           <a:solidFill>
-                            <a:srgbClr val="FFD600"/>
+                            <a:srgbClr val="FFFFFF"/>
                           </a:solidFill>
+                          <a:latin typeface="Noto Sans JP" pitchFamily="34" charset="0"/>
+                          <a:ea typeface="Noto Sans JP" pitchFamily="34" charset="-122"/>
+                          <a:cs typeface="Noto Sans JP" pitchFamily="34" charset="-120"/>
                         </a:rPr>
                         <a:t>この講座での使い方</a:t>
                       </a:r>
-                      <a:endParaRPr lang="en-US" sz="1200" dirty="0"/>
+                      <a:endParaRPr lang="en-US" sz="1250" dirty="0">
+                        <a:latin typeface="Noto Sans JP" charset="0"/>
+                        <a:ea typeface="Noto Sans JP" charset="0"/>
+                        <a:cs typeface="Noto Sans JP" charset="0"/>
+                      </a:endParaRPr>
                     </a:p>
                   </a:txBody>
                   <a:tcPr marL="91440" marR="91440" marT="0" marB="0" anchor="ctr">
-                    <a:lnL w="9525" cap="flat" cmpd="sng" algn="ctr">
+                    <a:lnL w="12700" cap="flat" cmpd="sng" algn="ctr">
                       <a:solidFill>
-                        <a:srgbClr val="BBBBBB"/>
+                        <a:srgbClr val="1A1A1A"/>
                       </a:solidFill>
                       <a:prstDash val="solid"/>
                       <a:round/>
                       <a:headEnd type="none" w="med" len="med"/>
                       <a:tailEnd type="none" w="med" len="med"/>
                     </a:lnL>
-                    <a:lnR w="9525" cap="flat" cmpd="sng" algn="ctr">
+                    <a:lnR w="12700" cap="flat" cmpd="sng" algn="ctr">
                       <a:solidFill>
-                        <a:srgbClr val="BBBBBB"/>
+                        <a:srgbClr val="1A1A1A"/>
                       </a:solidFill>
                       <a:prstDash val="solid"/>
                       <a:round/>
                       <a:headEnd type="none" w="med" len="med"/>
                       <a:tailEnd type="none" w="med" len="med"/>
                     </a:lnR>
-                    <a:lnT w="9525" cap="flat" cmpd="sng" algn="ctr">
+                    <a:lnT w="12700" cap="flat" cmpd="sng" algn="ctr">
                       <a:solidFill>
-                        <a:srgbClr val="BBBBBB"/>
+                        <a:srgbClr val="1A1A1A"/>
                       </a:solidFill>
                       <a:prstDash val="solid"/>
                       <a:round/>
                       <a:headEnd type="none" w="med" len="med"/>
                       <a:tailEnd type="none" w="med" len="med"/>
                     </a:lnT>
-                    <a:lnB w="9525" cap="flat" cmpd="sng" algn="ctr">
+                    <a:lnB w="12700" cap="flat" cmpd="sng" algn="ctr">
                       <a:solidFill>
-                        <a:srgbClr val="BBBBBB"/>
+                        <a:srgbClr val="1A1A1A"/>
                       </a:solidFill>
                       <a:prstDash val="solid"/>
                       <a:round/>
@@ -3639,45 +3584,52 @@
                       <a:r>
                         <a:rPr lang="en-US" sz="1200" b="1" dirty="0">
                           <a:solidFill>
-                            <a:srgbClr val="1A1A1A"/>
+                            <a:srgbClr val="DD6420"/>
                           </a:solidFill>
+                          <a:latin typeface="Noto Sans JP" pitchFamily="34" charset="0"/>
+                          <a:ea typeface="Noto Sans JP" pitchFamily="34" charset="-122"/>
+                          <a:cs typeface="Noto Sans JP" pitchFamily="34" charset="-120"/>
                         </a:rPr>
                         <a:t>メッセンジャー</a:t>
                       </a:r>
-                      <a:endParaRPr lang="en-US" sz="1200" dirty="0"/>
+                      <a:endParaRPr lang="en-US" sz="1200" dirty="0">
+                        <a:latin typeface="Noto Sans JP" charset="0"/>
+                        <a:ea typeface="Noto Sans JP" charset="0"/>
+                        <a:cs typeface="Noto Sans JP" charset="0"/>
+                      </a:endParaRPr>
                     </a:p>
                   </a:txBody>
                   <a:tcPr marL="91440" marR="91440" marT="0" marB="0" anchor="ctr">
-                    <a:lnL w="9525" cap="flat" cmpd="sng" algn="ctr">
+                    <a:lnL w="12700" cap="flat" cmpd="sng" algn="ctr">
                       <a:solidFill>
-                        <a:srgbClr val="BBBBBB"/>
+                        <a:srgbClr val="1A1A1A"/>
                       </a:solidFill>
                       <a:prstDash val="solid"/>
                       <a:round/>
                       <a:headEnd type="none" w="med" len="med"/>
                       <a:tailEnd type="none" w="med" len="med"/>
                     </a:lnL>
-                    <a:lnR w="9525" cap="flat" cmpd="sng" algn="ctr">
+                    <a:lnR w="12700" cap="flat" cmpd="sng" algn="ctr">
                       <a:solidFill>
-                        <a:srgbClr val="BBBBBB"/>
+                        <a:srgbClr val="1A1A1A"/>
                       </a:solidFill>
                       <a:prstDash val="solid"/>
                       <a:round/>
                       <a:headEnd type="none" w="med" len="med"/>
                       <a:tailEnd type="none" w="med" len="med"/>
                     </a:lnR>
-                    <a:lnT w="9525" cap="flat" cmpd="sng" algn="ctr">
+                    <a:lnT w="12700" cap="flat" cmpd="sng" algn="ctr">
                       <a:solidFill>
-                        <a:srgbClr val="BBBBBB"/>
+                        <a:srgbClr val="1A1A1A"/>
                       </a:solidFill>
                       <a:prstDash val="solid"/>
                       <a:round/>
                       <a:headEnd type="none" w="med" len="med"/>
                       <a:tailEnd type="none" w="med" len="med"/>
                     </a:lnT>
-                    <a:lnB w="9525" cap="flat" cmpd="sng" algn="ctr">
+                    <a:lnB w="12700" cap="flat" cmpd="sng" algn="ctr">
                       <a:solidFill>
-                        <a:srgbClr val="BBBBBB"/>
+                        <a:srgbClr val="1A1A1A"/>
                       </a:solidFill>
                       <a:prstDash val="solid"/>
                       <a:round/>
@@ -3698,47 +3650,54 @@
                         <a:buNone/>
                       </a:pPr>
                       <a:r>
-                        <a:rPr lang="en-US" sz="1200" dirty="0">
+                        <a:rPr lang="en-US" sz="1200" b="1" dirty="0">
                           <a:solidFill>
                             <a:srgbClr val="1A1A1A"/>
                           </a:solidFill>
+                          <a:latin typeface="Noto Sans JP Medium" pitchFamily="34" charset="0"/>
+                          <a:ea typeface="Noto Sans JP Medium" pitchFamily="34" charset="-122"/>
+                          <a:cs typeface="Noto Sans JP Medium" pitchFamily="34" charset="-120"/>
                         </a:rPr>
                         <a:t>社内チャット</a:t>
                       </a:r>
-                      <a:endParaRPr lang="en-US" sz="1200" dirty="0"/>
+                      <a:endParaRPr lang="en-US" sz="1200" dirty="0">
+                        <a:latin typeface="Noto Sans JP Medium" charset="0"/>
+                        <a:ea typeface="Noto Sans JP Medium" charset="0"/>
+                        <a:cs typeface="Noto Sans JP Medium" charset="0"/>
+                      </a:endParaRPr>
                     </a:p>
                   </a:txBody>
                   <a:tcPr marL="91440" marR="91440" marT="0" marB="0" anchor="ctr">
-                    <a:lnL w="9525" cap="flat" cmpd="sng" algn="ctr">
+                    <a:lnL w="12700" cap="flat" cmpd="sng" algn="ctr">
                       <a:solidFill>
-                        <a:srgbClr val="BBBBBB"/>
+                        <a:srgbClr val="1A1A1A"/>
                       </a:solidFill>
                       <a:prstDash val="solid"/>
                       <a:round/>
                       <a:headEnd type="none" w="med" len="med"/>
                       <a:tailEnd type="none" w="med" len="med"/>
                     </a:lnL>
-                    <a:lnR w="9525" cap="flat" cmpd="sng" algn="ctr">
+                    <a:lnR w="12700" cap="flat" cmpd="sng" algn="ctr">
                       <a:solidFill>
-                        <a:srgbClr val="BBBBBB"/>
+                        <a:srgbClr val="1A1A1A"/>
                       </a:solidFill>
                       <a:prstDash val="solid"/>
                       <a:round/>
                       <a:headEnd type="none" w="med" len="med"/>
                       <a:tailEnd type="none" w="med" len="med"/>
                     </a:lnR>
-                    <a:lnT w="9525" cap="flat" cmpd="sng" algn="ctr">
+                    <a:lnT w="12700" cap="flat" cmpd="sng" algn="ctr">
                       <a:solidFill>
-                        <a:srgbClr val="BBBBBB"/>
+                        <a:srgbClr val="1A1A1A"/>
                       </a:solidFill>
                       <a:prstDash val="solid"/>
                       <a:round/>
                       <a:headEnd type="none" w="med" len="med"/>
                       <a:tailEnd type="none" w="med" len="med"/>
                     </a:lnT>
-                    <a:lnB w="9525" cap="flat" cmpd="sng" algn="ctr">
+                    <a:lnB w="12700" cap="flat" cmpd="sng" algn="ctr">
                       <a:solidFill>
-                        <a:srgbClr val="BBBBBB"/>
+                        <a:srgbClr val="1A1A1A"/>
                       </a:solidFill>
                       <a:prstDash val="solid"/>
                       <a:round/>
@@ -3759,47 +3718,54 @@
                         <a:buNone/>
                       </a:pPr>
                       <a:r>
-                        <a:rPr lang="en-US" sz="1200" dirty="0">
+                        <a:rPr lang="en-US" sz="1200" b="1" dirty="0">
                           <a:solidFill>
                             <a:srgbClr val="1A1A1A"/>
                           </a:solidFill>
+                          <a:latin typeface="Noto Sans JP Medium" pitchFamily="34" charset="0"/>
+                          <a:ea typeface="Noto Sans JP Medium" pitchFamily="34" charset="-122"/>
+                          <a:cs typeface="Noto Sans JP Medium" pitchFamily="34" charset="-120"/>
                         </a:rPr>
                         <a:t>講座グループ、通知の受け取り先</a:t>
                       </a:r>
-                      <a:endParaRPr lang="en-US" sz="1200" dirty="0"/>
+                      <a:endParaRPr lang="en-US" sz="1200" dirty="0">
+                        <a:latin typeface="Noto Sans JP Medium" charset="0"/>
+                        <a:ea typeface="Noto Sans JP Medium" charset="0"/>
+                        <a:cs typeface="Noto Sans JP Medium" charset="0"/>
+                      </a:endParaRPr>
                     </a:p>
                   </a:txBody>
                   <a:tcPr marL="91440" marR="91440" marT="0" marB="0" anchor="ctr">
-                    <a:lnL w="9525" cap="flat" cmpd="sng" algn="ctr">
+                    <a:lnL w="12700" cap="flat" cmpd="sng" algn="ctr">
                       <a:solidFill>
-                        <a:srgbClr val="BBBBBB"/>
+                        <a:srgbClr val="1A1A1A"/>
                       </a:solidFill>
                       <a:prstDash val="solid"/>
                       <a:round/>
                       <a:headEnd type="none" w="med" len="med"/>
                       <a:tailEnd type="none" w="med" len="med"/>
                     </a:lnL>
-                    <a:lnR w="9525" cap="flat" cmpd="sng" algn="ctr">
+                    <a:lnR w="12700" cap="flat" cmpd="sng" algn="ctr">
                       <a:solidFill>
-                        <a:srgbClr val="BBBBBB"/>
+                        <a:srgbClr val="1A1A1A"/>
                       </a:solidFill>
                       <a:prstDash val="solid"/>
                       <a:round/>
                       <a:headEnd type="none" w="med" len="med"/>
                       <a:tailEnd type="none" w="med" len="med"/>
                     </a:lnR>
-                    <a:lnT w="9525" cap="flat" cmpd="sng" algn="ctr">
+                    <a:lnT w="12700" cap="flat" cmpd="sng" algn="ctr">
                       <a:solidFill>
-                        <a:srgbClr val="BBBBBB"/>
+                        <a:srgbClr val="1A1A1A"/>
                       </a:solidFill>
                       <a:prstDash val="solid"/>
                       <a:round/>
                       <a:headEnd type="none" w="med" len="med"/>
                       <a:tailEnd type="none" w="med" len="med"/>
                     </a:lnT>
-                    <a:lnB w="9525" cap="flat" cmpd="sng" algn="ctr">
+                    <a:lnB w="12700" cap="flat" cmpd="sng" algn="ctr">
                       <a:solidFill>
-                        <a:srgbClr val="BBBBBB"/>
+                        <a:srgbClr val="1A1A1A"/>
                       </a:solidFill>
                       <a:prstDash val="solid"/>
                       <a:round/>
@@ -3824,230 +3790,52 @@
                       <a:r>
                         <a:rPr lang="en-US" sz="1200" b="1" dirty="0">
                           <a:solidFill>
-                            <a:srgbClr val="1A1A1A"/>
+                            <a:srgbClr val="DD6420"/>
                           </a:solidFill>
+                          <a:latin typeface="Noto Sans JP" pitchFamily="34" charset="0"/>
+                          <a:ea typeface="Noto Sans JP" pitchFamily="34" charset="-122"/>
+                          <a:cs typeface="Noto Sans JP" pitchFamily="34" charset="-120"/>
                         </a:rPr>
                         <a:t>Docs</a:t>
                       </a:r>
-                      <a:endParaRPr lang="en-US" sz="1200" dirty="0"/>
+                      <a:endParaRPr lang="en-US" sz="1200" dirty="0">
+                        <a:latin typeface="Noto Sans JP" charset="0"/>
+                        <a:ea typeface="Noto Sans JP" charset="0"/>
+                        <a:cs typeface="Noto Sans JP" charset="0"/>
+                      </a:endParaRPr>
                     </a:p>
                   </a:txBody>
                   <a:tcPr marL="91440" marR="91440" marT="0" marB="0" anchor="ctr">
-                    <a:lnL w="9525" cap="flat" cmpd="sng" algn="ctr">
+                    <a:lnL w="12700" cap="flat" cmpd="sng" algn="ctr">
                       <a:solidFill>
-                        <a:srgbClr val="BBBBBB"/>
+                        <a:srgbClr val="1A1A1A"/>
                       </a:solidFill>
                       <a:prstDash val="solid"/>
                       <a:round/>
                       <a:headEnd type="none" w="med" len="med"/>
                       <a:tailEnd type="none" w="med" len="med"/>
                     </a:lnL>
-                    <a:lnR w="9525" cap="flat" cmpd="sng" algn="ctr">
+                    <a:lnR w="12700" cap="flat" cmpd="sng" algn="ctr">
                       <a:solidFill>
-                        <a:srgbClr val="BBBBBB"/>
+                        <a:srgbClr val="1A1A1A"/>
                       </a:solidFill>
                       <a:prstDash val="solid"/>
                       <a:round/>
                       <a:headEnd type="none" w="med" len="med"/>
                       <a:tailEnd type="none" w="med" len="med"/>
                     </a:lnR>
-                    <a:lnT w="9525" cap="flat" cmpd="sng" algn="ctr">
+                    <a:lnT w="12700" cap="flat" cmpd="sng" algn="ctr">
                       <a:solidFill>
-                        <a:srgbClr val="BBBBBB"/>
+                        <a:srgbClr val="1A1A1A"/>
                       </a:solidFill>
                       <a:prstDash val="solid"/>
                       <a:round/>
                       <a:headEnd type="none" w="med" len="med"/>
                       <a:tailEnd type="none" w="med" len="med"/>
                     </a:lnT>
-                    <a:lnB w="9525" cap="flat" cmpd="sng" algn="ctr">
+                    <a:lnB w="12700" cap="flat" cmpd="sng" algn="ctr">
                       <a:solidFill>
-                        <a:srgbClr val="BBBBBB"/>
-                      </a:solidFill>
-                      <a:prstDash val="solid"/>
-                      <a:round/>
-                      <a:headEnd type="none" w="med" len="med"/>
-                      <a:tailEnd type="none" w="med" len="med"/>
-                    </a:lnB>
-                    <a:solidFill>
-                      <a:srgbClr val="F4F4F4"/>
-                    </a:solidFill>
-                  </a:tcPr>
-                </a:tc>
-                <a:tc>
-                  <a:txBody>
-                    <a:bodyPr/>
-                    <a:lstStyle/>
-                    <a:p>
-                      <a:pPr indent="0" marL="0">
-                        <a:buNone/>
-                      </a:pPr>
-                      <a:r>
-                        <a:rPr lang="en-US" sz="1200" dirty="0">
-                          <a:solidFill>
-                            <a:srgbClr val="1A1A1A"/>
-                          </a:solidFill>
-                        </a:rPr>
-                        <a:t>共同編集できる文書</a:t>
-                      </a:r>
-                      <a:endParaRPr lang="en-US" sz="1200" dirty="0"/>
-                    </a:p>
-                  </a:txBody>
-                  <a:tcPr marL="91440" marR="91440" marT="0" marB="0" anchor="ctr">
-                    <a:lnL w="9525" cap="flat" cmpd="sng" algn="ctr">
-                      <a:solidFill>
-                        <a:srgbClr val="BBBBBB"/>
-                      </a:solidFill>
-                      <a:prstDash val="solid"/>
-                      <a:round/>
-                      <a:headEnd type="none" w="med" len="med"/>
-                      <a:tailEnd type="none" w="med" len="med"/>
-                    </a:lnL>
-                    <a:lnR w="9525" cap="flat" cmpd="sng" algn="ctr">
-                      <a:solidFill>
-                        <a:srgbClr val="BBBBBB"/>
-                      </a:solidFill>
-                      <a:prstDash val="solid"/>
-                      <a:round/>
-                      <a:headEnd type="none" w="med" len="med"/>
-                      <a:tailEnd type="none" w="med" len="med"/>
-                    </a:lnR>
-                    <a:lnT w="9525" cap="flat" cmpd="sng" algn="ctr">
-                      <a:solidFill>
-                        <a:srgbClr val="BBBBBB"/>
-                      </a:solidFill>
-                      <a:prstDash val="solid"/>
-                      <a:round/>
-                      <a:headEnd type="none" w="med" len="med"/>
-                      <a:tailEnd type="none" w="med" len="med"/>
-                    </a:lnT>
-                    <a:lnB w="9525" cap="flat" cmpd="sng" algn="ctr">
-                      <a:solidFill>
-                        <a:srgbClr val="BBBBBB"/>
-                      </a:solidFill>
-                      <a:prstDash val="solid"/>
-                      <a:round/>
-                      <a:headEnd type="none" w="med" len="med"/>
-                      <a:tailEnd type="none" w="med" len="med"/>
-                    </a:lnB>
-                    <a:solidFill>
-                      <a:srgbClr val="F4F4F4"/>
-                    </a:solidFill>
-                  </a:tcPr>
-                </a:tc>
-                <a:tc>
-                  <a:txBody>
-                    <a:bodyPr/>
-                    <a:lstStyle/>
-                    <a:p>
-                      <a:pPr indent="0" marL="0">
-                        <a:buNone/>
-                      </a:pPr>
-                      <a:r>
-                        <a:rPr lang="en-US" sz="1200" dirty="0">
-                          <a:solidFill>
-                            <a:srgbClr val="1A1A1A"/>
-                          </a:solidFill>
-                        </a:rPr>
-                        <a:t>設計シート・議事録</a:t>
-                      </a:r>
-                      <a:endParaRPr lang="en-US" sz="1200" dirty="0"/>
-                    </a:p>
-                  </a:txBody>
-                  <a:tcPr marL="91440" marR="91440" marT="0" marB="0" anchor="ctr">
-                    <a:lnL w="9525" cap="flat" cmpd="sng" algn="ctr">
-                      <a:solidFill>
-                        <a:srgbClr val="BBBBBB"/>
-                      </a:solidFill>
-                      <a:prstDash val="solid"/>
-                      <a:round/>
-                      <a:headEnd type="none" w="med" len="med"/>
-                      <a:tailEnd type="none" w="med" len="med"/>
-                    </a:lnL>
-                    <a:lnR w="9525" cap="flat" cmpd="sng" algn="ctr">
-                      <a:solidFill>
-                        <a:srgbClr val="BBBBBB"/>
-                      </a:solidFill>
-                      <a:prstDash val="solid"/>
-                      <a:round/>
-                      <a:headEnd type="none" w="med" len="med"/>
-                      <a:tailEnd type="none" w="med" len="med"/>
-                    </a:lnR>
-                    <a:lnT w="9525" cap="flat" cmpd="sng" algn="ctr">
-                      <a:solidFill>
-                        <a:srgbClr val="BBBBBB"/>
-                      </a:solidFill>
-                      <a:prstDash val="solid"/>
-                      <a:round/>
-                      <a:headEnd type="none" w="med" len="med"/>
-                      <a:tailEnd type="none" w="med" len="med"/>
-                    </a:lnT>
-                    <a:lnB w="9525" cap="flat" cmpd="sng" algn="ctr">
-                      <a:solidFill>
-                        <a:srgbClr val="BBBBBB"/>
-                      </a:solidFill>
-                      <a:prstDash val="solid"/>
-                      <a:round/>
-                      <a:headEnd type="none" w="med" len="med"/>
-                      <a:tailEnd type="none" w="med" len="med"/>
-                    </a:lnB>
-                    <a:solidFill>
-                      <a:srgbClr val="F4F4F4"/>
-                    </a:solidFill>
-                  </a:tcPr>
-                </a:tc>
-              </a:tr>
-              <a:tr h="365760">
-                <a:tc>
-                  <a:txBody>
-                    <a:bodyPr/>
-                    <a:lstStyle/>
-                    <a:p>
-                      <a:pPr indent="0" marL="0">
-                        <a:buNone/>
-                      </a:pPr>
-                      <a:r>
-                        <a:rPr lang="en-US" sz="1200" b="1" dirty="0">
-                          <a:solidFill>
-                            <a:srgbClr val="1A1A1A"/>
-                          </a:solidFill>
-                        </a:rPr>
-                        <a:t>Wiki</a:t>
-                      </a:r>
-                      <a:endParaRPr lang="en-US" sz="1200" dirty="0"/>
-                    </a:p>
-                  </a:txBody>
-                  <a:tcPr marL="91440" marR="91440" marT="0" marB="0" anchor="ctr">
-                    <a:lnL w="9525" cap="flat" cmpd="sng" algn="ctr">
-                      <a:solidFill>
-                        <a:srgbClr val="BBBBBB"/>
-                      </a:solidFill>
-                      <a:prstDash val="solid"/>
-                      <a:round/>
-                      <a:headEnd type="none" w="med" len="med"/>
-                      <a:tailEnd type="none" w="med" len="med"/>
-                    </a:lnL>
-                    <a:lnR w="9525" cap="flat" cmpd="sng" algn="ctr">
-                      <a:solidFill>
-                        <a:srgbClr val="BBBBBB"/>
-                      </a:solidFill>
-                      <a:prstDash val="solid"/>
-                      <a:round/>
-                      <a:headEnd type="none" w="med" len="med"/>
-                      <a:tailEnd type="none" w="med" len="med"/>
-                    </a:lnR>
-                    <a:lnT w="9525" cap="flat" cmpd="sng" algn="ctr">
-                      <a:solidFill>
-                        <a:srgbClr val="BBBBBB"/>
-                      </a:solidFill>
-                      <a:prstDash val="solid"/>
-                      <a:round/>
-                      <a:headEnd type="none" w="med" len="med"/>
-                      <a:tailEnd type="none" w="med" len="med"/>
-                    </a:lnT>
-                    <a:lnB w="9525" cap="flat" cmpd="sng" algn="ctr">
-                      <a:solidFill>
-                        <a:srgbClr val="BBBBBB"/>
+                        <a:srgbClr val="1A1A1A"/>
                       </a:solidFill>
                       <a:prstDash val="solid"/>
                       <a:round/>
@@ -4068,47 +3856,54 @@
                         <a:buNone/>
                       </a:pPr>
                       <a:r>
-                        <a:rPr lang="en-US" sz="1200" dirty="0">
+                        <a:rPr lang="en-US" sz="1200" b="1" dirty="0">
                           <a:solidFill>
                             <a:srgbClr val="1A1A1A"/>
                           </a:solidFill>
+                          <a:latin typeface="Noto Sans JP Medium" pitchFamily="34" charset="0"/>
+                          <a:ea typeface="Noto Sans JP Medium" pitchFamily="34" charset="-122"/>
+                          <a:cs typeface="Noto Sans JP Medium" pitchFamily="34" charset="-120"/>
                         </a:rPr>
-                        <a:t>Docsを本棚のように整理</a:t>
+                        <a:t>共同編集できる文書</a:t>
                       </a:r>
-                      <a:endParaRPr lang="en-US" sz="1200" dirty="0"/>
+                      <a:endParaRPr lang="en-US" sz="1200" dirty="0">
+                        <a:latin typeface="Noto Sans JP Medium" charset="0"/>
+                        <a:ea typeface="Noto Sans JP Medium" charset="0"/>
+                        <a:cs typeface="Noto Sans JP Medium" charset="0"/>
+                      </a:endParaRPr>
                     </a:p>
                   </a:txBody>
                   <a:tcPr marL="91440" marR="91440" marT="0" marB="0" anchor="ctr">
-                    <a:lnL w="9525" cap="flat" cmpd="sng" algn="ctr">
+                    <a:lnL w="12700" cap="flat" cmpd="sng" algn="ctr">
                       <a:solidFill>
-                        <a:srgbClr val="BBBBBB"/>
+                        <a:srgbClr val="1A1A1A"/>
                       </a:solidFill>
                       <a:prstDash val="solid"/>
                       <a:round/>
                       <a:headEnd type="none" w="med" len="med"/>
                       <a:tailEnd type="none" w="med" len="med"/>
                     </a:lnL>
-                    <a:lnR w="9525" cap="flat" cmpd="sng" algn="ctr">
+                    <a:lnR w="12700" cap="flat" cmpd="sng" algn="ctr">
                       <a:solidFill>
-                        <a:srgbClr val="BBBBBB"/>
+                        <a:srgbClr val="1A1A1A"/>
                       </a:solidFill>
                       <a:prstDash val="solid"/>
                       <a:round/>
                       <a:headEnd type="none" w="med" len="med"/>
                       <a:tailEnd type="none" w="med" len="med"/>
                     </a:lnR>
-                    <a:lnT w="9525" cap="flat" cmpd="sng" algn="ctr">
+                    <a:lnT w="12700" cap="flat" cmpd="sng" algn="ctr">
                       <a:solidFill>
-                        <a:srgbClr val="BBBBBB"/>
+                        <a:srgbClr val="1A1A1A"/>
                       </a:solidFill>
                       <a:prstDash val="solid"/>
                       <a:round/>
                       <a:headEnd type="none" w="med" len="med"/>
                       <a:tailEnd type="none" w="med" len="med"/>
                     </a:lnT>
-                    <a:lnB w="9525" cap="flat" cmpd="sng" algn="ctr">
+                    <a:lnB w="12700" cap="flat" cmpd="sng" algn="ctr">
                       <a:solidFill>
-                        <a:srgbClr val="BBBBBB"/>
+                        <a:srgbClr val="1A1A1A"/>
                       </a:solidFill>
                       <a:prstDash val="solid"/>
                       <a:round/>
@@ -4129,47 +3924,54 @@
                         <a:buNone/>
                       </a:pPr>
                       <a:r>
-                        <a:rPr lang="en-US" sz="1200" dirty="0">
+                        <a:rPr lang="en-US" sz="1200" b="1" dirty="0">
                           <a:solidFill>
                             <a:srgbClr val="1A1A1A"/>
                           </a:solidFill>
+                          <a:latin typeface="Noto Sans JP Medium" pitchFamily="34" charset="0"/>
+                          <a:ea typeface="Noto Sans JP Medium" pitchFamily="34" charset="-122"/>
+                          <a:cs typeface="Noto Sans JP Medium" pitchFamily="34" charset="-120"/>
                         </a:rPr>
-                        <a:t>マニュアル・ルールの置き場</a:t>
+                        <a:t>設計シート・議事録</a:t>
                       </a:r>
-                      <a:endParaRPr lang="en-US" sz="1200" dirty="0"/>
+                      <a:endParaRPr lang="en-US" sz="1200" dirty="0">
+                        <a:latin typeface="Noto Sans JP Medium" charset="0"/>
+                        <a:ea typeface="Noto Sans JP Medium" charset="0"/>
+                        <a:cs typeface="Noto Sans JP Medium" charset="0"/>
+                      </a:endParaRPr>
                     </a:p>
                   </a:txBody>
                   <a:tcPr marL="91440" marR="91440" marT="0" marB="0" anchor="ctr">
-                    <a:lnL w="9525" cap="flat" cmpd="sng" algn="ctr">
+                    <a:lnL w="12700" cap="flat" cmpd="sng" algn="ctr">
                       <a:solidFill>
-                        <a:srgbClr val="BBBBBB"/>
+                        <a:srgbClr val="1A1A1A"/>
                       </a:solidFill>
                       <a:prstDash val="solid"/>
                       <a:round/>
                       <a:headEnd type="none" w="med" len="med"/>
                       <a:tailEnd type="none" w="med" len="med"/>
                     </a:lnL>
-                    <a:lnR w="9525" cap="flat" cmpd="sng" algn="ctr">
+                    <a:lnR w="12700" cap="flat" cmpd="sng" algn="ctr">
                       <a:solidFill>
-                        <a:srgbClr val="BBBBBB"/>
+                        <a:srgbClr val="1A1A1A"/>
                       </a:solidFill>
                       <a:prstDash val="solid"/>
                       <a:round/>
                       <a:headEnd type="none" w="med" len="med"/>
                       <a:tailEnd type="none" w="med" len="med"/>
                     </a:lnR>
-                    <a:lnT w="9525" cap="flat" cmpd="sng" algn="ctr">
+                    <a:lnT w="12700" cap="flat" cmpd="sng" algn="ctr">
                       <a:solidFill>
-                        <a:srgbClr val="BBBBBB"/>
+                        <a:srgbClr val="1A1A1A"/>
                       </a:solidFill>
                       <a:prstDash val="solid"/>
                       <a:round/>
                       <a:headEnd type="none" w="med" len="med"/>
                       <a:tailEnd type="none" w="med" len="med"/>
                     </a:lnT>
-                    <a:lnB w="9525" cap="flat" cmpd="sng" algn="ctr">
+                    <a:lnB w="12700" cap="flat" cmpd="sng" algn="ctr">
                       <a:solidFill>
-                        <a:srgbClr val="BBBBBB"/>
+                        <a:srgbClr val="1A1A1A"/>
                       </a:solidFill>
                       <a:prstDash val="solid"/>
                       <a:round/>
@@ -4194,230 +3996,52 @@
                       <a:r>
                         <a:rPr lang="en-US" sz="1200" b="1" dirty="0">
                           <a:solidFill>
-                            <a:srgbClr val="1A1A1A"/>
+                            <a:srgbClr val="DD6420"/>
                           </a:solidFill>
+                          <a:latin typeface="Noto Sans JP" pitchFamily="34" charset="0"/>
+                          <a:ea typeface="Noto Sans JP" pitchFamily="34" charset="-122"/>
+                          <a:cs typeface="Noto Sans JP" pitchFamily="34" charset="-120"/>
                         </a:rPr>
-                        <a:t>BASE</a:t>
+                        <a:t>Wiki</a:t>
                       </a:r>
-                      <a:endParaRPr lang="en-US" sz="1200" dirty="0"/>
+                      <a:endParaRPr lang="en-US" sz="1200" dirty="0">
+                        <a:latin typeface="Noto Sans JP" charset="0"/>
+                        <a:ea typeface="Noto Sans JP" charset="0"/>
+                        <a:cs typeface="Noto Sans JP" charset="0"/>
+                      </a:endParaRPr>
                     </a:p>
                   </a:txBody>
                   <a:tcPr marL="91440" marR="91440" marT="0" marB="0" anchor="ctr">
-                    <a:lnL w="9525" cap="flat" cmpd="sng" algn="ctr">
+                    <a:lnL w="12700" cap="flat" cmpd="sng" algn="ctr">
                       <a:solidFill>
-                        <a:srgbClr val="BBBBBB"/>
+                        <a:srgbClr val="1A1A1A"/>
                       </a:solidFill>
                       <a:prstDash val="solid"/>
                       <a:round/>
                       <a:headEnd type="none" w="med" len="med"/>
                       <a:tailEnd type="none" w="med" len="med"/>
                     </a:lnL>
-                    <a:lnR w="9525" cap="flat" cmpd="sng" algn="ctr">
+                    <a:lnR w="12700" cap="flat" cmpd="sng" algn="ctr">
                       <a:solidFill>
-                        <a:srgbClr val="BBBBBB"/>
+                        <a:srgbClr val="1A1A1A"/>
                       </a:solidFill>
                       <a:prstDash val="solid"/>
                       <a:round/>
                       <a:headEnd type="none" w="med" len="med"/>
                       <a:tailEnd type="none" w="med" len="med"/>
                     </a:lnR>
-                    <a:lnT w="9525" cap="flat" cmpd="sng" algn="ctr">
+                    <a:lnT w="12700" cap="flat" cmpd="sng" algn="ctr">
                       <a:solidFill>
-                        <a:srgbClr val="BBBBBB"/>
+                        <a:srgbClr val="1A1A1A"/>
                       </a:solidFill>
                       <a:prstDash val="solid"/>
                       <a:round/>
                       <a:headEnd type="none" w="med" len="med"/>
                       <a:tailEnd type="none" w="med" len="med"/>
                     </a:lnT>
-                    <a:lnB w="9525" cap="flat" cmpd="sng" algn="ctr">
+                    <a:lnB w="12700" cap="flat" cmpd="sng" algn="ctr">
                       <a:solidFill>
-                        <a:srgbClr val="BBBBBB"/>
-                      </a:solidFill>
-                      <a:prstDash val="solid"/>
-                      <a:round/>
-                      <a:headEnd type="none" w="med" len="med"/>
-                      <a:tailEnd type="none" w="med" len="med"/>
-                    </a:lnB>
-                    <a:solidFill>
-                      <a:srgbClr val="F4F4F4"/>
-                    </a:solidFill>
-                  </a:tcPr>
-                </a:tc>
-                <a:tc>
-                  <a:txBody>
-                    <a:bodyPr/>
-                    <a:lstStyle/>
-                    <a:p>
-                      <a:pPr indent="0" marL="0">
-                        <a:buNone/>
-                      </a:pPr>
-                      <a:r>
-                        <a:rPr lang="en-US" sz="1200" dirty="0">
-                          <a:solidFill>
-                            <a:srgbClr val="1A1A1A"/>
-                          </a:solidFill>
-                        </a:rPr>
-                        <a:t>データベース（台帳）</a:t>
-                      </a:r>
-                      <a:endParaRPr lang="en-US" sz="1200" dirty="0"/>
-                    </a:p>
-                  </a:txBody>
-                  <a:tcPr marL="91440" marR="91440" marT="0" marB="0" anchor="ctr">
-                    <a:lnL w="9525" cap="flat" cmpd="sng" algn="ctr">
-                      <a:solidFill>
-                        <a:srgbClr val="BBBBBB"/>
-                      </a:solidFill>
-                      <a:prstDash val="solid"/>
-                      <a:round/>
-                      <a:headEnd type="none" w="med" len="med"/>
-                      <a:tailEnd type="none" w="med" len="med"/>
-                    </a:lnL>
-                    <a:lnR w="9525" cap="flat" cmpd="sng" algn="ctr">
-                      <a:solidFill>
-                        <a:srgbClr val="BBBBBB"/>
-                      </a:solidFill>
-                      <a:prstDash val="solid"/>
-                      <a:round/>
-                      <a:headEnd type="none" w="med" len="med"/>
-                      <a:tailEnd type="none" w="med" len="med"/>
-                    </a:lnR>
-                    <a:lnT w="9525" cap="flat" cmpd="sng" algn="ctr">
-                      <a:solidFill>
-                        <a:srgbClr val="BBBBBB"/>
-                      </a:solidFill>
-                      <a:prstDash val="solid"/>
-                      <a:round/>
-                      <a:headEnd type="none" w="med" len="med"/>
-                      <a:tailEnd type="none" w="med" len="med"/>
-                    </a:lnT>
-                    <a:lnB w="9525" cap="flat" cmpd="sng" algn="ctr">
-                      <a:solidFill>
-                        <a:srgbClr val="BBBBBB"/>
-                      </a:solidFill>
-                      <a:prstDash val="solid"/>
-                      <a:round/>
-                      <a:headEnd type="none" w="med" len="med"/>
-                      <a:tailEnd type="none" w="med" len="med"/>
-                    </a:lnB>
-                    <a:solidFill>
-                      <a:srgbClr val="F4F4F4"/>
-                    </a:solidFill>
-                  </a:tcPr>
-                </a:tc>
-                <a:tc>
-                  <a:txBody>
-                    <a:bodyPr/>
-                    <a:lstStyle/>
-                    <a:p>
-                      <a:pPr indent="0" marL="0">
-                        <a:buNone/>
-                      </a:pPr>
-                      <a:r>
-                        <a:rPr lang="en-US" sz="1200" dirty="0">
-                          <a:solidFill>
-                            <a:srgbClr val="1A1A1A"/>
-                          </a:solidFill>
-                        </a:rPr>
-                        <a:t>業務アプリの中心（第4回〜）</a:t>
-                      </a:r>
-                      <a:endParaRPr lang="en-US" sz="1200" dirty="0"/>
-                    </a:p>
-                  </a:txBody>
-                  <a:tcPr marL="91440" marR="91440" marT="0" marB="0" anchor="ctr">
-                    <a:lnL w="9525" cap="flat" cmpd="sng" algn="ctr">
-                      <a:solidFill>
-                        <a:srgbClr val="BBBBBB"/>
-                      </a:solidFill>
-                      <a:prstDash val="solid"/>
-                      <a:round/>
-                      <a:headEnd type="none" w="med" len="med"/>
-                      <a:tailEnd type="none" w="med" len="med"/>
-                    </a:lnL>
-                    <a:lnR w="9525" cap="flat" cmpd="sng" algn="ctr">
-                      <a:solidFill>
-                        <a:srgbClr val="BBBBBB"/>
-                      </a:solidFill>
-                      <a:prstDash val="solid"/>
-                      <a:round/>
-                      <a:headEnd type="none" w="med" len="med"/>
-                      <a:tailEnd type="none" w="med" len="med"/>
-                    </a:lnR>
-                    <a:lnT w="9525" cap="flat" cmpd="sng" algn="ctr">
-                      <a:solidFill>
-                        <a:srgbClr val="BBBBBB"/>
-                      </a:solidFill>
-                      <a:prstDash val="solid"/>
-                      <a:round/>
-                      <a:headEnd type="none" w="med" len="med"/>
-                      <a:tailEnd type="none" w="med" len="med"/>
-                    </a:lnT>
-                    <a:lnB w="9525" cap="flat" cmpd="sng" algn="ctr">
-                      <a:solidFill>
-                        <a:srgbClr val="BBBBBB"/>
-                      </a:solidFill>
-                      <a:prstDash val="solid"/>
-                      <a:round/>
-                      <a:headEnd type="none" w="med" len="med"/>
-                      <a:tailEnd type="none" w="med" len="med"/>
-                    </a:lnB>
-                    <a:solidFill>
-                      <a:srgbClr val="F4F4F4"/>
-                    </a:solidFill>
-                  </a:tcPr>
-                </a:tc>
-              </a:tr>
-              <a:tr h="365760">
-                <a:tc>
-                  <a:txBody>
-                    <a:bodyPr/>
-                    <a:lstStyle/>
-                    <a:p>
-                      <a:pPr indent="0" marL="0">
-                        <a:buNone/>
-                      </a:pPr>
-                      <a:r>
-                        <a:rPr lang="en-US" sz="1200" b="1" dirty="0">
-                          <a:solidFill>
-                            <a:srgbClr val="1A1A1A"/>
-                          </a:solidFill>
-                        </a:rPr>
-                        <a:t>承認・カレンダー</a:t>
-                      </a:r>
-                      <a:endParaRPr lang="en-US" sz="1200" dirty="0"/>
-                    </a:p>
-                  </a:txBody>
-                  <a:tcPr marL="91440" marR="91440" marT="0" marB="0" anchor="ctr">
-                    <a:lnL w="9525" cap="flat" cmpd="sng" algn="ctr">
-                      <a:solidFill>
-                        <a:srgbClr val="BBBBBB"/>
-                      </a:solidFill>
-                      <a:prstDash val="solid"/>
-                      <a:round/>
-                      <a:headEnd type="none" w="med" len="med"/>
-                      <a:tailEnd type="none" w="med" len="med"/>
-                    </a:lnL>
-                    <a:lnR w="9525" cap="flat" cmpd="sng" algn="ctr">
-                      <a:solidFill>
-                        <a:srgbClr val="BBBBBB"/>
-                      </a:solidFill>
-                      <a:prstDash val="solid"/>
-                      <a:round/>
-                      <a:headEnd type="none" w="med" len="med"/>
-                      <a:tailEnd type="none" w="med" len="med"/>
-                    </a:lnR>
-                    <a:lnT w="9525" cap="flat" cmpd="sng" algn="ctr">
-                      <a:solidFill>
-                        <a:srgbClr val="BBBBBB"/>
-                      </a:solidFill>
-                      <a:prstDash val="solid"/>
-                      <a:round/>
-                      <a:headEnd type="none" w="med" len="med"/>
-                      <a:tailEnd type="none" w="med" len="med"/>
-                    </a:lnT>
-                    <a:lnB w="9525" cap="flat" cmpd="sng" algn="ctr">
-                      <a:solidFill>
-                        <a:srgbClr val="BBBBBB"/>
+                        <a:srgbClr val="1A1A1A"/>
                       </a:solidFill>
                       <a:prstDash val="solid"/>
                       <a:round/>
@@ -4438,47 +4062,54 @@
                         <a:buNone/>
                       </a:pPr>
                       <a:r>
-                        <a:rPr lang="en-US" sz="1200" dirty="0">
+                        <a:rPr lang="en-US" sz="1200" b="1" dirty="0">
                           <a:solidFill>
                             <a:srgbClr val="1A1A1A"/>
                           </a:solidFill>
+                          <a:latin typeface="Noto Sans JP Medium" pitchFamily="34" charset="0"/>
+                          <a:ea typeface="Noto Sans JP Medium" pitchFamily="34" charset="-122"/>
+                          <a:cs typeface="Noto Sans JP Medium" pitchFamily="34" charset="-120"/>
                         </a:rPr>
-                        <a:t>申請／予定共有</a:t>
+                        <a:t>Docsを本棚のように整理</a:t>
                       </a:r>
-                      <a:endParaRPr lang="en-US" sz="1200" dirty="0"/>
+                      <a:endParaRPr lang="en-US" sz="1200" dirty="0">
+                        <a:latin typeface="Noto Sans JP Medium" charset="0"/>
+                        <a:ea typeface="Noto Sans JP Medium" charset="0"/>
+                        <a:cs typeface="Noto Sans JP Medium" charset="0"/>
+                      </a:endParaRPr>
                     </a:p>
                   </a:txBody>
                   <a:tcPr marL="91440" marR="91440" marT="0" marB="0" anchor="ctr">
-                    <a:lnL w="9525" cap="flat" cmpd="sng" algn="ctr">
+                    <a:lnL w="12700" cap="flat" cmpd="sng" algn="ctr">
                       <a:solidFill>
-                        <a:srgbClr val="BBBBBB"/>
+                        <a:srgbClr val="1A1A1A"/>
                       </a:solidFill>
                       <a:prstDash val="solid"/>
                       <a:round/>
                       <a:headEnd type="none" w="med" len="med"/>
                       <a:tailEnd type="none" w="med" len="med"/>
                     </a:lnL>
-                    <a:lnR w="9525" cap="flat" cmpd="sng" algn="ctr">
+                    <a:lnR w="12700" cap="flat" cmpd="sng" algn="ctr">
                       <a:solidFill>
-                        <a:srgbClr val="BBBBBB"/>
+                        <a:srgbClr val="1A1A1A"/>
                       </a:solidFill>
                       <a:prstDash val="solid"/>
                       <a:round/>
                       <a:headEnd type="none" w="med" len="med"/>
                       <a:tailEnd type="none" w="med" len="med"/>
                     </a:lnR>
-                    <a:lnT w="9525" cap="flat" cmpd="sng" algn="ctr">
+                    <a:lnT w="12700" cap="flat" cmpd="sng" algn="ctr">
                       <a:solidFill>
-                        <a:srgbClr val="BBBBBB"/>
+                        <a:srgbClr val="1A1A1A"/>
                       </a:solidFill>
                       <a:prstDash val="solid"/>
                       <a:round/>
                       <a:headEnd type="none" w="med" len="med"/>
                       <a:tailEnd type="none" w="med" len="med"/>
                     </a:lnT>
-                    <a:lnB w="9525" cap="flat" cmpd="sng" algn="ctr">
+                    <a:lnB w="12700" cap="flat" cmpd="sng" algn="ctr">
                       <a:solidFill>
-                        <a:srgbClr val="BBBBBB"/>
+                        <a:srgbClr val="1A1A1A"/>
                       </a:solidFill>
                       <a:prstDash val="solid"/>
                       <a:round/>
@@ -4499,47 +4130,466 @@
                         <a:buNone/>
                       </a:pPr>
                       <a:r>
-                        <a:rPr lang="en-US" sz="1200" dirty="0">
+                        <a:rPr lang="en-US" sz="1200" b="1" dirty="0">
                           <a:solidFill>
                             <a:srgbClr val="1A1A1A"/>
                           </a:solidFill>
+                          <a:latin typeface="Noto Sans JP Medium" pitchFamily="34" charset="0"/>
+                          <a:ea typeface="Noto Sans JP Medium" pitchFamily="34" charset="-122"/>
+                          <a:cs typeface="Noto Sans JP Medium" pitchFamily="34" charset="-120"/>
                         </a:rPr>
-                        <a:t>第6回・予約との連携</a:t>
+                        <a:t>マニュアル・ルールの置き場</a:t>
                       </a:r>
-                      <a:endParaRPr lang="en-US" sz="1200" dirty="0"/>
+                      <a:endParaRPr lang="en-US" sz="1200" dirty="0">
+                        <a:latin typeface="Noto Sans JP Medium" charset="0"/>
+                        <a:ea typeface="Noto Sans JP Medium" charset="0"/>
+                        <a:cs typeface="Noto Sans JP Medium" charset="0"/>
+                      </a:endParaRPr>
                     </a:p>
                   </a:txBody>
                   <a:tcPr marL="91440" marR="91440" marT="0" marB="0" anchor="ctr">
-                    <a:lnL w="9525" cap="flat" cmpd="sng" algn="ctr">
+                    <a:lnL w="12700" cap="flat" cmpd="sng" algn="ctr">
                       <a:solidFill>
-                        <a:srgbClr val="BBBBBB"/>
+                        <a:srgbClr val="1A1A1A"/>
                       </a:solidFill>
                       <a:prstDash val="solid"/>
                       <a:round/>
                       <a:headEnd type="none" w="med" len="med"/>
                       <a:tailEnd type="none" w="med" len="med"/>
                     </a:lnL>
-                    <a:lnR w="9525" cap="flat" cmpd="sng" algn="ctr">
+                    <a:lnR w="12700" cap="flat" cmpd="sng" algn="ctr">
                       <a:solidFill>
-                        <a:srgbClr val="BBBBBB"/>
+                        <a:srgbClr val="1A1A1A"/>
                       </a:solidFill>
                       <a:prstDash val="solid"/>
                       <a:round/>
                       <a:headEnd type="none" w="med" len="med"/>
                       <a:tailEnd type="none" w="med" len="med"/>
                     </a:lnR>
-                    <a:lnT w="9525" cap="flat" cmpd="sng" algn="ctr">
+                    <a:lnT w="12700" cap="flat" cmpd="sng" algn="ctr">
                       <a:solidFill>
-                        <a:srgbClr val="BBBBBB"/>
+                        <a:srgbClr val="1A1A1A"/>
                       </a:solidFill>
                       <a:prstDash val="solid"/>
                       <a:round/>
                       <a:headEnd type="none" w="med" len="med"/>
                       <a:tailEnd type="none" w="med" len="med"/>
                     </a:lnT>
-                    <a:lnB w="9525" cap="flat" cmpd="sng" algn="ctr">
+                    <a:lnB w="12700" cap="flat" cmpd="sng" algn="ctr">
                       <a:solidFill>
-                        <a:srgbClr val="BBBBBB"/>
+                        <a:srgbClr val="1A1A1A"/>
+                      </a:solidFill>
+                      <a:prstDash val="solid"/>
+                      <a:round/>
+                      <a:headEnd type="none" w="med" len="med"/>
+                      <a:tailEnd type="none" w="med" len="med"/>
+                    </a:lnB>
+                    <a:solidFill>
+                      <a:srgbClr val="FFFFFF"/>
+                    </a:solidFill>
+                  </a:tcPr>
+                </a:tc>
+              </a:tr>
+              <a:tr h="365760">
+                <a:tc>
+                  <a:txBody>
+                    <a:bodyPr/>
+                    <a:lstStyle/>
+                    <a:p>
+                      <a:pPr indent="0" marL="0">
+                        <a:buNone/>
+                      </a:pPr>
+                      <a:r>
+                        <a:rPr lang="en-US" sz="1200" b="1" dirty="0">
+                          <a:solidFill>
+                            <a:srgbClr val="DD6420"/>
+                          </a:solidFill>
+                          <a:latin typeface="Noto Sans JP" pitchFamily="34" charset="0"/>
+                          <a:ea typeface="Noto Sans JP" pitchFamily="34" charset="-122"/>
+                          <a:cs typeface="Noto Sans JP" pitchFamily="34" charset="-120"/>
+                        </a:rPr>
+                        <a:t>BASE</a:t>
+                      </a:r>
+                      <a:endParaRPr lang="en-US" sz="1200" dirty="0">
+                        <a:latin typeface="Noto Sans JP" charset="0"/>
+                        <a:ea typeface="Noto Sans JP" charset="0"/>
+                        <a:cs typeface="Noto Sans JP" charset="0"/>
+                      </a:endParaRPr>
+                    </a:p>
+                  </a:txBody>
+                  <a:tcPr marL="91440" marR="91440" marT="0" marB="0" anchor="ctr">
+                    <a:lnL w="12700" cap="flat" cmpd="sng" algn="ctr">
+                      <a:solidFill>
+                        <a:srgbClr val="1A1A1A"/>
+                      </a:solidFill>
+                      <a:prstDash val="solid"/>
+                      <a:round/>
+                      <a:headEnd type="none" w="med" len="med"/>
+                      <a:tailEnd type="none" w="med" len="med"/>
+                    </a:lnL>
+                    <a:lnR w="12700" cap="flat" cmpd="sng" algn="ctr">
+                      <a:solidFill>
+                        <a:srgbClr val="1A1A1A"/>
+                      </a:solidFill>
+                      <a:prstDash val="solid"/>
+                      <a:round/>
+                      <a:headEnd type="none" w="med" len="med"/>
+                      <a:tailEnd type="none" w="med" len="med"/>
+                    </a:lnR>
+                    <a:lnT w="12700" cap="flat" cmpd="sng" algn="ctr">
+                      <a:solidFill>
+                        <a:srgbClr val="1A1A1A"/>
+                      </a:solidFill>
+                      <a:prstDash val="solid"/>
+                      <a:round/>
+                      <a:headEnd type="none" w="med" len="med"/>
+                      <a:tailEnd type="none" w="med" len="med"/>
+                    </a:lnT>
+                    <a:lnB w="12700" cap="flat" cmpd="sng" algn="ctr">
+                      <a:solidFill>
+                        <a:srgbClr val="1A1A1A"/>
+                      </a:solidFill>
+                      <a:prstDash val="solid"/>
+                      <a:round/>
+                      <a:headEnd type="none" w="med" len="med"/>
+                      <a:tailEnd type="none" w="med" len="med"/>
+                    </a:lnB>
+                    <a:solidFill>
+                      <a:srgbClr val="FFFFFF"/>
+                    </a:solidFill>
+                  </a:tcPr>
+                </a:tc>
+                <a:tc>
+                  <a:txBody>
+                    <a:bodyPr/>
+                    <a:lstStyle/>
+                    <a:p>
+                      <a:pPr indent="0" marL="0">
+                        <a:buNone/>
+                      </a:pPr>
+                      <a:r>
+                        <a:rPr lang="en-US" sz="1200" b="1" dirty="0">
+                          <a:solidFill>
+                            <a:srgbClr val="1A1A1A"/>
+                          </a:solidFill>
+                          <a:latin typeface="Noto Sans JP Medium" pitchFamily="34" charset="0"/>
+                          <a:ea typeface="Noto Sans JP Medium" pitchFamily="34" charset="-122"/>
+                          <a:cs typeface="Noto Sans JP Medium" pitchFamily="34" charset="-120"/>
+                        </a:rPr>
+                        <a:t>データベース（台帳）</a:t>
+                      </a:r>
+                      <a:endParaRPr lang="en-US" sz="1200" dirty="0">
+                        <a:latin typeface="Noto Sans JP Medium" charset="0"/>
+                        <a:ea typeface="Noto Sans JP Medium" charset="0"/>
+                        <a:cs typeface="Noto Sans JP Medium" charset="0"/>
+                      </a:endParaRPr>
+                    </a:p>
+                  </a:txBody>
+                  <a:tcPr marL="91440" marR="91440" marT="0" marB="0" anchor="ctr">
+                    <a:lnL w="12700" cap="flat" cmpd="sng" algn="ctr">
+                      <a:solidFill>
+                        <a:srgbClr val="1A1A1A"/>
+                      </a:solidFill>
+                      <a:prstDash val="solid"/>
+                      <a:round/>
+                      <a:headEnd type="none" w="med" len="med"/>
+                      <a:tailEnd type="none" w="med" len="med"/>
+                    </a:lnL>
+                    <a:lnR w="12700" cap="flat" cmpd="sng" algn="ctr">
+                      <a:solidFill>
+                        <a:srgbClr val="1A1A1A"/>
+                      </a:solidFill>
+                      <a:prstDash val="solid"/>
+                      <a:round/>
+                      <a:headEnd type="none" w="med" len="med"/>
+                      <a:tailEnd type="none" w="med" len="med"/>
+                    </a:lnR>
+                    <a:lnT w="12700" cap="flat" cmpd="sng" algn="ctr">
+                      <a:solidFill>
+                        <a:srgbClr val="1A1A1A"/>
+                      </a:solidFill>
+                      <a:prstDash val="solid"/>
+                      <a:round/>
+                      <a:headEnd type="none" w="med" len="med"/>
+                      <a:tailEnd type="none" w="med" len="med"/>
+                    </a:lnT>
+                    <a:lnB w="12700" cap="flat" cmpd="sng" algn="ctr">
+                      <a:solidFill>
+                        <a:srgbClr val="1A1A1A"/>
+                      </a:solidFill>
+                      <a:prstDash val="solid"/>
+                      <a:round/>
+                      <a:headEnd type="none" w="med" len="med"/>
+                      <a:tailEnd type="none" w="med" len="med"/>
+                    </a:lnB>
+                    <a:solidFill>
+                      <a:srgbClr val="FFFFFF"/>
+                    </a:solidFill>
+                  </a:tcPr>
+                </a:tc>
+                <a:tc>
+                  <a:txBody>
+                    <a:bodyPr/>
+                    <a:lstStyle/>
+                    <a:p>
+                      <a:pPr indent="0" marL="0">
+                        <a:buNone/>
+                      </a:pPr>
+                      <a:r>
+                        <a:rPr lang="en-US" sz="1200" b="1" dirty="0">
+                          <a:solidFill>
+                            <a:srgbClr val="1A1A1A"/>
+                          </a:solidFill>
+                          <a:latin typeface="Noto Sans JP Medium" pitchFamily="34" charset="0"/>
+                          <a:ea typeface="Noto Sans JP Medium" pitchFamily="34" charset="-122"/>
+                          <a:cs typeface="Noto Sans JP Medium" pitchFamily="34" charset="-120"/>
+                        </a:rPr>
+                        <a:t>業務アプリの中心（第4回〜）</a:t>
+                      </a:r>
+                      <a:endParaRPr lang="en-US" sz="1200" dirty="0">
+                        <a:latin typeface="Noto Sans JP Medium" charset="0"/>
+                        <a:ea typeface="Noto Sans JP Medium" charset="0"/>
+                        <a:cs typeface="Noto Sans JP Medium" charset="0"/>
+                      </a:endParaRPr>
+                    </a:p>
+                  </a:txBody>
+                  <a:tcPr marL="91440" marR="91440" marT="0" marB="0" anchor="ctr">
+                    <a:lnL w="12700" cap="flat" cmpd="sng" algn="ctr">
+                      <a:solidFill>
+                        <a:srgbClr val="1A1A1A"/>
+                      </a:solidFill>
+                      <a:prstDash val="solid"/>
+                      <a:round/>
+                      <a:headEnd type="none" w="med" len="med"/>
+                      <a:tailEnd type="none" w="med" len="med"/>
+                    </a:lnL>
+                    <a:lnR w="12700" cap="flat" cmpd="sng" algn="ctr">
+                      <a:solidFill>
+                        <a:srgbClr val="1A1A1A"/>
+                      </a:solidFill>
+                      <a:prstDash val="solid"/>
+                      <a:round/>
+                      <a:headEnd type="none" w="med" len="med"/>
+                      <a:tailEnd type="none" w="med" len="med"/>
+                    </a:lnR>
+                    <a:lnT w="12700" cap="flat" cmpd="sng" algn="ctr">
+                      <a:solidFill>
+                        <a:srgbClr val="1A1A1A"/>
+                      </a:solidFill>
+                      <a:prstDash val="solid"/>
+                      <a:round/>
+                      <a:headEnd type="none" w="med" len="med"/>
+                      <a:tailEnd type="none" w="med" len="med"/>
+                    </a:lnT>
+                    <a:lnB w="12700" cap="flat" cmpd="sng" algn="ctr">
+                      <a:solidFill>
+                        <a:srgbClr val="1A1A1A"/>
+                      </a:solidFill>
+                      <a:prstDash val="solid"/>
+                      <a:round/>
+                      <a:headEnd type="none" w="med" len="med"/>
+                      <a:tailEnd type="none" w="med" len="med"/>
+                    </a:lnB>
+                    <a:solidFill>
+                      <a:srgbClr val="FFFFFF"/>
+                    </a:solidFill>
+                  </a:tcPr>
+                </a:tc>
+              </a:tr>
+              <a:tr h="365760">
+                <a:tc>
+                  <a:txBody>
+                    <a:bodyPr/>
+                    <a:lstStyle/>
+                    <a:p>
+                      <a:pPr indent="0" marL="0">
+                        <a:buNone/>
+                      </a:pPr>
+                      <a:r>
+                        <a:rPr lang="en-US" sz="1200" b="1" dirty="0">
+                          <a:solidFill>
+                            <a:srgbClr val="DD6420"/>
+                          </a:solidFill>
+                          <a:latin typeface="Noto Sans JP" pitchFamily="34" charset="0"/>
+                          <a:ea typeface="Noto Sans JP" pitchFamily="34" charset="-122"/>
+                          <a:cs typeface="Noto Sans JP" pitchFamily="34" charset="-120"/>
+                        </a:rPr>
+                        <a:t>承認・カレンダー</a:t>
+                      </a:r>
+                      <a:endParaRPr lang="en-US" sz="1200" dirty="0">
+                        <a:latin typeface="Noto Sans JP" charset="0"/>
+                        <a:ea typeface="Noto Sans JP" charset="0"/>
+                        <a:cs typeface="Noto Sans JP" charset="0"/>
+                      </a:endParaRPr>
+                    </a:p>
+                  </a:txBody>
+                  <a:tcPr marL="91440" marR="91440" marT="0" marB="0" anchor="ctr">
+                    <a:lnL w="12700" cap="flat" cmpd="sng" algn="ctr">
+                      <a:solidFill>
+                        <a:srgbClr val="1A1A1A"/>
+                      </a:solidFill>
+                      <a:prstDash val="solid"/>
+                      <a:round/>
+                      <a:headEnd type="none" w="med" len="med"/>
+                      <a:tailEnd type="none" w="med" len="med"/>
+                    </a:lnL>
+                    <a:lnR w="12700" cap="flat" cmpd="sng" algn="ctr">
+                      <a:solidFill>
+                        <a:srgbClr val="1A1A1A"/>
+                      </a:solidFill>
+                      <a:prstDash val="solid"/>
+                      <a:round/>
+                      <a:headEnd type="none" w="med" len="med"/>
+                      <a:tailEnd type="none" w="med" len="med"/>
+                    </a:lnR>
+                    <a:lnT w="12700" cap="flat" cmpd="sng" algn="ctr">
+                      <a:solidFill>
+                        <a:srgbClr val="1A1A1A"/>
+                      </a:solidFill>
+                      <a:prstDash val="solid"/>
+                      <a:round/>
+                      <a:headEnd type="none" w="med" len="med"/>
+                      <a:tailEnd type="none" w="med" len="med"/>
+                    </a:lnT>
+                    <a:lnB w="12700" cap="flat" cmpd="sng" algn="ctr">
+                      <a:solidFill>
+                        <a:srgbClr val="1A1A1A"/>
+                      </a:solidFill>
+                      <a:prstDash val="solid"/>
+                      <a:round/>
+                      <a:headEnd type="none" w="med" len="med"/>
+                      <a:tailEnd type="none" w="med" len="med"/>
+                    </a:lnB>
+                    <a:solidFill>
+                      <a:srgbClr val="FFFFFF"/>
+                    </a:solidFill>
+                  </a:tcPr>
+                </a:tc>
+                <a:tc>
+                  <a:txBody>
+                    <a:bodyPr/>
+                    <a:lstStyle/>
+                    <a:p>
+                      <a:pPr indent="0" marL="0">
+                        <a:buNone/>
+                      </a:pPr>
+                      <a:r>
+                        <a:rPr lang="en-US" sz="1200" b="1" dirty="0">
+                          <a:solidFill>
+                            <a:srgbClr val="1A1A1A"/>
+                          </a:solidFill>
+                          <a:latin typeface="Noto Sans JP Medium" pitchFamily="34" charset="0"/>
+                          <a:ea typeface="Noto Sans JP Medium" pitchFamily="34" charset="-122"/>
+                          <a:cs typeface="Noto Sans JP Medium" pitchFamily="34" charset="-120"/>
+                        </a:rPr>
+                        <a:t>申請／予定共有</a:t>
+                      </a:r>
+                      <a:endParaRPr lang="en-US" sz="1200" dirty="0">
+                        <a:latin typeface="Noto Sans JP Medium" charset="0"/>
+                        <a:ea typeface="Noto Sans JP Medium" charset="0"/>
+                        <a:cs typeface="Noto Sans JP Medium" charset="0"/>
+                      </a:endParaRPr>
+                    </a:p>
+                  </a:txBody>
+                  <a:tcPr marL="91440" marR="91440" marT="0" marB="0" anchor="ctr">
+                    <a:lnL w="12700" cap="flat" cmpd="sng" algn="ctr">
+                      <a:solidFill>
+                        <a:srgbClr val="1A1A1A"/>
+                      </a:solidFill>
+                      <a:prstDash val="solid"/>
+                      <a:round/>
+                      <a:headEnd type="none" w="med" len="med"/>
+                      <a:tailEnd type="none" w="med" len="med"/>
+                    </a:lnL>
+                    <a:lnR w="12700" cap="flat" cmpd="sng" algn="ctr">
+                      <a:solidFill>
+                        <a:srgbClr val="1A1A1A"/>
+                      </a:solidFill>
+                      <a:prstDash val="solid"/>
+                      <a:round/>
+                      <a:headEnd type="none" w="med" len="med"/>
+                      <a:tailEnd type="none" w="med" len="med"/>
+                    </a:lnR>
+                    <a:lnT w="12700" cap="flat" cmpd="sng" algn="ctr">
+                      <a:solidFill>
+                        <a:srgbClr val="1A1A1A"/>
+                      </a:solidFill>
+                      <a:prstDash val="solid"/>
+                      <a:round/>
+                      <a:headEnd type="none" w="med" len="med"/>
+                      <a:tailEnd type="none" w="med" len="med"/>
+                    </a:lnT>
+                    <a:lnB w="12700" cap="flat" cmpd="sng" algn="ctr">
+                      <a:solidFill>
+                        <a:srgbClr val="1A1A1A"/>
+                      </a:solidFill>
+                      <a:prstDash val="solid"/>
+                      <a:round/>
+                      <a:headEnd type="none" w="med" len="med"/>
+                      <a:tailEnd type="none" w="med" len="med"/>
+                    </a:lnB>
+                    <a:solidFill>
+                      <a:srgbClr val="FFFFFF"/>
+                    </a:solidFill>
+                  </a:tcPr>
+                </a:tc>
+                <a:tc>
+                  <a:txBody>
+                    <a:bodyPr/>
+                    <a:lstStyle/>
+                    <a:p>
+                      <a:pPr indent="0" marL="0">
+                        <a:buNone/>
+                      </a:pPr>
+                      <a:r>
+                        <a:rPr lang="en-US" sz="1200" b="1" dirty="0">
+                          <a:solidFill>
+                            <a:srgbClr val="1A1A1A"/>
+                          </a:solidFill>
+                          <a:latin typeface="Noto Sans JP Medium" pitchFamily="34" charset="0"/>
+                          <a:ea typeface="Noto Sans JP Medium" pitchFamily="34" charset="-122"/>
+                          <a:cs typeface="Noto Sans JP Medium" pitchFamily="34" charset="-120"/>
+                        </a:rPr>
+                        <a:t>第6回・予約との連携</a:t>
+                      </a:r>
+                      <a:endParaRPr lang="en-US" sz="1200" dirty="0">
+                        <a:latin typeface="Noto Sans JP Medium" charset="0"/>
+                        <a:ea typeface="Noto Sans JP Medium" charset="0"/>
+                        <a:cs typeface="Noto Sans JP Medium" charset="0"/>
+                      </a:endParaRPr>
+                    </a:p>
+                  </a:txBody>
+                  <a:tcPr marL="91440" marR="91440" marT="0" marB="0" anchor="ctr">
+                    <a:lnL w="12700" cap="flat" cmpd="sng" algn="ctr">
+                      <a:solidFill>
+                        <a:srgbClr val="1A1A1A"/>
+                      </a:solidFill>
+                      <a:prstDash val="solid"/>
+                      <a:round/>
+                      <a:headEnd type="none" w="med" len="med"/>
+                      <a:tailEnd type="none" w="med" len="med"/>
+                    </a:lnL>
+                    <a:lnR w="12700" cap="flat" cmpd="sng" algn="ctr">
+                      <a:solidFill>
+                        <a:srgbClr val="1A1A1A"/>
+                      </a:solidFill>
+                      <a:prstDash val="solid"/>
+                      <a:round/>
+                      <a:headEnd type="none" w="med" len="med"/>
+                      <a:tailEnd type="none" w="med" len="med"/>
+                    </a:lnR>
+                    <a:lnT w="12700" cap="flat" cmpd="sng" algn="ctr">
+                      <a:solidFill>
+                        <a:srgbClr val="1A1A1A"/>
+                      </a:solidFill>
+                      <a:prstDash val="solid"/>
+                      <a:round/>
+                      <a:headEnd type="none" w="med" len="med"/>
+                      <a:tailEnd type="none" w="med" len="med"/>
+                    </a:lnT>
+                    <a:lnB w="12700" cap="flat" cmpd="sng" algn="ctr">
+                      <a:solidFill>
+                        <a:srgbClr val="1A1A1A"/>
                       </a:solidFill>
                       <a:prstDash val="solid"/>
                       <a:round/>
@@ -4558,88 +4608,55 @@
       </p:graphicFrame>
       <p:sp>
         <p:nvSpPr>
-          <p:cNvPr id="7" name="foot-box"/>
-          <p:cNvSpPr/>
-          <p:nvPr/>
-        </p:nvSpPr>
-        <p:spPr>
-          <a:xfrm>
-            <a:off x="548640" y="4114800"/>
-            <a:ext cx="8046720" cy="502920"/>
-          </a:xfrm>
-          <a:prstGeom prst="roundRect">
-            <a:avLst>
-              <a:gd name="adj" fmla="val 18182"/>
-            </a:avLst>
+          <p:cNvPr id="7" name="Text 3"/>
+          <p:cNvSpPr txBox="1"/>
+          <p:nvPr/>
+        </p:nvSpPr>
+        <p:spPr>
+          <a:xfrm rot="-60000">
+            <a:off x="502920" y="4114800"/>
+            <a:ext cx="8138160" cy="502920"/>
+          </a:xfrm>
+          <a:prstGeom prst="rect">
+            <a:avLst/>
           </a:prstGeom>
           <a:solidFill>
-            <a:schemeClr val="bg2"/>
+            <a:srgbClr val="DD6420"/>
           </a:solidFill>
-          <a:ln w="12700">
+          <a:ln w="19050">
             <a:solidFill>
-              <a:schemeClr val="bg2"/>
+              <a:srgbClr val="1A1A1A"/>
             </a:solidFill>
-            <a:prstDash val="solid"/>
           </a:ln>
-        </p:spPr>
-      </p:sp>
-      <p:pic>
-        <p:nvPicPr>
-          <p:cNvPr id="8" name="foot-icon" descr="preencoded.png">    </p:cNvPr>
-          <p:cNvPicPr>
-            <a:picLocks noChangeAspect="1"/>
-          </p:cNvPicPr>
-          <p:nvPr/>
-        </p:nvPicPr>
-        <p:blipFill>
-          <a:blip r:embed="rId1"/>
-          <a:stretch>
-            <a:fillRect/>
-          </a:stretch>
-        </p:blipFill>
-        <p:spPr>
-          <a:xfrm>
-            <a:off x="685800" y="4242816"/>
-            <a:ext cx="246888" cy="246888"/>
-          </a:xfrm>
-          <a:prstGeom prst="rect">
-            <a:avLst/>
-          </a:prstGeom>
-        </p:spPr>
-      </p:pic>
-      <p:sp>
-        <p:nvSpPr>
-          <p:cNvPr id="9" name="foot-text"/>
-          <p:cNvSpPr txBox="1"/>
-          <p:nvPr/>
-        </p:nvSpPr>
-        <p:spPr>
-          <a:xfrm>
-            <a:off x="1051560" y="4114800"/>
-            <a:ext cx="7406640" cy="502920"/>
-          </a:xfrm>
-          <a:prstGeom prst="rect">
-            <a:avLst/>
-          </a:prstGeom>
-          <a:noFill/>
-          <a:ln/>
-        </p:spPr>
-        <p:txBody>
-          <a:bodyPr wrap="square" lIns="0" tIns="0" rIns="0" bIns="0" rtlCol="0" anchor="ctr"/>
+          <a:effectLst>
+            <a:outerShdw sx="100000" sy="100000" kx="0" ky="0" algn="bl" rotWithShape="0" blurRad="101600" dist="38100" dir="2700000">
+              <a:srgbClr val="1A1A1A">
+                <a:alpha val="100000"/>
+              </a:srgbClr>
+            </a:outerShdw>
+          </a:effectLst>
+        </p:spPr>
+        <p:txBody>
+          <a:bodyPr wrap="square" lIns="0" tIns="1905" rIns="1905" bIns="0" rtlCol="0" anchor="ctr">
+            <a:normAutofit/>
+          </a:bodyPr>
           <a:lstStyle/>
           <a:p>
-            <a:pPr indent="0" marL="0">
+            <a:pPr algn="ctr" indent="0" marL="0">
               <a:buNone/>
             </a:pPr>
             <a:r>
-              <a:rPr lang="en-US" sz="1150" dirty="0">
-                <a:solidFill>
-                  <a:schemeClr val="tx1"/>
-                </a:solidFill>
+              <a:rPr lang="ja-JP" altLang="en-US" sz="1300" b="1" dirty="0">
+                <a:solidFill>
+                  <a:srgbClr val="FFFFFF"/>
+                </a:solidFill>
+                <a:latin typeface="Noto Sans JP" pitchFamily="34" charset="0"/>
+                <a:ea typeface="Noto Sans JP" pitchFamily="34" charset="-122"/>
+                <a:cs typeface="Noto Sans JP" pitchFamily="34" charset="-120"/>
               </a:rPr>
               <a:t>画面の名前や場所は、Larkのバージョンや言語設定で少し変わることがあります</a:t>
             </a:r>
-            <a:endParaRPr lang="en-US" sz="1150" dirty="0"/>
+            <a:endParaRPr lang="ja-JP" sz="1300" dirty="0"/>
           </a:p>
         </p:txBody>
       </p:sp>
@@ -4655,8 +4672,8 @@
         </p:nvSpPr>
         <p:spPr>
           <a:xfrm>
-            <a:off x="8229600" y="4773168"/>
-            <a:ext cx="365760" cy="228600"/>
+            <a:off x="8366760" y="4754880"/>
+            <a:ext cx="365760" cy="274320"/>
           </a:xfrm>
           <a:prstGeom prst="rect">
             <a:avLst/>
@@ -4668,20 +4685,23 @@
           </a:extLst>
         </p:spPr>
         <p:txBody>
-          <a:bodyPr/>
+          <a:bodyPr anchor="ctr"/>
           <a:lstStyle>
             <a:lvl1pPr>
-              <a:defRPr sz="900">
-                <a:solidFill>
-                  <a:srgbClr val="5A6872"/>
-                </a:solidFill>
+              <a:defRPr sz="850">
+                <a:solidFill>
+                  <a:srgbClr val="FFFFFF"/>
+                </a:solidFill>
+                <a:latin typeface="Noto Sans JP"/>
+                <a:ea typeface="Noto Sans JP"/>
+                <a:cs typeface="Noto Sans JP"/>
               </a:defRPr>
             </a:lvl1pPr>
           </a:lstStyle>
           <a:p>
             <a:pPr algn="r"/>
             <a:fld id="{F7021451-1387-4CA6-816F-3879F97B5CBC}" type="slidenum">
-              <a:rPr b="0" lang="en-US"/>
+              <a:rPr b="1" lang="en-US"/>
               <a:t>3</a:t>
             </a:fld>
             <a:endParaRPr lang="en-US"/>
@@ -4716,84 +4736,25 @@
       <p:sp>
         <p:nvSpPr>
           <p:cNvPr id="2" name="Text 0"/>
-          <p:cNvSpPr/>
-          <p:nvPr>
-            <p:ph idx="100" type="title" hasCustomPrompt="1"/>
-          </p:nvPr>
-        </p:nvSpPr>
-        <p:spPr>
-          <a:xfrm>
-            <a:off x="548640" y="658368"/>
-            <a:ext cx="8046720" cy="566928"/>
-          </a:xfrm>
-          <a:prstGeom prst="rect">
-            <a:avLst/>
-          </a:prstGeom>
-          <a:noFill/>
-          <a:ln/>
-        </p:spPr>
-        <p:txBody>
-          <a:bodyPr wrap="square" lIns="0" tIns="0" rIns="0" bIns="0" rtlCol="0" anchor="ctr"/>
-          <a:lstStyle/>
-          <a:p>
-            <a:pPr algn="l" indent="0" marL="0">
-              <a:buNone/>
-            </a:pPr>
-            <a:r>
-              <a:rPr lang="en-US" sz="2400" b="1" dirty="0">
-                <a:solidFill>
-                  <a:schemeClr val="tx1"/>
-                </a:solidFill>
-              </a:rPr>
-              <a:t>グループとDocs</a:t>
-            </a:r>
-            <a:endParaRPr lang="en-US" sz="2400" dirty="0"/>
-          </a:p>
-        </p:txBody>
-      </p:sp>
-      <p:sp>
-        <p:nvSpPr>
-          <p:cNvPr id="3" name="chip"/>
-          <p:cNvSpPr/>
-          <p:nvPr/>
-        </p:nvSpPr>
-        <p:spPr>
-          <a:xfrm>
-            <a:off x="548640" y="292608"/>
-            <a:ext cx="1755648" cy="292608"/>
-          </a:xfrm>
-          <a:prstGeom prst="roundRect">
-            <a:avLst>
-              <a:gd name="adj" fmla="val 50000"/>
-            </a:avLst>
+          <p:cNvSpPr txBox="1"/>
+          <p:nvPr/>
+        </p:nvSpPr>
+        <p:spPr>
+          <a:xfrm rot="-180000">
+            <a:off x="411480" y="201168"/>
+            <a:ext cx="1915668" cy="352044"/>
+          </a:xfrm>
+          <a:prstGeom prst="rect">
+            <a:avLst/>
           </a:prstGeom>
           <a:solidFill>
-            <a:schemeClr val="accent2"/>
+            <a:srgbClr val="DD6420"/>
           </a:solidFill>
-          <a:ln w="12700">
+          <a:ln>
             <a:solidFill>
-              <a:schemeClr val="accent2"/>
+              <a:srgbClr val="DD6420"/>
             </a:solidFill>
-            <a:prstDash val="solid"/>
           </a:ln>
-        </p:spPr>
-      </p:sp>
-      <p:sp>
-        <p:nvSpPr>
-          <p:cNvPr id="4" name="chip-text"/>
-          <p:cNvSpPr txBox="1"/>
-          <p:nvPr/>
-        </p:nvSpPr>
-        <p:spPr>
-          <a:xfrm>
-            <a:off x="548640" y="292608"/>
-            <a:ext cx="1755648" cy="292608"/>
-          </a:xfrm>
-          <a:prstGeom prst="rect">
-            <a:avLst/>
-          </a:prstGeom>
-          <a:noFill/>
-          <a:ln/>
         </p:spPr>
         <p:txBody>
           <a:bodyPr wrap="square" lIns="0" tIns="0" rIns="0" bIns="0" rtlCol="0" anchor="ctr"/>
@@ -4803,58 +4764,117 @@
               <a:buNone/>
             </a:pPr>
             <a:r>
-              <a:rPr lang="en-US" sz="1100" b="1" dirty="0">
-                <a:solidFill>
-                  <a:schemeClr val="bg1"/>
-                </a:solidFill>
+              <a:rPr lang="ja-JP" altLang="en-US" sz="1100" dirty="0">
+                <a:solidFill>
+                  <a:srgbClr val="FFFFFF"/>
+                </a:solidFill>
+                <a:latin typeface="Dela Gothic One" pitchFamily="34" charset="0"/>
+                <a:ea typeface="けいふぉんと" pitchFamily="34" charset="-122"/>
+                <a:cs typeface="Dela Gothic One" pitchFamily="34" charset="-120"/>
               </a:rPr>
               <a:t>ハンズオン① 20分</a:t>
             </a:r>
-            <a:endParaRPr lang="en-US" sz="1100" dirty="0"/>
-          </a:p>
-        </p:txBody>
-      </p:sp>
-      <p:sp>
-        <p:nvSpPr>
-          <p:cNvPr id="6" name="step-num"/>
+            <a:endParaRPr lang="ja-JP" sz="1100" dirty="0"/>
+          </a:p>
+        </p:txBody>
+      </p:sp>
+      <p:sp>
+        <p:nvSpPr>
+          <p:cNvPr id="3" name="Text 1"/>
+          <p:cNvSpPr txBox="1"/>
+          <p:nvPr/>
+        </p:nvSpPr>
+        <p:spPr>
+          <a:xfrm>
+            <a:off x="411480" y="502920"/>
+            <a:ext cx="8321040" cy="685800"/>
+          </a:xfrm>
+          <a:prstGeom prst="rect">
+            <a:avLst/>
+          </a:prstGeom>
+          <a:noFill/>
+          <a:ln/>
+        </p:spPr>
+        <p:txBody>
+          <a:bodyPr wrap="square" lIns="0" tIns="0" rIns="0" bIns="0" rtlCol="0" anchor="ctr">
+            <a:normAutofit/>
+          </a:bodyPr>
+          <a:lstStyle/>
+          <a:p>
+            <a:pPr indent="0" marL="0">
+              <a:buNone/>
+            </a:pPr>
+            <a:r>
+              <a:rPr lang="ja-JP" altLang="en-US" sz="2600" dirty="0">
+                <a:solidFill>
+                  <a:srgbClr val="1A1A1A"/>
+                </a:solidFill>
+                <a:latin typeface="Dela Gothic One" pitchFamily="34" charset="0"/>
+                <a:ea typeface="けいふぉんと" pitchFamily="34" charset="-122"/>
+                <a:cs typeface="Dela Gothic One" pitchFamily="34" charset="-120"/>
+              </a:rPr>
+              <a:t>グループとDocs</a:t>
+            </a:r>
+            <a:endParaRPr lang="ja-JP" sz="2600" dirty="0"/>
+          </a:p>
+        </p:txBody>
+      </p:sp>
+      <p:sp>
+        <p:nvSpPr>
+          <p:cNvPr id="5" name="card"/>
           <p:cNvSpPr/>
           <p:nvPr/>
         </p:nvSpPr>
         <p:spPr>
           <a:xfrm>
-            <a:off x="548640" y="1805940"/>
-            <a:ext cx="384048" cy="384048"/>
-          </a:xfrm>
-          <a:prstGeom prst="ellipse">
-            <a:avLst/>
+            <a:off x="502920" y="1600200"/>
+            <a:ext cx="8138160" cy="566928"/>
+          </a:xfrm>
+          <a:prstGeom prst="roundRect">
+            <a:avLst>
+              <a:gd name="adj" fmla="val 16129"/>
+            </a:avLst>
           </a:prstGeom>
           <a:solidFill>
-            <a:schemeClr val="accent1"/>
+            <a:srgbClr val="FFFFFF"/>
           </a:solidFill>
-          <a:ln w="15875">
+          <a:ln w="25400">
             <a:solidFill>
               <a:srgbClr val="1A1A1A"/>
             </a:solidFill>
             <a:prstDash val="solid"/>
           </a:ln>
-        </p:spPr>
-      </p:sp>
-      <p:sp>
-        <p:nvSpPr>
-          <p:cNvPr id="7" name="step-num-text"/>
+          <a:effectLst>
+            <a:outerShdw sx="100000" sy="100000" kx="0" ky="0" algn="bl" rotWithShape="0" blurRad="101600" dist="38100" dir="2700000">
+              <a:srgbClr val="1A1A1A">
+                <a:alpha val="100000"/>
+              </a:srgbClr>
+            </a:outerShdw>
+          </a:effectLst>
+        </p:spPr>
+      </p:sp>
+      <p:sp>
+        <p:nvSpPr>
+          <p:cNvPr id="6" name="Text 3"/>
           <p:cNvSpPr txBox="1"/>
           <p:nvPr/>
         </p:nvSpPr>
         <p:spPr>
           <a:xfrm>
-            <a:off x="548640" y="1805940"/>
-            <a:ext cx="384048" cy="384048"/>
-          </a:xfrm>
-          <a:prstGeom prst="rect">
-            <a:avLst/>
-          </a:prstGeom>
-          <a:noFill/>
-          <a:ln/>
+            <a:off x="640080" y="1682496"/>
+            <a:ext cx="402336" cy="402336"/>
+          </a:xfrm>
+          <a:prstGeom prst="ellipse">
+            <a:avLst/>
+          </a:prstGeom>
+          <a:solidFill>
+            <a:srgbClr val="DD6420"/>
+          </a:solidFill>
+          <a:ln w="19050">
+            <a:solidFill>
+              <a:srgbClr val="1A1A1A"/>
+            </a:solidFill>
+          </a:ln>
         </p:spPr>
         <p:txBody>
           <a:bodyPr wrap="square" lIns="0" tIns="0" rIns="0" bIns="0" rtlCol="0" anchor="ctr"/>
@@ -4864,27 +4884,30 @@
               <a:buNone/>
             </a:pPr>
             <a:r>
-              <a:rPr lang="en-US" sz="1400" b="1" dirty="0">
-                <a:solidFill>
-                  <a:schemeClr val="tx1"/>
-                </a:solidFill>
+              <a:rPr lang="ja-JP" altLang="en-US" sz="1500" dirty="0">
+                <a:solidFill>
+                  <a:srgbClr val="FFFFFF"/>
+                </a:solidFill>
+                <a:latin typeface="Dela Gothic One" pitchFamily="34" charset="0"/>
+                <a:ea typeface="けいふぉんと" pitchFamily="34" charset="-122"/>
+                <a:cs typeface="Dela Gothic One" pitchFamily="34" charset="-120"/>
               </a:rPr>
               <a:t>1</a:t>
             </a:r>
-            <a:endParaRPr lang="en-US" sz="1400" dirty="0"/>
-          </a:p>
-        </p:txBody>
-      </p:sp>
-      <p:sp>
-        <p:nvSpPr>
-          <p:cNvPr id="8" name="step-text"/>
+            <a:endParaRPr lang="ja-JP" sz="1500" dirty="0"/>
+          </a:p>
+        </p:txBody>
+      </p:sp>
+      <p:sp>
+        <p:nvSpPr>
+          <p:cNvPr id="7" name="step-text"/>
           <p:cNvSpPr txBox="1"/>
           <p:nvPr/>
         </p:nvSpPr>
         <p:spPr>
           <a:xfrm>
-            <a:off x="1097280" y="1696212"/>
-            <a:ext cx="7498080" cy="603504"/>
+            <a:off x="1234440" y="1600200"/>
+            <a:ext cx="7269480" cy="566928"/>
           </a:xfrm>
           <a:prstGeom prst="rect">
             <a:avLst/>
@@ -4893,65 +4916,85 @@
           <a:ln/>
         </p:spPr>
         <p:txBody>
-          <a:bodyPr wrap="square" lIns="0" tIns="0" rIns="0" bIns="0" rtlCol="0" anchor="ctr"/>
+          <a:bodyPr wrap="square" lIns="0" tIns="0" rIns="0" bIns="0" rtlCol="0" anchor="ctr">
+            <a:normAutofit/>
+          </a:bodyPr>
           <a:lstStyle/>
           <a:p>
             <a:pPr indent="0" marL="0">
               <a:buNone/>
             </a:pPr>
             <a:r>
-              <a:rPr lang="en-US" sz="1450" dirty="0">
-                <a:solidFill>
-                  <a:schemeClr val="tx1"/>
-                </a:solidFill>
+              <a:rPr lang="ja-JP" altLang="en-US" sz="1400" b="1" dirty="0">
+                <a:solidFill>
+                  <a:srgbClr val="1A1A1A"/>
+                </a:solidFill>
+                <a:latin typeface="Noto Sans JP" pitchFamily="34" charset="0"/>
+                <a:ea typeface="Noto Sans JP" pitchFamily="34" charset="-122"/>
+                <a:cs typeface="Noto Sans JP" pitchFamily="34" charset="-120"/>
               </a:rPr>
               <a:t>「マナベル_（会社名）」というグループを作る</a:t>
             </a:r>
-            <a:endParaRPr lang="en-US" sz="1450" dirty="0"/>
-          </a:p>
-        </p:txBody>
-      </p:sp>
-      <p:sp>
-        <p:nvSpPr>
-          <p:cNvPr id="9" name="step-num"/>
+            <a:endParaRPr lang="ja-JP" sz="1400" dirty="0"/>
+          </a:p>
+        </p:txBody>
+      </p:sp>
+      <p:sp>
+        <p:nvSpPr>
+          <p:cNvPr id="8" name="card"/>
           <p:cNvSpPr/>
           <p:nvPr/>
         </p:nvSpPr>
         <p:spPr>
           <a:xfrm>
-            <a:off x="548640" y="2409444"/>
-            <a:ext cx="384048" cy="384048"/>
-          </a:xfrm>
-          <a:prstGeom prst="ellipse">
-            <a:avLst/>
+            <a:off x="502920" y="2295144"/>
+            <a:ext cx="8138160" cy="566928"/>
+          </a:xfrm>
+          <a:prstGeom prst="roundRect">
+            <a:avLst>
+              <a:gd name="adj" fmla="val 16129"/>
+            </a:avLst>
           </a:prstGeom>
           <a:solidFill>
-            <a:schemeClr val="accent1"/>
+            <a:srgbClr val="FFFFFF"/>
           </a:solidFill>
-          <a:ln w="15875">
+          <a:ln w="25400">
             <a:solidFill>
               <a:srgbClr val="1A1A1A"/>
             </a:solidFill>
             <a:prstDash val="solid"/>
           </a:ln>
-        </p:spPr>
-      </p:sp>
-      <p:sp>
-        <p:nvSpPr>
-          <p:cNvPr id="10" name="step-num-text"/>
+          <a:effectLst>
+            <a:outerShdw sx="100000" sy="100000" kx="0" ky="0" algn="bl" rotWithShape="0" blurRad="101600" dist="38100" dir="2700000">
+              <a:srgbClr val="1A1A1A">
+                <a:alpha val="100000"/>
+              </a:srgbClr>
+            </a:outerShdw>
+          </a:effectLst>
+        </p:spPr>
+      </p:sp>
+      <p:sp>
+        <p:nvSpPr>
+          <p:cNvPr id="9" name="Text 6"/>
           <p:cNvSpPr txBox="1"/>
           <p:nvPr/>
         </p:nvSpPr>
         <p:spPr>
           <a:xfrm>
-            <a:off x="548640" y="2409444"/>
-            <a:ext cx="384048" cy="384048"/>
-          </a:xfrm>
-          <a:prstGeom prst="rect">
-            <a:avLst/>
-          </a:prstGeom>
-          <a:noFill/>
-          <a:ln/>
+            <a:off x="640080" y="2377440"/>
+            <a:ext cx="402336" cy="402336"/>
+          </a:xfrm>
+          <a:prstGeom prst="ellipse">
+            <a:avLst/>
+          </a:prstGeom>
+          <a:solidFill>
+            <a:srgbClr val="DD6420"/>
+          </a:solidFill>
+          <a:ln w="19050">
+            <a:solidFill>
+              <a:srgbClr val="1A1A1A"/>
+            </a:solidFill>
+          </a:ln>
         </p:spPr>
         <p:txBody>
           <a:bodyPr wrap="square" lIns="0" tIns="0" rIns="0" bIns="0" rtlCol="0" anchor="ctr"/>
@@ -4961,27 +5004,30 @@
               <a:buNone/>
             </a:pPr>
             <a:r>
-              <a:rPr lang="en-US" sz="1400" b="1" dirty="0">
-                <a:solidFill>
-                  <a:schemeClr val="tx1"/>
-                </a:solidFill>
+              <a:rPr lang="ja-JP" altLang="en-US" sz="1500" dirty="0">
+                <a:solidFill>
+                  <a:srgbClr val="FFFFFF"/>
+                </a:solidFill>
+                <a:latin typeface="Dela Gothic One" pitchFamily="34" charset="0"/>
+                <a:ea typeface="けいふぉんと" pitchFamily="34" charset="-122"/>
+                <a:cs typeface="Dela Gothic One" pitchFamily="34" charset="-120"/>
               </a:rPr>
               <a:t>2</a:t>
             </a:r>
-            <a:endParaRPr lang="en-US" sz="1400" dirty="0"/>
-          </a:p>
-        </p:txBody>
-      </p:sp>
-      <p:sp>
-        <p:nvSpPr>
-          <p:cNvPr id="11" name="step-text"/>
+            <a:endParaRPr lang="ja-JP" sz="1500" dirty="0"/>
+          </a:p>
+        </p:txBody>
+      </p:sp>
+      <p:sp>
+        <p:nvSpPr>
+          <p:cNvPr id="10" name="step-text"/>
           <p:cNvSpPr txBox="1"/>
           <p:nvPr/>
         </p:nvSpPr>
         <p:spPr>
           <a:xfrm>
-            <a:off x="1097280" y="2299716"/>
-            <a:ext cx="7498080" cy="603504"/>
+            <a:off x="1234440" y="2295144"/>
+            <a:ext cx="7269480" cy="566928"/>
           </a:xfrm>
           <a:prstGeom prst="rect">
             <a:avLst/>
@@ -4990,65 +5036,85 @@
           <a:ln/>
         </p:spPr>
         <p:txBody>
-          <a:bodyPr wrap="square" lIns="0" tIns="0" rIns="0" bIns="0" rtlCol="0" anchor="ctr"/>
+          <a:bodyPr wrap="square" lIns="0" tIns="0" rIns="0" bIns="0" rtlCol="0" anchor="ctr">
+            <a:normAutofit/>
+          </a:bodyPr>
           <a:lstStyle/>
           <a:p>
             <a:pPr indent="0" marL="0">
               <a:buNone/>
             </a:pPr>
             <a:r>
-              <a:rPr lang="en-US" sz="1450" dirty="0">
-                <a:solidFill>
-                  <a:schemeClr val="tx1"/>
-                </a:solidFill>
+              <a:rPr lang="ja-JP" altLang="en-US" sz="1400" b="1" dirty="0">
+                <a:solidFill>
+                  <a:srgbClr val="1A1A1A"/>
+                </a:solidFill>
+                <a:latin typeface="Noto Sans JP" pitchFamily="34" charset="0"/>
+                <a:ea typeface="Noto Sans JP" pitchFamily="34" charset="-122"/>
+                <a:cs typeface="Noto Sans JP" pitchFamily="34" charset="-120"/>
               </a:rPr>
               <a:t>Docsで新しい文書を作り、第2回の設計シートを貼る</a:t>
             </a:r>
-            <a:endParaRPr lang="en-US" sz="1450" dirty="0"/>
-          </a:p>
-        </p:txBody>
-      </p:sp>
-      <p:sp>
-        <p:nvSpPr>
-          <p:cNvPr id="12" name="step-num"/>
+            <a:endParaRPr lang="ja-JP" sz="1400" dirty="0"/>
+          </a:p>
+        </p:txBody>
+      </p:sp>
+      <p:sp>
+        <p:nvSpPr>
+          <p:cNvPr id="11" name="card"/>
           <p:cNvSpPr/>
           <p:nvPr/>
         </p:nvSpPr>
         <p:spPr>
           <a:xfrm>
-            <a:off x="548640" y="3012948"/>
-            <a:ext cx="384048" cy="384048"/>
-          </a:xfrm>
-          <a:prstGeom prst="ellipse">
-            <a:avLst/>
+            <a:off x="502920" y="2990088"/>
+            <a:ext cx="8138160" cy="566928"/>
+          </a:xfrm>
+          <a:prstGeom prst="roundRect">
+            <a:avLst>
+              <a:gd name="adj" fmla="val 16129"/>
+            </a:avLst>
           </a:prstGeom>
           <a:solidFill>
-            <a:schemeClr val="accent1"/>
+            <a:srgbClr val="FFFFFF"/>
           </a:solidFill>
-          <a:ln w="15875">
+          <a:ln w="25400">
             <a:solidFill>
               <a:srgbClr val="1A1A1A"/>
             </a:solidFill>
             <a:prstDash val="solid"/>
           </a:ln>
-        </p:spPr>
-      </p:sp>
-      <p:sp>
-        <p:nvSpPr>
-          <p:cNvPr id="13" name="step-num-text"/>
+          <a:effectLst>
+            <a:outerShdw sx="100000" sy="100000" kx="0" ky="0" algn="bl" rotWithShape="0" blurRad="101600" dist="38100" dir="2700000">
+              <a:srgbClr val="1A1A1A">
+                <a:alpha val="100000"/>
+              </a:srgbClr>
+            </a:outerShdw>
+          </a:effectLst>
+        </p:spPr>
+      </p:sp>
+      <p:sp>
+        <p:nvSpPr>
+          <p:cNvPr id="12" name="Text 9"/>
           <p:cNvSpPr txBox="1"/>
           <p:nvPr/>
         </p:nvSpPr>
         <p:spPr>
           <a:xfrm>
-            <a:off x="548640" y="3012948"/>
-            <a:ext cx="384048" cy="384048"/>
-          </a:xfrm>
-          <a:prstGeom prst="rect">
-            <a:avLst/>
-          </a:prstGeom>
-          <a:noFill/>
-          <a:ln/>
+            <a:off x="640080" y="3072384"/>
+            <a:ext cx="402336" cy="402336"/>
+          </a:xfrm>
+          <a:prstGeom prst="ellipse">
+            <a:avLst/>
+          </a:prstGeom>
+          <a:solidFill>
+            <a:srgbClr val="DD6420"/>
+          </a:solidFill>
+          <a:ln w="19050">
+            <a:solidFill>
+              <a:srgbClr val="1A1A1A"/>
+            </a:solidFill>
+          </a:ln>
         </p:spPr>
         <p:txBody>
           <a:bodyPr wrap="square" lIns="0" tIns="0" rIns="0" bIns="0" rtlCol="0" anchor="ctr"/>
@@ -5058,27 +5124,30 @@
               <a:buNone/>
             </a:pPr>
             <a:r>
-              <a:rPr lang="en-US" sz="1400" b="1" dirty="0">
-                <a:solidFill>
-                  <a:schemeClr val="tx1"/>
-                </a:solidFill>
+              <a:rPr lang="ja-JP" altLang="en-US" sz="1500" dirty="0">
+                <a:solidFill>
+                  <a:srgbClr val="FFFFFF"/>
+                </a:solidFill>
+                <a:latin typeface="Dela Gothic One" pitchFamily="34" charset="0"/>
+                <a:ea typeface="けいふぉんと" pitchFamily="34" charset="-122"/>
+                <a:cs typeface="Dela Gothic One" pitchFamily="34" charset="-120"/>
               </a:rPr>
               <a:t>3</a:t>
             </a:r>
-            <a:endParaRPr lang="en-US" sz="1400" dirty="0"/>
-          </a:p>
-        </p:txBody>
-      </p:sp>
-      <p:sp>
-        <p:nvSpPr>
-          <p:cNvPr id="14" name="step-text"/>
+            <a:endParaRPr lang="ja-JP" sz="1500" dirty="0"/>
+          </a:p>
+        </p:txBody>
+      </p:sp>
+      <p:sp>
+        <p:nvSpPr>
+          <p:cNvPr id="13" name="step-text"/>
           <p:cNvSpPr txBox="1"/>
           <p:nvPr/>
         </p:nvSpPr>
         <p:spPr>
           <a:xfrm>
-            <a:off x="1097280" y="2903220"/>
-            <a:ext cx="7498080" cy="603504"/>
+            <a:off x="1234440" y="2990088"/>
+            <a:ext cx="7269480" cy="566928"/>
           </a:xfrm>
           <a:prstGeom prst="rect">
             <a:avLst/>
@@ -5087,65 +5156,85 @@
           <a:ln/>
         </p:spPr>
         <p:txBody>
-          <a:bodyPr wrap="square" lIns="0" tIns="0" rIns="0" bIns="0" rtlCol="0" anchor="ctr"/>
+          <a:bodyPr wrap="square" lIns="0" tIns="0" rIns="0" bIns="0" rtlCol="0" anchor="ctr">
+            <a:normAutofit/>
+          </a:bodyPr>
           <a:lstStyle/>
           <a:p>
             <a:pPr indent="0" marL="0">
               <a:buNone/>
             </a:pPr>
             <a:r>
-              <a:rPr lang="en-US" sz="1450" dirty="0">
-                <a:solidFill>
-                  <a:schemeClr val="tx1"/>
-                </a:solidFill>
+              <a:rPr lang="ja-JP" altLang="en-US" sz="1400" b="1" dirty="0">
+                <a:solidFill>
+                  <a:srgbClr val="1A1A1A"/>
+                </a:solidFill>
+                <a:latin typeface="Noto Sans JP" pitchFamily="34" charset="0"/>
+                <a:ea typeface="Noto Sans JP" pitchFamily="34" charset="-122"/>
+                <a:cs typeface="Noto Sans JP" pitchFamily="34" charset="-120"/>
               </a:rPr>
               <a:t>共有設定で「誰が見られる／編集できるか」を確認する</a:t>
             </a:r>
-            <a:endParaRPr lang="en-US" sz="1450" dirty="0"/>
-          </a:p>
-        </p:txBody>
-      </p:sp>
-      <p:sp>
-        <p:nvSpPr>
-          <p:cNvPr id="15" name="step-num"/>
+            <a:endParaRPr lang="ja-JP" sz="1400" dirty="0"/>
+          </a:p>
+        </p:txBody>
+      </p:sp>
+      <p:sp>
+        <p:nvSpPr>
+          <p:cNvPr id="14" name="card"/>
           <p:cNvSpPr/>
           <p:nvPr/>
         </p:nvSpPr>
         <p:spPr>
           <a:xfrm>
-            <a:off x="548640" y="3616452"/>
-            <a:ext cx="384048" cy="384048"/>
-          </a:xfrm>
-          <a:prstGeom prst="ellipse">
-            <a:avLst/>
+            <a:off x="502920" y="3685032"/>
+            <a:ext cx="8138160" cy="566928"/>
+          </a:xfrm>
+          <a:prstGeom prst="roundRect">
+            <a:avLst>
+              <a:gd name="adj" fmla="val 16129"/>
+            </a:avLst>
           </a:prstGeom>
           <a:solidFill>
-            <a:schemeClr val="accent1"/>
+            <a:srgbClr val="FFFFFF"/>
           </a:solidFill>
-          <a:ln w="15875">
+          <a:ln w="25400">
             <a:solidFill>
               <a:srgbClr val="1A1A1A"/>
             </a:solidFill>
             <a:prstDash val="solid"/>
           </a:ln>
-        </p:spPr>
-      </p:sp>
-      <p:sp>
-        <p:nvSpPr>
-          <p:cNvPr id="16" name="step-num-text"/>
+          <a:effectLst>
+            <a:outerShdw sx="100000" sy="100000" kx="0" ky="0" algn="bl" rotWithShape="0" blurRad="101600" dist="38100" dir="2700000">
+              <a:srgbClr val="1A1A1A">
+                <a:alpha val="100000"/>
+              </a:srgbClr>
+            </a:outerShdw>
+          </a:effectLst>
+        </p:spPr>
+      </p:sp>
+      <p:sp>
+        <p:nvSpPr>
+          <p:cNvPr id="15" name="Text 12"/>
           <p:cNvSpPr txBox="1"/>
           <p:nvPr/>
         </p:nvSpPr>
         <p:spPr>
           <a:xfrm>
-            <a:off x="548640" y="3616452"/>
-            <a:ext cx="384048" cy="384048"/>
-          </a:xfrm>
-          <a:prstGeom prst="rect">
-            <a:avLst/>
-          </a:prstGeom>
-          <a:noFill/>
-          <a:ln/>
+            <a:off x="640080" y="3767328"/>
+            <a:ext cx="402336" cy="402336"/>
+          </a:xfrm>
+          <a:prstGeom prst="ellipse">
+            <a:avLst/>
+          </a:prstGeom>
+          <a:solidFill>
+            <a:srgbClr val="DD6420"/>
+          </a:solidFill>
+          <a:ln w="19050">
+            <a:solidFill>
+              <a:srgbClr val="1A1A1A"/>
+            </a:solidFill>
+          </a:ln>
         </p:spPr>
         <p:txBody>
           <a:bodyPr wrap="square" lIns="0" tIns="0" rIns="0" bIns="0" rtlCol="0" anchor="ctr"/>
@@ -5155,27 +5244,30 @@
               <a:buNone/>
             </a:pPr>
             <a:r>
-              <a:rPr lang="en-US" sz="1400" b="1" dirty="0">
-                <a:solidFill>
-                  <a:schemeClr val="tx1"/>
-                </a:solidFill>
+              <a:rPr lang="ja-JP" altLang="en-US" sz="1500" dirty="0">
+                <a:solidFill>
+                  <a:srgbClr val="FFFFFF"/>
+                </a:solidFill>
+                <a:latin typeface="Dela Gothic One" pitchFamily="34" charset="0"/>
+                <a:ea typeface="けいふぉんと" pitchFamily="34" charset="-122"/>
+                <a:cs typeface="Dela Gothic One" pitchFamily="34" charset="-120"/>
               </a:rPr>
               <a:t>4</a:t>
             </a:r>
-            <a:endParaRPr lang="en-US" sz="1400" dirty="0"/>
-          </a:p>
-        </p:txBody>
-      </p:sp>
-      <p:sp>
-        <p:nvSpPr>
-          <p:cNvPr id="17" name="step-text"/>
+            <a:endParaRPr lang="ja-JP" sz="1500" dirty="0"/>
+          </a:p>
+        </p:txBody>
+      </p:sp>
+      <p:sp>
+        <p:nvSpPr>
+          <p:cNvPr id="16" name="step-text"/>
           <p:cNvSpPr txBox="1"/>
           <p:nvPr/>
         </p:nvSpPr>
         <p:spPr>
           <a:xfrm>
-            <a:off x="1097280" y="3506724"/>
-            <a:ext cx="7498080" cy="603504"/>
+            <a:off x="1234440" y="3685032"/>
+            <a:ext cx="7269480" cy="566928"/>
           </a:xfrm>
           <a:prstGeom prst="rect">
             <a:avLst/>
@@ -5184,21 +5276,26 @@
           <a:ln/>
         </p:spPr>
         <p:txBody>
-          <a:bodyPr wrap="square" lIns="0" tIns="0" rIns="0" bIns="0" rtlCol="0" anchor="ctr"/>
+          <a:bodyPr wrap="square" lIns="0" tIns="0" rIns="0" bIns="0" rtlCol="0" anchor="ctr">
+            <a:normAutofit/>
+          </a:bodyPr>
           <a:lstStyle/>
           <a:p>
             <a:pPr indent="0" marL="0">
               <a:buNone/>
             </a:pPr>
             <a:r>
-              <a:rPr lang="en-US" sz="1450" dirty="0">
-                <a:solidFill>
-                  <a:schemeClr val="tx1"/>
-                </a:solidFill>
+              <a:rPr lang="ja-JP" altLang="en-US" sz="1400" b="1" dirty="0">
+                <a:solidFill>
+                  <a:srgbClr val="1A1A1A"/>
+                </a:solidFill>
+                <a:latin typeface="Noto Sans JP" pitchFamily="34" charset="0"/>
+                <a:ea typeface="Noto Sans JP" pitchFamily="34" charset="-122"/>
+                <a:cs typeface="Noto Sans JP" pitchFamily="34" charset="-120"/>
               </a:rPr>
               <a:t>グループにリンクを送り、メンションとコメントを1回ずつ試す</a:t>
             </a:r>
-            <a:endParaRPr lang="en-US" sz="1450" dirty="0"/>
+            <a:endParaRPr lang="ja-JP" sz="1400" dirty="0"/>
           </a:p>
         </p:txBody>
       </p:sp>
@@ -5214,8 +5311,8 @@
         </p:nvSpPr>
         <p:spPr>
           <a:xfrm>
-            <a:off x="8229600" y="4773168"/>
-            <a:ext cx="365760" cy="228600"/>
+            <a:off x="8366760" y="4754880"/>
+            <a:ext cx="365760" cy="274320"/>
           </a:xfrm>
           <a:prstGeom prst="rect">
             <a:avLst/>
@@ -5227,20 +5324,23 @@
           </a:extLst>
         </p:spPr>
         <p:txBody>
-          <a:bodyPr/>
+          <a:bodyPr anchor="ctr"/>
           <a:lstStyle>
             <a:lvl1pPr>
-              <a:defRPr sz="900">
-                <a:solidFill>
-                  <a:srgbClr val="5A6872"/>
-                </a:solidFill>
+              <a:defRPr sz="850">
+                <a:solidFill>
+                  <a:srgbClr val="FFFFFF"/>
+                </a:solidFill>
+                <a:latin typeface="Noto Sans JP"/>
+                <a:ea typeface="Noto Sans JP"/>
+                <a:cs typeface="Noto Sans JP"/>
               </a:defRPr>
             </a:lvl1pPr>
           </a:lstStyle>
           <a:p>
             <a:pPr algn="r"/>
             <a:fld id="{F7021451-1387-4CA6-816F-3879F97B5CBC}" type="slidenum">
-              <a:rPr b="0" lang="en-US"/>
+              <a:rPr b="1" lang="en-US"/>
               <a:t>4</a:t>
             </a:fld>
             <a:endParaRPr lang="en-US"/>
@@ -5275,15 +5375,58 @@
       <p:sp>
         <p:nvSpPr>
           <p:cNvPr id="2" name="Text 0"/>
-          <p:cNvSpPr/>
-          <p:nvPr>
-            <p:ph idx="100" type="title" hasCustomPrompt="1"/>
-          </p:nvPr>
-        </p:nvSpPr>
-        <p:spPr>
-          <a:xfrm>
-            <a:off x="548640" y="658368"/>
-            <a:ext cx="8046720" cy="566928"/>
+          <p:cNvSpPr txBox="1"/>
+          <p:nvPr/>
+        </p:nvSpPr>
+        <p:spPr>
+          <a:xfrm rot="-180000">
+            <a:off x="411480" y="201168"/>
+            <a:ext cx="1478128" cy="352044"/>
+          </a:xfrm>
+          <a:prstGeom prst="rect">
+            <a:avLst/>
+          </a:prstGeom>
+          <a:solidFill>
+            <a:srgbClr val="1A1A1A"/>
+          </a:solidFill>
+          <a:ln>
+            <a:solidFill>
+              <a:srgbClr val="1A1A1A"/>
+            </a:solidFill>
+          </a:ln>
+        </p:spPr>
+        <p:txBody>
+          <a:bodyPr wrap="square" lIns="0" tIns="0" rIns="0" bIns="0" rtlCol="0" anchor="ctr"/>
+          <a:lstStyle/>
+          <a:p>
+            <a:pPr algn="ctr" indent="0" marL="0">
+              <a:buNone/>
+            </a:pPr>
+            <a:r>
+              <a:rPr lang="ja-JP" altLang="en-US" sz="1100" dirty="0">
+                <a:solidFill>
+                  <a:srgbClr val="FFFFFF"/>
+                </a:solidFill>
+                <a:latin typeface="Dela Gothic One" pitchFamily="34" charset="0"/>
+                <a:ea typeface="けいふぉんと" pitchFamily="34" charset="-122"/>
+                <a:cs typeface="Dela Gothic One" pitchFamily="34" charset="-120"/>
+              </a:rPr>
+              <a:t>説明② 10分</a:t>
+            </a:r>
+            <a:endParaRPr lang="ja-JP" sz="1100" dirty="0"/>
+          </a:p>
+        </p:txBody>
+      </p:sp>
+      <p:sp>
+        <p:nvSpPr>
+          <p:cNvPr id="3" name="Text 1"/>
+          <p:cNvSpPr txBox="1"/>
+          <p:nvPr/>
+        </p:nvSpPr>
+        <p:spPr>
+          <a:xfrm>
+            <a:off x="411480" y="502920"/>
+            <a:ext cx="8321040" cy="685800"/>
           </a:xfrm>
           <a:prstGeom prst="rect">
             <a:avLst/>
@@ -5292,105 +5435,79 @@
           <a:ln/>
         </p:spPr>
         <p:txBody>
-          <a:bodyPr wrap="square" lIns="0" tIns="0" rIns="0" bIns="0" rtlCol="0" anchor="ctr"/>
+          <a:bodyPr wrap="square" lIns="0" tIns="0" rIns="0" bIns="0" rtlCol="0" anchor="ctr">
+            <a:normAutofit/>
+          </a:bodyPr>
           <a:lstStyle/>
           <a:p>
-            <a:pPr algn="l" indent="0" marL="0">
+            <a:pPr indent="0" marL="0">
               <a:buNone/>
             </a:pPr>
             <a:r>
-              <a:rPr lang="en-US" sz="2400" b="1" dirty="0">
-                <a:solidFill>
-                  <a:schemeClr val="tx1"/>
-                </a:solidFill>
+              <a:rPr lang="ja-JP" altLang="en-US" sz="2600" dirty="0">
+                <a:solidFill>
+                  <a:srgbClr val="1A1A1A"/>
+                </a:solidFill>
+                <a:latin typeface="Dela Gothic One" pitchFamily="34" charset="0"/>
+                <a:ea typeface="けいふぉんと" pitchFamily="34" charset="-122"/>
+                <a:cs typeface="Dela Gothic One" pitchFamily="34" charset="-120"/>
               </a:rPr>
               <a:t>迷ったら、この置き場所</a:t>
             </a:r>
-            <a:endParaRPr lang="en-US" sz="2400" dirty="0"/>
-          </a:p>
-        </p:txBody>
-      </p:sp>
-      <p:sp>
-        <p:nvSpPr>
-          <p:cNvPr id="3" name="chip"/>
+            <a:endParaRPr lang="ja-JP" sz="2600" dirty="0"/>
+          </a:p>
+        </p:txBody>
+      </p:sp>
+      <p:sp>
+        <p:nvSpPr>
+          <p:cNvPr id="5" name="card"/>
           <p:cNvSpPr/>
           <p:nvPr/>
         </p:nvSpPr>
         <p:spPr>
           <a:xfrm>
-            <a:off x="548640" y="292608"/>
-            <a:ext cx="1344168" cy="292608"/>
+            <a:off x="502920" y="1417320"/>
+            <a:ext cx="2542032" cy="2331720"/>
           </a:xfrm>
           <a:prstGeom prst="roundRect">
             <a:avLst>
-              <a:gd name="adj" fmla="val 50000"/>
+              <a:gd name="adj" fmla="val 3922"/>
             </a:avLst>
           </a:prstGeom>
           <a:solidFill>
-            <a:schemeClr val="tx1"/>
+            <a:srgbClr val="FFFFFF"/>
           </a:solidFill>
-          <a:ln w="12700">
+          <a:ln w="25400">
             <a:solidFill>
-              <a:schemeClr val="tx1"/>
+              <a:srgbClr val="1A1A1A"/>
             </a:solidFill>
             <a:prstDash val="solid"/>
           </a:ln>
-        </p:spPr>
-      </p:sp>
-      <p:sp>
-        <p:nvSpPr>
-          <p:cNvPr id="4" name="chip-text"/>
-          <p:cNvSpPr txBox="1"/>
-          <p:nvPr/>
-        </p:nvSpPr>
-        <p:spPr>
-          <a:xfrm>
-            <a:off x="548640" y="292608"/>
-            <a:ext cx="1344168" cy="292608"/>
-          </a:xfrm>
-          <a:prstGeom prst="rect">
-            <a:avLst/>
-          </a:prstGeom>
-          <a:noFill/>
-          <a:ln/>
-        </p:spPr>
-        <p:txBody>
-          <a:bodyPr wrap="square" lIns="0" tIns="0" rIns="0" bIns="0" rtlCol="0" anchor="ctr"/>
-          <a:lstStyle/>
-          <a:p>
-            <a:pPr algn="ctr" indent="0" marL="0">
-              <a:buNone/>
-            </a:pPr>
-            <a:r>
-              <a:rPr lang="en-US" sz="1100" b="1" dirty="0">
-                <a:solidFill>
-                  <a:schemeClr val="accent1"/>
-                </a:solidFill>
-              </a:rPr>
-              <a:t>説明② 10分</a:t>
-            </a:r>
-            <a:endParaRPr lang="en-US" sz="1100" dirty="0"/>
-          </a:p>
-        </p:txBody>
-      </p:sp>
-      <p:sp>
-        <p:nvSpPr>
-          <p:cNvPr id="6" name="card"/>
+          <a:effectLst>
+            <a:outerShdw sx="100000" sy="100000" kx="0" ky="0" algn="bl" rotWithShape="0" blurRad="101600" dist="50800" dir="2700000">
+              <a:srgbClr val="1A1A1A">
+                <a:alpha val="100000"/>
+              </a:srgbClr>
+            </a:outerShdw>
+          </a:effectLst>
+        </p:spPr>
+      </p:sp>
+      <p:sp>
+        <p:nvSpPr>
+          <p:cNvPr id="6" name="icon-circle"/>
           <p:cNvSpPr/>
           <p:nvPr/>
         </p:nvSpPr>
         <p:spPr>
           <a:xfrm>
-            <a:off x="548640" y="1463040"/>
-            <a:ext cx="2529840" cy="2286000"/>
-          </a:xfrm>
-          <a:prstGeom prst="roundRect">
-            <a:avLst>
-              <a:gd name="adj" fmla="val 4800"/>
-            </a:avLst>
+            <a:off x="704088" y="1618488"/>
+            <a:ext cx="548640" cy="548640"/>
+          </a:xfrm>
+          <a:prstGeom prst="ellipse">
+            <a:avLst/>
           </a:prstGeom>
           <a:solidFill>
-            <a:schemeClr val="bg1"/>
+            <a:srgbClr val="DD6420"/>
           </a:solidFill>
           <a:ln w="19050">
             <a:solidFill>
@@ -5398,43 +5515,11 @@
             </a:solidFill>
             <a:prstDash val="solid"/>
           </a:ln>
-          <a:effectLst>
-            <a:outerShdw sx="100000" sy="100000" kx="0" ky="0" algn="bl" rotWithShape="0" blurRad="101600" dist="38100" dir="2700000">
-              <a:srgbClr val="000000">
-                <a:alpha val="18000"/>
-              </a:srgbClr>
-            </a:outerShdw>
-          </a:effectLst>
-        </p:spPr>
-      </p:sp>
-      <p:sp>
-        <p:nvSpPr>
-          <p:cNvPr id="7" name="icon-circle"/>
-          <p:cNvSpPr/>
-          <p:nvPr/>
-        </p:nvSpPr>
-        <p:spPr>
-          <a:xfrm>
-            <a:off x="731520" y="1645920"/>
-            <a:ext cx="502920" cy="502920"/>
-          </a:xfrm>
-          <a:prstGeom prst="ellipse">
-            <a:avLst/>
-          </a:prstGeom>
-          <a:solidFill>
-            <a:schemeClr val="accent1"/>
-          </a:solidFill>
-          <a:ln w="15875">
-            <a:solidFill>
-              <a:srgbClr val="1A1A1A"/>
-            </a:solidFill>
-            <a:prstDash val="solid"/>
-          </a:ln>
         </p:spPr>
       </p:sp>
       <p:pic>
         <p:nvPicPr>
-          <p:cNvPr id="8" name="icon" descr="preencoded.png">    </p:cNvPr>
+          <p:cNvPr id="7" name="icon" descr="preencoded.png">    </p:cNvPr>
           <p:cNvPicPr>
             <a:picLocks noChangeAspect="1"/>
           </p:cNvPicPr>
@@ -5448,8 +5533,8 @@
         </p:blipFill>
         <p:spPr>
           <a:xfrm>
-            <a:off x="862279" y="1776679"/>
-            <a:ext cx="241402" cy="241402"/>
+            <a:off x="841248" y="1755648"/>
+            <a:ext cx="274320" cy="274320"/>
           </a:xfrm>
           <a:prstGeom prst="rect">
             <a:avLst/>
@@ -5458,14 +5543,14 @@
       </p:pic>
       <p:sp>
         <p:nvSpPr>
-          <p:cNvPr id="9" name="card-head"/>
+          <p:cNvPr id="8" name="Text 4"/>
           <p:cNvSpPr txBox="1"/>
           <p:nvPr/>
         </p:nvSpPr>
         <p:spPr>
           <a:xfrm>
-            <a:off x="731520" y="2286000"/>
-            <a:ext cx="2164080" cy="365760"/>
+            <a:off x="1371600" y="1618488"/>
+            <a:ext cx="1490472" cy="548640"/>
           </a:xfrm>
           <a:prstGeom prst="rect">
             <a:avLst/>
@@ -5474,34 +5559,39 @@
           <a:ln/>
         </p:spPr>
         <p:txBody>
-          <a:bodyPr wrap="square" lIns="0" tIns="0" rIns="0" bIns="0" rtlCol="0" anchor="ctr"/>
+          <a:bodyPr wrap="square" lIns="0" tIns="0" rIns="0" bIns="0" rtlCol="0" anchor="ctr">
+            <a:normAutofit/>
+          </a:bodyPr>
           <a:lstStyle/>
           <a:p>
             <a:pPr indent="0" marL="0">
               <a:buNone/>
             </a:pPr>
             <a:r>
-              <a:rPr lang="en-US" sz="1500" b="1" dirty="0">
-                <a:solidFill>
-                  <a:schemeClr val="tx1"/>
-                </a:solidFill>
+              <a:rPr lang="ja-JP" altLang="en-US" sz="1500" dirty="0">
+                <a:solidFill>
+                  <a:srgbClr val="1A1A1A"/>
+                </a:solidFill>
+                <a:latin typeface="Dela Gothic One" pitchFamily="34" charset="0"/>
+                <a:ea typeface="けいふぉんと" pitchFamily="34" charset="-122"/>
+                <a:cs typeface="Dela Gothic One" pitchFamily="34" charset="-120"/>
               </a:rPr>
               <a:t>メッセンジャー</a:t>
             </a:r>
-            <a:endParaRPr lang="en-US" sz="1500" dirty="0"/>
-          </a:p>
-        </p:txBody>
-      </p:sp>
-      <p:sp>
-        <p:nvSpPr>
-          <p:cNvPr id="10" name="card-body"/>
+            <a:endParaRPr lang="ja-JP" sz="1500" dirty="0"/>
+          </a:p>
+        </p:txBody>
+      </p:sp>
+      <p:sp>
+        <p:nvSpPr>
+          <p:cNvPr id="9" name="card-body"/>
           <p:cNvSpPr txBox="1"/>
           <p:nvPr/>
         </p:nvSpPr>
         <p:spPr>
           <a:xfrm>
-            <a:off x="731520" y="2697480"/>
-            <a:ext cx="2164080" cy="914400"/>
+            <a:off x="704088" y="2313432"/>
+            <a:ext cx="2139696" cy="1298448"/>
           </a:xfrm>
           <a:prstGeom prst="rect">
             <a:avLst/>
@@ -5510,7 +5600,9 @@
           <a:ln/>
         </p:spPr>
         <p:txBody>
-          <a:bodyPr wrap="square" lIns="0" tIns="0" rIns="0" bIns="0" rtlCol="0" anchor="t"/>
+          <a:bodyPr wrap="square" lIns="0" tIns="0" rIns="0" bIns="0" rtlCol="0" anchor="t">
+            <a:normAutofit/>
+          </a:bodyPr>
           <a:lstStyle/>
           <a:p>
             <a:pPr indent="0" marL="0">
@@ -5520,35 +5612,70 @@
               <a:buNone/>
             </a:pPr>
             <a:r>
-              <a:rPr lang="en-US" sz="1300" dirty="0">
-                <a:solidFill>
-                  <a:schemeClr val="tx1"/>
-                </a:solidFill>
+              <a:rPr lang="ja-JP" altLang="en-US" sz="1350" b="1" dirty="0">
+                <a:solidFill>
+                  <a:srgbClr val="1A1A1A"/>
+                </a:solidFill>
+                <a:latin typeface="Noto Sans JP" pitchFamily="34" charset="0"/>
+                <a:ea typeface="Noto Sans JP" pitchFamily="34" charset="-122"/>
+                <a:cs typeface="Noto Sans JP" pitchFamily="34" charset="-120"/>
               </a:rPr>
               <a:t>流れていってよい連絡</a:t>
             </a:r>
-            <a:endParaRPr lang="en-US" sz="1300" dirty="0"/>
-          </a:p>
-        </p:txBody>
-      </p:sp>
-      <p:sp>
-        <p:nvSpPr>
-          <p:cNvPr id="11" name="card"/>
+            <a:endParaRPr lang="ja-JP" sz="1350" dirty="0"/>
+          </a:p>
+        </p:txBody>
+      </p:sp>
+      <p:sp>
+        <p:nvSpPr>
+          <p:cNvPr id="10" name="card"/>
           <p:cNvSpPr/>
           <p:nvPr/>
         </p:nvSpPr>
         <p:spPr>
           <a:xfrm>
-            <a:off x="3307080" y="1463040"/>
-            <a:ext cx="2529840" cy="2286000"/>
+            <a:off x="3300984" y="1417320"/>
+            <a:ext cx="2542032" cy="2331720"/>
           </a:xfrm>
           <a:prstGeom prst="roundRect">
             <a:avLst>
-              <a:gd name="adj" fmla="val 4800"/>
+              <a:gd name="adj" fmla="val 3922"/>
             </a:avLst>
           </a:prstGeom>
           <a:solidFill>
-            <a:schemeClr val="bg1"/>
+            <a:srgbClr val="FFFFFF"/>
+          </a:solidFill>
+          <a:ln w="25400">
+            <a:solidFill>
+              <a:srgbClr val="1A1A1A"/>
+            </a:solidFill>
+            <a:prstDash val="solid"/>
+          </a:ln>
+          <a:effectLst>
+            <a:outerShdw sx="100000" sy="100000" kx="0" ky="0" algn="bl" rotWithShape="0" blurRad="101600" dist="50800" dir="2700000">
+              <a:srgbClr val="1A1A1A">
+                <a:alpha val="100000"/>
+              </a:srgbClr>
+            </a:outerShdw>
+          </a:effectLst>
+        </p:spPr>
+      </p:sp>
+      <p:sp>
+        <p:nvSpPr>
+          <p:cNvPr id="11" name="icon-circle"/>
+          <p:cNvSpPr/>
+          <p:nvPr/>
+        </p:nvSpPr>
+        <p:spPr>
+          <a:xfrm>
+            <a:off x="3502152" y="1618488"/>
+            <a:ext cx="548640" cy="548640"/>
+          </a:xfrm>
+          <a:prstGeom prst="ellipse">
+            <a:avLst/>
+          </a:prstGeom>
+          <a:solidFill>
+            <a:srgbClr val="DD6420"/>
           </a:solidFill>
           <a:ln w="19050">
             <a:solidFill>
@@ -5556,43 +5683,11 @@
             </a:solidFill>
             <a:prstDash val="solid"/>
           </a:ln>
-          <a:effectLst>
-            <a:outerShdw sx="100000" sy="100000" kx="0" ky="0" algn="bl" rotWithShape="0" blurRad="101600" dist="38100" dir="2700000">
-              <a:srgbClr val="000000">
-                <a:alpha val="18000"/>
-              </a:srgbClr>
-            </a:outerShdw>
-          </a:effectLst>
-        </p:spPr>
-      </p:sp>
-      <p:sp>
-        <p:nvSpPr>
-          <p:cNvPr id="12" name="icon-circle"/>
-          <p:cNvSpPr/>
-          <p:nvPr/>
-        </p:nvSpPr>
-        <p:spPr>
-          <a:xfrm>
-            <a:off x="3489960" y="1645920"/>
-            <a:ext cx="502920" cy="502920"/>
-          </a:xfrm>
-          <a:prstGeom prst="ellipse">
-            <a:avLst/>
-          </a:prstGeom>
-          <a:solidFill>
-            <a:schemeClr val="accent1"/>
-          </a:solidFill>
-          <a:ln w="15875">
-            <a:solidFill>
-              <a:srgbClr val="1A1A1A"/>
-            </a:solidFill>
-            <a:prstDash val="solid"/>
-          </a:ln>
         </p:spPr>
       </p:sp>
       <p:pic>
         <p:nvPicPr>
-          <p:cNvPr id="13" name="icon" descr="preencoded.png">    </p:cNvPr>
+          <p:cNvPr id="12" name="icon" descr="preencoded.png">    </p:cNvPr>
           <p:cNvPicPr>
             <a:picLocks noChangeAspect="1"/>
           </p:cNvPicPr>
@@ -5606,8 +5701,8 @@
         </p:blipFill>
         <p:spPr>
           <a:xfrm>
-            <a:off x="3620719" y="1776679"/>
-            <a:ext cx="241402" cy="241402"/>
+            <a:off x="3639312" y="1755648"/>
+            <a:ext cx="274320" cy="274320"/>
           </a:xfrm>
           <a:prstGeom prst="rect">
             <a:avLst/>
@@ -5616,14 +5711,14 @@
       </p:pic>
       <p:sp>
         <p:nvSpPr>
-          <p:cNvPr id="14" name="card-head"/>
+          <p:cNvPr id="13" name="Text 8"/>
           <p:cNvSpPr txBox="1"/>
           <p:nvPr/>
         </p:nvSpPr>
         <p:spPr>
           <a:xfrm>
-            <a:off x="3489960" y="2286000"/>
-            <a:ext cx="2164080" cy="365760"/>
+            <a:off x="4169664" y="1618488"/>
+            <a:ext cx="1490472" cy="548640"/>
           </a:xfrm>
           <a:prstGeom prst="rect">
             <a:avLst/>
@@ -5632,34 +5727,39 @@
           <a:ln/>
         </p:spPr>
         <p:txBody>
-          <a:bodyPr wrap="square" lIns="0" tIns="0" rIns="0" bIns="0" rtlCol="0" anchor="ctr"/>
+          <a:bodyPr wrap="square" lIns="0" tIns="0" rIns="0" bIns="0" rtlCol="0" anchor="ctr">
+            <a:normAutofit/>
+          </a:bodyPr>
           <a:lstStyle/>
           <a:p>
             <a:pPr indent="0" marL="0">
               <a:buNone/>
             </a:pPr>
             <a:r>
-              <a:rPr lang="en-US" sz="1500" b="1" dirty="0">
-                <a:solidFill>
-                  <a:schemeClr val="tx1"/>
-                </a:solidFill>
+              <a:rPr lang="ja-JP" altLang="en-US" sz="1250" dirty="0">
+                <a:solidFill>
+                  <a:srgbClr val="1A1A1A"/>
+                </a:solidFill>
+                <a:latin typeface="Dela Gothic One" pitchFamily="34" charset="0"/>
+                <a:ea typeface="けいふぉんと" pitchFamily="34" charset="-122"/>
+                <a:cs typeface="Dela Gothic One" pitchFamily="34" charset="-120"/>
               </a:rPr>
               <a:t>Wiki（Docs）</a:t>
             </a:r>
-            <a:endParaRPr lang="en-US" sz="1500" dirty="0"/>
-          </a:p>
-        </p:txBody>
-      </p:sp>
-      <p:sp>
-        <p:nvSpPr>
-          <p:cNvPr id="15" name="card-body"/>
+            <a:endParaRPr lang="ja-JP" sz="1250" dirty="0"/>
+          </a:p>
+        </p:txBody>
+      </p:sp>
+      <p:sp>
+        <p:nvSpPr>
+          <p:cNvPr id="14" name="card-body"/>
           <p:cNvSpPr txBox="1"/>
           <p:nvPr/>
         </p:nvSpPr>
         <p:spPr>
           <a:xfrm>
-            <a:off x="3489960" y="2697480"/>
-            <a:ext cx="2164080" cy="914400"/>
+            <a:off x="3502152" y="2313432"/>
+            <a:ext cx="2139696" cy="1298448"/>
           </a:xfrm>
           <a:prstGeom prst="rect">
             <a:avLst/>
@@ -5668,7 +5768,9 @@
           <a:ln/>
         </p:spPr>
         <p:txBody>
-          <a:bodyPr wrap="square" lIns="0" tIns="0" rIns="0" bIns="0" rtlCol="0" anchor="t"/>
+          <a:bodyPr wrap="square" lIns="0" tIns="0" rIns="0" bIns="0" rtlCol="0" anchor="t">
+            <a:normAutofit/>
+          </a:bodyPr>
           <a:lstStyle/>
           <a:p>
             <a:pPr indent="0" marL="0">
@@ -5678,14 +5780,17 @@
               <a:buNone/>
             </a:pPr>
             <a:r>
-              <a:rPr lang="en-US" sz="1300" dirty="0">
-                <a:solidFill>
-                  <a:schemeClr val="tx1"/>
-                </a:solidFill>
+              <a:rPr lang="ja-JP" altLang="en-US" sz="1350" b="1" dirty="0">
+                <a:solidFill>
+                  <a:srgbClr val="1A1A1A"/>
+                </a:solidFill>
+                <a:latin typeface="Noto Sans JP" pitchFamily="34" charset="0"/>
+                <a:ea typeface="Noto Sans JP" pitchFamily="34" charset="-122"/>
+                <a:cs typeface="Noto Sans JP" pitchFamily="34" charset="-120"/>
               </a:rPr>
               <a:t>残しておく文章</a:t>
             </a:r>
-            <a:endParaRPr lang="en-US" sz="1300" dirty="0"/>
+            <a:endParaRPr lang="ja-JP" sz="1350" dirty="0"/>
           </a:p>
           <a:p>
             <a:pPr indent="0" marL="0">
@@ -5695,35 +5800,70 @@
               <a:buNone/>
             </a:pPr>
             <a:r>
-              <a:rPr lang="en-US" sz="1300" dirty="0">
-                <a:solidFill>
-                  <a:schemeClr val="tx1"/>
-                </a:solidFill>
+              <a:rPr lang="ja-JP" altLang="en-US" sz="1350" b="1" dirty="0">
+                <a:solidFill>
+                  <a:srgbClr val="1A1A1A"/>
+                </a:solidFill>
+                <a:latin typeface="Noto Sans JP" pitchFamily="34" charset="0"/>
+                <a:ea typeface="Noto Sans JP" pitchFamily="34" charset="-122"/>
+                <a:cs typeface="Noto Sans JP" pitchFamily="34" charset="-120"/>
               </a:rPr>
               <a:t>手順・ルール・議事録</a:t>
             </a:r>
-            <a:endParaRPr lang="en-US" sz="1300" dirty="0"/>
-          </a:p>
-        </p:txBody>
-      </p:sp>
-      <p:sp>
-        <p:nvSpPr>
-          <p:cNvPr id="16" name="card"/>
+            <a:endParaRPr lang="ja-JP" sz="1350" dirty="0"/>
+          </a:p>
+        </p:txBody>
+      </p:sp>
+      <p:sp>
+        <p:nvSpPr>
+          <p:cNvPr id="15" name="card"/>
           <p:cNvSpPr/>
           <p:nvPr/>
         </p:nvSpPr>
         <p:spPr>
           <a:xfrm>
-            <a:off x="6065520" y="1463040"/>
-            <a:ext cx="2529840" cy="2286000"/>
+            <a:off x="6099048" y="1417320"/>
+            <a:ext cx="2542032" cy="2331720"/>
           </a:xfrm>
           <a:prstGeom prst="roundRect">
             <a:avLst>
-              <a:gd name="adj" fmla="val 4800"/>
+              <a:gd name="adj" fmla="val 3922"/>
             </a:avLst>
           </a:prstGeom>
           <a:solidFill>
-            <a:schemeClr val="bg1"/>
+            <a:srgbClr val="FFFFFF"/>
+          </a:solidFill>
+          <a:ln w="25400">
+            <a:solidFill>
+              <a:srgbClr val="1A1A1A"/>
+            </a:solidFill>
+            <a:prstDash val="solid"/>
+          </a:ln>
+          <a:effectLst>
+            <a:outerShdw sx="100000" sy="100000" kx="0" ky="0" algn="bl" rotWithShape="0" blurRad="101600" dist="50800" dir="2700000">
+              <a:srgbClr val="1A1A1A">
+                <a:alpha val="100000"/>
+              </a:srgbClr>
+            </a:outerShdw>
+          </a:effectLst>
+        </p:spPr>
+      </p:sp>
+      <p:sp>
+        <p:nvSpPr>
+          <p:cNvPr id="16" name="icon-circle"/>
+          <p:cNvSpPr/>
+          <p:nvPr/>
+        </p:nvSpPr>
+        <p:spPr>
+          <a:xfrm>
+            <a:off x="6300216" y="1618488"/>
+            <a:ext cx="548640" cy="548640"/>
+          </a:xfrm>
+          <a:prstGeom prst="ellipse">
+            <a:avLst/>
+          </a:prstGeom>
+          <a:solidFill>
+            <a:srgbClr val="DD6420"/>
           </a:solidFill>
           <a:ln w="19050">
             <a:solidFill>
@@ -5731,43 +5871,11 @@
             </a:solidFill>
             <a:prstDash val="solid"/>
           </a:ln>
-          <a:effectLst>
-            <a:outerShdw sx="100000" sy="100000" kx="0" ky="0" algn="bl" rotWithShape="0" blurRad="101600" dist="38100" dir="2700000">
-              <a:srgbClr val="000000">
-                <a:alpha val="18000"/>
-              </a:srgbClr>
-            </a:outerShdw>
-          </a:effectLst>
-        </p:spPr>
-      </p:sp>
-      <p:sp>
-        <p:nvSpPr>
-          <p:cNvPr id="17" name="icon-circle"/>
-          <p:cNvSpPr/>
-          <p:nvPr/>
-        </p:nvSpPr>
-        <p:spPr>
-          <a:xfrm>
-            <a:off x="6248400" y="1645920"/>
-            <a:ext cx="502920" cy="502920"/>
-          </a:xfrm>
-          <a:prstGeom prst="ellipse">
-            <a:avLst/>
-          </a:prstGeom>
-          <a:solidFill>
-            <a:schemeClr val="accent1"/>
-          </a:solidFill>
-          <a:ln w="15875">
-            <a:solidFill>
-              <a:srgbClr val="1A1A1A"/>
-            </a:solidFill>
-            <a:prstDash val="solid"/>
-          </a:ln>
         </p:spPr>
       </p:sp>
       <p:pic>
         <p:nvPicPr>
-          <p:cNvPr id="18" name="icon" descr="preencoded.png">    </p:cNvPr>
+          <p:cNvPr id="17" name="icon" descr="preencoded.png">    </p:cNvPr>
           <p:cNvPicPr>
             <a:picLocks noChangeAspect="1"/>
           </p:cNvPicPr>
@@ -5781,8 +5889,8 @@
         </p:blipFill>
         <p:spPr>
           <a:xfrm>
-            <a:off x="6379159" y="1776679"/>
-            <a:ext cx="241402" cy="241402"/>
+            <a:off x="6437376" y="1755648"/>
+            <a:ext cx="274320" cy="274320"/>
           </a:xfrm>
           <a:prstGeom prst="rect">
             <a:avLst/>
@@ -5791,14 +5899,14 @@
       </p:pic>
       <p:sp>
         <p:nvSpPr>
-          <p:cNvPr id="19" name="card-head"/>
+          <p:cNvPr id="18" name="Text 12"/>
           <p:cNvSpPr txBox="1"/>
           <p:nvPr/>
         </p:nvSpPr>
         <p:spPr>
           <a:xfrm>
-            <a:off x="6248400" y="2286000"/>
-            <a:ext cx="2164080" cy="365760"/>
+            <a:off x="6967728" y="1618488"/>
+            <a:ext cx="1490472" cy="548640"/>
           </a:xfrm>
           <a:prstGeom prst="rect">
             <a:avLst/>
@@ -5807,34 +5915,39 @@
           <a:ln/>
         </p:spPr>
         <p:txBody>
-          <a:bodyPr wrap="square" lIns="0" tIns="0" rIns="0" bIns="0" rtlCol="0" anchor="ctr"/>
+          <a:bodyPr wrap="square" lIns="0" tIns="0" rIns="0" bIns="0" rtlCol="0" anchor="ctr">
+            <a:normAutofit/>
+          </a:bodyPr>
           <a:lstStyle/>
           <a:p>
             <a:pPr indent="0" marL="0">
               <a:buNone/>
             </a:pPr>
             <a:r>
-              <a:rPr lang="en-US" sz="1500" b="1" dirty="0">
-                <a:solidFill>
-                  <a:schemeClr val="tx1"/>
-                </a:solidFill>
+              <a:rPr lang="ja-JP" altLang="en-US" sz="1700" dirty="0">
+                <a:solidFill>
+                  <a:srgbClr val="1A1A1A"/>
+                </a:solidFill>
+                <a:latin typeface="Dela Gothic One" pitchFamily="34" charset="0"/>
+                <a:ea typeface="けいふぉんと" pitchFamily="34" charset="-122"/>
+                <a:cs typeface="Dela Gothic One" pitchFamily="34" charset="-120"/>
               </a:rPr>
               <a:t>BASE</a:t>
             </a:r>
-            <a:endParaRPr lang="en-US" sz="1500" dirty="0"/>
-          </a:p>
-        </p:txBody>
-      </p:sp>
-      <p:sp>
-        <p:nvSpPr>
-          <p:cNvPr id="20" name="card-body"/>
+            <a:endParaRPr lang="ja-JP" sz="1700" dirty="0"/>
+          </a:p>
+        </p:txBody>
+      </p:sp>
+      <p:sp>
+        <p:nvSpPr>
+          <p:cNvPr id="19" name="card-body"/>
           <p:cNvSpPr txBox="1"/>
           <p:nvPr/>
         </p:nvSpPr>
         <p:spPr>
           <a:xfrm>
-            <a:off x="6248400" y="2697480"/>
-            <a:ext cx="2164080" cy="914400"/>
+            <a:off x="6300216" y="2313432"/>
+            <a:ext cx="2139696" cy="1298448"/>
           </a:xfrm>
           <a:prstGeom prst="rect">
             <a:avLst/>
@@ -5843,7 +5956,9 @@
           <a:ln/>
         </p:spPr>
         <p:txBody>
-          <a:bodyPr wrap="square" lIns="0" tIns="0" rIns="0" bIns="0" rtlCol="0" anchor="t"/>
+          <a:bodyPr wrap="square" lIns="0" tIns="0" rIns="0" bIns="0" rtlCol="0" anchor="t">
+            <a:normAutofit/>
+          </a:bodyPr>
           <a:lstStyle/>
           <a:p>
             <a:pPr indent="0" marL="0">
@@ -5853,101 +5968,85 @@
               <a:buNone/>
             </a:pPr>
             <a:r>
-              <a:rPr lang="en-US" sz="1300" dirty="0">
-                <a:solidFill>
-                  <a:schemeClr val="tx1"/>
-                </a:solidFill>
+              <a:rPr lang="ja-JP" altLang="en-US" sz="1350" b="1" dirty="0">
+                <a:solidFill>
+                  <a:srgbClr val="1A1A1A"/>
+                </a:solidFill>
+                <a:latin typeface="Noto Sans JP" pitchFamily="34" charset="0"/>
+                <a:ea typeface="Noto Sans JP" pitchFamily="34" charset="-122"/>
+                <a:cs typeface="Noto Sans JP" pitchFamily="34" charset="-120"/>
               </a:rPr>
               <a:t>件数が増える・一覧で見たい・集計したいもの</a:t>
             </a:r>
-            <a:endParaRPr lang="en-US" sz="1300" dirty="0"/>
-          </a:p>
-        </p:txBody>
-      </p:sp>
-      <p:sp>
-        <p:nvSpPr>
-          <p:cNvPr id="21" name="foot-box"/>
-          <p:cNvSpPr/>
-          <p:nvPr/>
-        </p:nvSpPr>
-        <p:spPr>
-          <a:xfrm>
-            <a:off x="548640" y="4114800"/>
-            <a:ext cx="8046720" cy="502920"/>
-          </a:xfrm>
-          <a:prstGeom prst="roundRect">
-            <a:avLst>
-              <a:gd name="adj" fmla="val 18182"/>
-            </a:avLst>
+            <a:endParaRPr lang="ja-JP" sz="1350" dirty="0"/>
+          </a:p>
+        </p:txBody>
+      </p:sp>
+      <p:sp>
+        <p:nvSpPr>
+          <p:cNvPr id="20" name="Text 14"/>
+          <p:cNvSpPr txBox="1"/>
+          <p:nvPr/>
+        </p:nvSpPr>
+        <p:spPr>
+          <a:xfrm rot="-60000">
+            <a:off x="502920" y="4114800"/>
+            <a:ext cx="8138160" cy="502920"/>
+          </a:xfrm>
+          <a:prstGeom prst="rect">
+            <a:avLst/>
           </a:prstGeom>
           <a:solidFill>
-            <a:schemeClr val="bg2"/>
+            <a:srgbClr val="DD6420"/>
           </a:solidFill>
-          <a:ln w="12700">
+          <a:ln w="19050">
             <a:solidFill>
-              <a:schemeClr val="bg2"/>
+              <a:srgbClr val="1A1A1A"/>
             </a:solidFill>
-            <a:prstDash val="solid"/>
           </a:ln>
-        </p:spPr>
-      </p:sp>
-      <p:pic>
-        <p:nvPicPr>
-          <p:cNvPr id="22" name="foot-icon" descr="preencoded.png">    </p:cNvPr>
-          <p:cNvPicPr>
-            <a:picLocks noChangeAspect="1"/>
-          </p:cNvPicPr>
-          <p:nvPr/>
-        </p:nvPicPr>
-        <p:blipFill>
-          <a:blip r:embed="rId4"/>
-          <a:stretch>
-            <a:fillRect/>
-          </a:stretch>
-        </p:blipFill>
-        <p:spPr>
-          <a:xfrm>
-            <a:off x="685800" y="4242816"/>
-            <a:ext cx="246888" cy="246888"/>
-          </a:xfrm>
-          <a:prstGeom prst="rect">
-            <a:avLst/>
-          </a:prstGeom>
-        </p:spPr>
-      </p:pic>
-      <p:sp>
-        <p:nvSpPr>
-          <p:cNvPr id="23" name="foot-text"/>
-          <p:cNvSpPr txBox="1"/>
-          <p:nvPr/>
-        </p:nvSpPr>
-        <p:spPr>
-          <a:xfrm>
-            <a:off x="1051560" y="4114800"/>
-            <a:ext cx="7406640" cy="502920"/>
-          </a:xfrm>
-          <a:prstGeom prst="rect">
-            <a:avLst/>
-          </a:prstGeom>
-          <a:noFill/>
-          <a:ln/>
-        </p:spPr>
-        <p:txBody>
-          <a:bodyPr wrap="square" lIns="0" tIns="0" rIns="0" bIns="0" rtlCol="0" anchor="ctr"/>
+          <a:effectLst>
+            <a:outerShdw sx="100000" sy="100000" kx="0" ky="0" algn="bl" rotWithShape="0" blurRad="101600" dist="38100" dir="2700000">
+              <a:srgbClr val="1A1A1A">
+                <a:alpha val="100000"/>
+              </a:srgbClr>
+            </a:outerShdw>
+          </a:effectLst>
+        </p:spPr>
+        <p:txBody>
+          <a:bodyPr wrap="square" lIns="0" tIns="1905" rIns="1905" bIns="0" rtlCol="0" anchor="ctr">
+            <a:normAutofit/>
+          </a:bodyPr>
           <a:lstStyle/>
           <a:p>
-            <a:pPr indent="0" marL="0">
+            <a:pPr algn="ctr" indent="0" marL="0">
               <a:buNone/>
             </a:pPr>
             <a:r>
-              <a:rPr lang="en-US" sz="1150" dirty="0">
-                <a:solidFill>
-                  <a:schemeClr val="tx1"/>
-                </a:solidFill>
+              <a:rPr lang="ja-JP" altLang="en-US" sz="1300" b="1" dirty="0">
+                <a:solidFill>
+                  <a:srgbClr val="FFD600"/>
+                </a:solidFill>
+                <a:latin typeface="Noto Sans JP" pitchFamily="34" charset="0"/>
+                <a:ea typeface="Noto Sans JP" pitchFamily="34" charset="-122"/>
+                <a:cs typeface="Noto Sans JP" pitchFamily="34" charset="-120"/>
               </a:rPr>
-              <a:t>「チャットで送った大事なことが流れて見つからない」は、Wikiに置き直す合図</a:t>
-            </a:r>
-            <a:endParaRPr lang="en-US" sz="1150" dirty="0"/>
+              <a:t>「チャットで送った大事なことが流れて見つからない」</a:t>
+            </a:r>
+            <a:pPr algn="ctr" indent="0" marL="0">
+              <a:buNone/>
+            </a:pPr>
+            <a:r>
+              <a:rPr lang="ja-JP" altLang="en-US" sz="1300" b="1" dirty="0">
+                <a:solidFill>
+                  <a:srgbClr val="FFFFFF"/>
+                </a:solidFill>
+                <a:latin typeface="Noto Sans JP" pitchFamily="34" charset="0"/>
+                <a:ea typeface="Noto Sans JP" pitchFamily="34" charset="-122"/>
+                <a:cs typeface="Noto Sans JP" pitchFamily="34" charset="-120"/>
+              </a:rPr>
+              <a:t>は、Wikiに置き直す合図</a:t>
+            </a:r>
+            <a:endParaRPr lang="ja-JP" sz="1300" dirty="0"/>
           </a:p>
         </p:txBody>
       </p:sp>
@@ -5963,8 +6062,8 @@
         </p:nvSpPr>
         <p:spPr>
           <a:xfrm>
-            <a:off x="8229600" y="4773168"/>
-            <a:ext cx="365760" cy="228600"/>
+            <a:off x="8366760" y="4754880"/>
+            <a:ext cx="365760" cy="274320"/>
           </a:xfrm>
           <a:prstGeom prst="rect">
             <a:avLst/>
@@ -5976,20 +6075,23 @@
           </a:extLst>
         </p:spPr>
         <p:txBody>
-          <a:bodyPr/>
+          <a:bodyPr anchor="ctr"/>
           <a:lstStyle>
             <a:lvl1pPr>
-              <a:defRPr sz="900">
-                <a:solidFill>
-                  <a:srgbClr val="5A6872"/>
-                </a:solidFill>
+              <a:defRPr sz="850">
+                <a:solidFill>
+                  <a:srgbClr val="FFFFFF"/>
+                </a:solidFill>
+                <a:latin typeface="Noto Sans JP"/>
+                <a:ea typeface="Noto Sans JP"/>
+                <a:cs typeface="Noto Sans JP"/>
               </a:defRPr>
             </a:lvl1pPr>
           </a:lstStyle>
           <a:p>
             <a:pPr algn="r"/>
             <a:fld id="{F7021451-1387-4CA6-816F-3879F97B5CBC}" type="slidenum">
-              <a:rPr b="0" lang="en-US"/>
+              <a:rPr b="1" lang="en-US"/>
               <a:t>5</a:t>
             </a:fld>
             <a:endParaRPr lang="en-US"/>
@@ -6024,84 +6126,25 @@
       <p:sp>
         <p:nvSpPr>
           <p:cNvPr id="2" name="Text 0"/>
-          <p:cNvSpPr/>
-          <p:nvPr>
-            <p:ph idx="100" type="title" hasCustomPrompt="1"/>
-          </p:nvPr>
-        </p:nvSpPr>
-        <p:spPr>
-          <a:xfrm>
-            <a:off x="548640" y="658368"/>
-            <a:ext cx="8046720" cy="566928"/>
-          </a:xfrm>
-          <a:prstGeom prst="rect">
-            <a:avLst/>
-          </a:prstGeom>
-          <a:noFill/>
-          <a:ln/>
-        </p:spPr>
-        <p:txBody>
-          <a:bodyPr wrap="square" lIns="0" tIns="0" rIns="0" bIns="0" rtlCol="0" anchor="ctr"/>
-          <a:lstStyle/>
-          <a:p>
-            <a:pPr algn="l" indent="0" marL="0">
-              <a:buNone/>
-            </a:pPr>
-            <a:r>
-              <a:rPr lang="en-US" sz="2400" b="1" dirty="0">
-                <a:solidFill>
-                  <a:schemeClr val="tx1"/>
-                </a:solidFill>
-              </a:rPr>
-              <a:t>Wikiの目次を作る</a:t>
-            </a:r>
-            <a:endParaRPr lang="en-US" sz="2400" dirty="0"/>
-          </a:p>
-        </p:txBody>
-      </p:sp>
-      <p:sp>
-        <p:nvSpPr>
-          <p:cNvPr id="3" name="chip"/>
-          <p:cNvSpPr/>
-          <p:nvPr/>
-        </p:nvSpPr>
-        <p:spPr>
-          <a:xfrm>
-            <a:off x="548640" y="292608"/>
-            <a:ext cx="1755648" cy="292608"/>
-          </a:xfrm>
-          <a:prstGeom prst="roundRect">
-            <a:avLst>
-              <a:gd name="adj" fmla="val 50000"/>
-            </a:avLst>
+          <p:cNvSpPr txBox="1"/>
+          <p:nvPr/>
+        </p:nvSpPr>
+        <p:spPr>
+          <a:xfrm rot="-180000">
+            <a:off x="411480" y="201168"/>
+            <a:ext cx="1915668" cy="352044"/>
+          </a:xfrm>
+          <a:prstGeom prst="rect">
+            <a:avLst/>
           </a:prstGeom>
           <a:solidFill>
-            <a:schemeClr val="accent2"/>
+            <a:srgbClr val="DD6420"/>
           </a:solidFill>
-          <a:ln w="12700">
+          <a:ln>
             <a:solidFill>
-              <a:schemeClr val="accent2"/>
+              <a:srgbClr val="DD6420"/>
             </a:solidFill>
-            <a:prstDash val="solid"/>
           </a:ln>
-        </p:spPr>
-      </p:sp>
-      <p:sp>
-        <p:nvSpPr>
-          <p:cNvPr id="4" name="chip-text"/>
-          <p:cNvSpPr txBox="1"/>
-          <p:nvPr/>
-        </p:nvSpPr>
-        <p:spPr>
-          <a:xfrm>
-            <a:off x="548640" y="292608"/>
-            <a:ext cx="1755648" cy="292608"/>
-          </a:xfrm>
-          <a:prstGeom prst="rect">
-            <a:avLst/>
-          </a:prstGeom>
-          <a:noFill/>
-          <a:ln/>
         </p:spPr>
         <p:txBody>
           <a:bodyPr wrap="square" lIns="0" tIns="0" rIns="0" bIns="0" rtlCol="0" anchor="ctr"/>
@@ -6111,58 +6154,117 @@
               <a:buNone/>
             </a:pPr>
             <a:r>
-              <a:rPr lang="en-US" sz="1100" b="1" dirty="0">
-                <a:solidFill>
-                  <a:schemeClr val="bg1"/>
-                </a:solidFill>
+              <a:rPr lang="ja-JP" altLang="en-US" sz="1100" dirty="0">
+                <a:solidFill>
+                  <a:srgbClr val="FFFFFF"/>
+                </a:solidFill>
+                <a:latin typeface="Dela Gothic One" pitchFamily="34" charset="0"/>
+                <a:ea typeface="けいふぉんと" pitchFamily="34" charset="-122"/>
+                <a:cs typeface="Dela Gothic One" pitchFamily="34" charset="-120"/>
               </a:rPr>
               <a:t>ハンズオン② 20分</a:t>
             </a:r>
-            <a:endParaRPr lang="en-US" sz="1100" dirty="0"/>
-          </a:p>
-        </p:txBody>
-      </p:sp>
-      <p:sp>
-        <p:nvSpPr>
-          <p:cNvPr id="6" name="step-num"/>
+            <a:endParaRPr lang="ja-JP" sz="1100" dirty="0"/>
+          </a:p>
+        </p:txBody>
+      </p:sp>
+      <p:sp>
+        <p:nvSpPr>
+          <p:cNvPr id="3" name="Text 1"/>
+          <p:cNvSpPr txBox="1"/>
+          <p:nvPr/>
+        </p:nvSpPr>
+        <p:spPr>
+          <a:xfrm>
+            <a:off x="411480" y="502920"/>
+            <a:ext cx="8321040" cy="685800"/>
+          </a:xfrm>
+          <a:prstGeom prst="rect">
+            <a:avLst/>
+          </a:prstGeom>
+          <a:noFill/>
+          <a:ln/>
+        </p:spPr>
+        <p:txBody>
+          <a:bodyPr wrap="square" lIns="0" tIns="0" rIns="0" bIns="0" rtlCol="0" anchor="ctr">
+            <a:normAutofit/>
+          </a:bodyPr>
+          <a:lstStyle/>
+          <a:p>
+            <a:pPr indent="0" marL="0">
+              <a:buNone/>
+            </a:pPr>
+            <a:r>
+              <a:rPr lang="ja-JP" altLang="en-US" sz="2600" dirty="0">
+                <a:solidFill>
+                  <a:srgbClr val="1A1A1A"/>
+                </a:solidFill>
+                <a:latin typeface="Dela Gothic One" pitchFamily="34" charset="0"/>
+                <a:ea typeface="けいふぉんと" pitchFamily="34" charset="-122"/>
+                <a:cs typeface="Dela Gothic One" pitchFamily="34" charset="-120"/>
+              </a:rPr>
+              <a:t>Wikiの目次を作る</a:t>
+            </a:r>
+            <a:endParaRPr lang="ja-JP" sz="2600" dirty="0"/>
+          </a:p>
+        </p:txBody>
+      </p:sp>
+      <p:sp>
+        <p:nvSpPr>
+          <p:cNvPr id="5" name="card"/>
           <p:cNvSpPr/>
           <p:nvPr/>
         </p:nvSpPr>
         <p:spPr>
           <a:xfrm>
-            <a:off x="548640" y="1805940"/>
-            <a:ext cx="384048" cy="384048"/>
-          </a:xfrm>
-          <a:prstGeom prst="ellipse">
-            <a:avLst/>
+            <a:off x="502920" y="1600200"/>
+            <a:ext cx="8138160" cy="566928"/>
+          </a:xfrm>
+          <a:prstGeom prst="roundRect">
+            <a:avLst>
+              <a:gd name="adj" fmla="val 16129"/>
+            </a:avLst>
           </a:prstGeom>
           <a:solidFill>
-            <a:schemeClr val="accent1"/>
+            <a:srgbClr val="FFFFFF"/>
           </a:solidFill>
-          <a:ln w="15875">
+          <a:ln w="25400">
             <a:solidFill>
               <a:srgbClr val="1A1A1A"/>
             </a:solidFill>
             <a:prstDash val="solid"/>
           </a:ln>
-        </p:spPr>
-      </p:sp>
-      <p:sp>
-        <p:nvSpPr>
-          <p:cNvPr id="7" name="step-num-text"/>
+          <a:effectLst>
+            <a:outerShdw sx="100000" sy="100000" kx="0" ky="0" algn="bl" rotWithShape="0" blurRad="101600" dist="38100" dir="2700000">
+              <a:srgbClr val="1A1A1A">
+                <a:alpha val="100000"/>
+              </a:srgbClr>
+            </a:outerShdw>
+          </a:effectLst>
+        </p:spPr>
+      </p:sp>
+      <p:sp>
+        <p:nvSpPr>
+          <p:cNvPr id="6" name="Text 3"/>
           <p:cNvSpPr txBox="1"/>
           <p:nvPr/>
         </p:nvSpPr>
         <p:spPr>
           <a:xfrm>
-            <a:off x="548640" y="1805940"/>
-            <a:ext cx="384048" cy="384048"/>
-          </a:xfrm>
-          <a:prstGeom prst="rect">
-            <a:avLst/>
-          </a:prstGeom>
-          <a:noFill/>
-          <a:ln/>
+            <a:off x="640080" y="1682496"/>
+            <a:ext cx="402336" cy="402336"/>
+          </a:xfrm>
+          <a:prstGeom prst="ellipse">
+            <a:avLst/>
+          </a:prstGeom>
+          <a:solidFill>
+            <a:srgbClr val="DD6420"/>
+          </a:solidFill>
+          <a:ln w="19050">
+            <a:solidFill>
+              <a:srgbClr val="1A1A1A"/>
+            </a:solidFill>
+          </a:ln>
         </p:spPr>
         <p:txBody>
           <a:bodyPr wrap="square" lIns="0" tIns="0" rIns="0" bIns="0" rtlCol="0" anchor="ctr"/>
@@ -6172,27 +6274,30 @@
               <a:buNone/>
             </a:pPr>
             <a:r>
-              <a:rPr lang="en-US" sz="1400" b="1" dirty="0">
-                <a:solidFill>
-                  <a:schemeClr val="tx1"/>
-                </a:solidFill>
+              <a:rPr lang="ja-JP" altLang="en-US" sz="1500" dirty="0">
+                <a:solidFill>
+                  <a:srgbClr val="FFFFFF"/>
+                </a:solidFill>
+                <a:latin typeface="Dela Gothic One" pitchFamily="34" charset="0"/>
+                <a:ea typeface="けいふぉんと" pitchFamily="34" charset="-122"/>
+                <a:cs typeface="Dela Gothic One" pitchFamily="34" charset="-120"/>
               </a:rPr>
               <a:t>1</a:t>
             </a:r>
-            <a:endParaRPr lang="en-US" sz="1400" dirty="0"/>
-          </a:p>
-        </p:txBody>
-      </p:sp>
-      <p:sp>
-        <p:nvSpPr>
-          <p:cNvPr id="8" name="step-text"/>
+            <a:endParaRPr lang="ja-JP" sz="1500" dirty="0"/>
+          </a:p>
+        </p:txBody>
+      </p:sp>
+      <p:sp>
+        <p:nvSpPr>
+          <p:cNvPr id="7" name="step-text"/>
           <p:cNvSpPr txBox="1"/>
           <p:nvPr/>
         </p:nvSpPr>
         <p:spPr>
           <a:xfrm>
-            <a:off x="1097280" y="1696212"/>
-            <a:ext cx="7498080" cy="603504"/>
+            <a:off x="1234440" y="1600200"/>
+            <a:ext cx="7269480" cy="566928"/>
           </a:xfrm>
           <a:prstGeom prst="rect">
             <a:avLst/>
@@ -6201,65 +6306,85 @@
           <a:ln/>
         </p:spPr>
         <p:txBody>
-          <a:bodyPr wrap="square" lIns="0" tIns="0" rIns="0" bIns="0" rtlCol="0" anchor="ctr"/>
+          <a:bodyPr wrap="square" lIns="0" tIns="0" rIns="0" bIns="0" rtlCol="0" anchor="ctr">
+            <a:normAutofit/>
+          </a:bodyPr>
           <a:lstStyle/>
           <a:p>
             <a:pPr indent="0" marL="0">
               <a:buNone/>
             </a:pPr>
             <a:r>
-              <a:rPr lang="en-US" sz="1450" dirty="0">
-                <a:solidFill>
-                  <a:schemeClr val="tx1"/>
-                </a:solidFill>
+              <a:rPr lang="ja-JP" altLang="en-US" sz="1400" b="1" dirty="0">
+                <a:solidFill>
+                  <a:srgbClr val="1A1A1A"/>
+                </a:solidFill>
+                <a:latin typeface="Noto Sans JP" pitchFamily="34" charset="0"/>
+                <a:ea typeface="Noto Sans JP" pitchFamily="34" charset="-122"/>
+                <a:cs typeface="Noto Sans JP" pitchFamily="34" charset="-120"/>
               </a:rPr>
               <a:t>Wikiで新しいスペース「（会社名）しくみづくり」を作る</a:t>
             </a:r>
-            <a:endParaRPr lang="en-US" sz="1450" dirty="0"/>
-          </a:p>
-        </p:txBody>
-      </p:sp>
-      <p:sp>
-        <p:nvSpPr>
-          <p:cNvPr id="9" name="step-num"/>
+            <a:endParaRPr lang="ja-JP" sz="1400" dirty="0"/>
+          </a:p>
+        </p:txBody>
+      </p:sp>
+      <p:sp>
+        <p:nvSpPr>
+          <p:cNvPr id="8" name="card"/>
           <p:cNvSpPr/>
           <p:nvPr/>
         </p:nvSpPr>
         <p:spPr>
           <a:xfrm>
-            <a:off x="548640" y="2409444"/>
-            <a:ext cx="384048" cy="384048"/>
-          </a:xfrm>
-          <a:prstGeom prst="ellipse">
-            <a:avLst/>
+            <a:off x="502920" y="2295144"/>
+            <a:ext cx="8138160" cy="566928"/>
+          </a:xfrm>
+          <a:prstGeom prst="roundRect">
+            <a:avLst>
+              <a:gd name="adj" fmla="val 16129"/>
+            </a:avLst>
           </a:prstGeom>
           <a:solidFill>
-            <a:schemeClr val="accent1"/>
+            <a:srgbClr val="FFFFFF"/>
           </a:solidFill>
-          <a:ln w="15875">
+          <a:ln w="25400">
             <a:solidFill>
               <a:srgbClr val="1A1A1A"/>
             </a:solidFill>
             <a:prstDash val="solid"/>
           </a:ln>
-        </p:spPr>
-      </p:sp>
-      <p:sp>
-        <p:nvSpPr>
-          <p:cNvPr id="10" name="step-num-text"/>
+          <a:effectLst>
+            <a:outerShdw sx="100000" sy="100000" kx="0" ky="0" algn="bl" rotWithShape="0" blurRad="101600" dist="38100" dir="2700000">
+              <a:srgbClr val="1A1A1A">
+                <a:alpha val="100000"/>
+              </a:srgbClr>
+            </a:outerShdw>
+          </a:effectLst>
+        </p:spPr>
+      </p:sp>
+      <p:sp>
+        <p:nvSpPr>
+          <p:cNvPr id="9" name="Text 6"/>
           <p:cNvSpPr txBox="1"/>
           <p:nvPr/>
         </p:nvSpPr>
         <p:spPr>
           <a:xfrm>
-            <a:off x="548640" y="2409444"/>
-            <a:ext cx="384048" cy="384048"/>
-          </a:xfrm>
-          <a:prstGeom prst="rect">
-            <a:avLst/>
-          </a:prstGeom>
-          <a:noFill/>
-          <a:ln/>
+            <a:off x="640080" y="2377440"/>
+            <a:ext cx="402336" cy="402336"/>
+          </a:xfrm>
+          <a:prstGeom prst="ellipse">
+            <a:avLst/>
+          </a:prstGeom>
+          <a:solidFill>
+            <a:srgbClr val="DD6420"/>
+          </a:solidFill>
+          <a:ln w="19050">
+            <a:solidFill>
+              <a:srgbClr val="1A1A1A"/>
+            </a:solidFill>
+          </a:ln>
         </p:spPr>
         <p:txBody>
           <a:bodyPr wrap="square" lIns="0" tIns="0" rIns="0" bIns="0" rtlCol="0" anchor="ctr"/>
@@ -6269,27 +6394,30 @@
               <a:buNone/>
             </a:pPr>
             <a:r>
-              <a:rPr lang="en-US" sz="1400" b="1" dirty="0">
-                <a:solidFill>
-                  <a:schemeClr val="tx1"/>
-                </a:solidFill>
+              <a:rPr lang="ja-JP" altLang="en-US" sz="1500" dirty="0">
+                <a:solidFill>
+                  <a:srgbClr val="FFFFFF"/>
+                </a:solidFill>
+                <a:latin typeface="Dela Gothic One" pitchFamily="34" charset="0"/>
+                <a:ea typeface="けいふぉんと" pitchFamily="34" charset="-122"/>
+                <a:cs typeface="Dela Gothic One" pitchFamily="34" charset="-120"/>
               </a:rPr>
               <a:t>2</a:t>
             </a:r>
-            <a:endParaRPr lang="en-US" sz="1400" dirty="0"/>
-          </a:p>
-        </p:txBody>
-      </p:sp>
-      <p:sp>
-        <p:nvSpPr>
-          <p:cNvPr id="11" name="step-text"/>
+            <a:endParaRPr lang="ja-JP" sz="1500" dirty="0"/>
+          </a:p>
+        </p:txBody>
+      </p:sp>
+      <p:sp>
+        <p:nvSpPr>
+          <p:cNvPr id="10" name="step-text"/>
           <p:cNvSpPr txBox="1"/>
           <p:nvPr/>
         </p:nvSpPr>
         <p:spPr>
           <a:xfrm>
-            <a:off x="1097280" y="2299716"/>
-            <a:ext cx="7498080" cy="603504"/>
+            <a:off x="1234440" y="2295144"/>
+            <a:ext cx="7269480" cy="566928"/>
           </a:xfrm>
           <a:prstGeom prst="rect">
             <a:avLst/>
@@ -6298,65 +6426,85 @@
           <a:ln/>
         </p:spPr>
         <p:txBody>
-          <a:bodyPr wrap="square" lIns="0" tIns="0" rIns="0" bIns="0" rtlCol="0" anchor="ctr"/>
+          <a:bodyPr wrap="square" lIns="0" tIns="0" rIns="0" bIns="0" rtlCol="0" anchor="ctr">
+            <a:normAutofit/>
+          </a:bodyPr>
           <a:lstStyle/>
           <a:p>
             <a:pPr indent="0" marL="0">
               <a:buNone/>
             </a:pPr>
             <a:r>
-              <a:rPr lang="en-US" sz="1450" dirty="0">
-                <a:solidFill>
-                  <a:schemeClr val="tx1"/>
-                </a:solidFill>
+              <a:rPr lang="ja-JP" altLang="en-US" sz="1400" b="1" dirty="0">
+                <a:solidFill>
+                  <a:srgbClr val="1A1A1A"/>
+                </a:solidFill>
+                <a:latin typeface="Noto Sans JP" pitchFamily="34" charset="0"/>
+                <a:ea typeface="Noto Sans JP" pitchFamily="34" charset="-122"/>
+                <a:cs typeface="Noto Sans JP" pitchFamily="34" charset="-120"/>
               </a:rPr>
               <a:t>目次：00 はじめに／01 設計シート／02 業務ルール／03 操作マニュアル／04 改善メモ</a:t>
             </a:r>
-            <a:endParaRPr lang="en-US" sz="1450" dirty="0"/>
-          </a:p>
-        </p:txBody>
-      </p:sp>
-      <p:sp>
-        <p:nvSpPr>
-          <p:cNvPr id="12" name="step-num"/>
+            <a:endParaRPr lang="ja-JP" sz="1400" dirty="0"/>
+          </a:p>
+        </p:txBody>
+      </p:sp>
+      <p:sp>
+        <p:nvSpPr>
+          <p:cNvPr id="11" name="card"/>
           <p:cNvSpPr/>
           <p:nvPr/>
         </p:nvSpPr>
         <p:spPr>
           <a:xfrm>
-            <a:off x="548640" y="3012948"/>
-            <a:ext cx="384048" cy="384048"/>
-          </a:xfrm>
-          <a:prstGeom prst="ellipse">
-            <a:avLst/>
+            <a:off x="502920" y="2990088"/>
+            <a:ext cx="8138160" cy="566928"/>
+          </a:xfrm>
+          <a:prstGeom prst="roundRect">
+            <a:avLst>
+              <a:gd name="adj" fmla="val 16129"/>
+            </a:avLst>
           </a:prstGeom>
           <a:solidFill>
-            <a:schemeClr val="accent1"/>
+            <a:srgbClr val="FFFFFF"/>
           </a:solidFill>
-          <a:ln w="15875">
+          <a:ln w="25400">
             <a:solidFill>
               <a:srgbClr val="1A1A1A"/>
             </a:solidFill>
             <a:prstDash val="solid"/>
           </a:ln>
-        </p:spPr>
-      </p:sp>
-      <p:sp>
-        <p:nvSpPr>
-          <p:cNvPr id="13" name="step-num-text"/>
+          <a:effectLst>
+            <a:outerShdw sx="100000" sy="100000" kx="0" ky="0" algn="bl" rotWithShape="0" blurRad="101600" dist="38100" dir="2700000">
+              <a:srgbClr val="1A1A1A">
+                <a:alpha val="100000"/>
+              </a:srgbClr>
+            </a:outerShdw>
+          </a:effectLst>
+        </p:spPr>
+      </p:sp>
+      <p:sp>
+        <p:nvSpPr>
+          <p:cNvPr id="12" name="Text 9"/>
           <p:cNvSpPr txBox="1"/>
           <p:nvPr/>
         </p:nvSpPr>
         <p:spPr>
           <a:xfrm>
-            <a:off x="548640" y="3012948"/>
-            <a:ext cx="384048" cy="384048"/>
-          </a:xfrm>
-          <a:prstGeom prst="rect">
-            <a:avLst/>
-          </a:prstGeom>
-          <a:noFill/>
-          <a:ln/>
+            <a:off x="640080" y="3072384"/>
+            <a:ext cx="402336" cy="402336"/>
+          </a:xfrm>
+          <a:prstGeom prst="ellipse">
+            <a:avLst/>
+          </a:prstGeom>
+          <a:solidFill>
+            <a:srgbClr val="DD6420"/>
+          </a:solidFill>
+          <a:ln w="19050">
+            <a:solidFill>
+              <a:srgbClr val="1A1A1A"/>
+            </a:solidFill>
+          </a:ln>
         </p:spPr>
         <p:txBody>
           <a:bodyPr wrap="square" lIns="0" tIns="0" rIns="0" bIns="0" rtlCol="0" anchor="ctr"/>
@@ -6366,27 +6514,30 @@
               <a:buNone/>
             </a:pPr>
             <a:r>
-              <a:rPr lang="en-US" sz="1400" b="1" dirty="0">
-                <a:solidFill>
-                  <a:schemeClr val="tx1"/>
-                </a:solidFill>
+              <a:rPr lang="ja-JP" altLang="en-US" sz="1500" dirty="0">
+                <a:solidFill>
+                  <a:srgbClr val="FFFFFF"/>
+                </a:solidFill>
+                <a:latin typeface="Dela Gothic One" pitchFamily="34" charset="0"/>
+                <a:ea typeface="けいふぉんと" pitchFamily="34" charset="-122"/>
+                <a:cs typeface="Dela Gothic One" pitchFamily="34" charset="-120"/>
               </a:rPr>
               <a:t>3</a:t>
             </a:r>
-            <a:endParaRPr lang="en-US" sz="1400" dirty="0"/>
-          </a:p>
-        </p:txBody>
-      </p:sp>
-      <p:sp>
-        <p:nvSpPr>
-          <p:cNvPr id="14" name="step-text"/>
+            <a:endParaRPr lang="ja-JP" sz="1500" dirty="0"/>
+          </a:p>
+        </p:txBody>
+      </p:sp>
+      <p:sp>
+        <p:nvSpPr>
+          <p:cNvPr id="13" name="step-text"/>
           <p:cNvSpPr txBox="1"/>
           <p:nvPr/>
         </p:nvSpPr>
         <p:spPr>
           <a:xfrm>
-            <a:off x="1097280" y="2903220"/>
-            <a:ext cx="7498080" cy="603504"/>
+            <a:off x="1234440" y="2990088"/>
+            <a:ext cx="7269480" cy="566928"/>
           </a:xfrm>
           <a:prstGeom prst="rect">
             <a:avLst/>
@@ -6395,65 +6546,85 @@
           <a:ln/>
         </p:spPr>
         <p:txBody>
-          <a:bodyPr wrap="square" lIns="0" tIns="0" rIns="0" bIns="0" rtlCol="0" anchor="ctr"/>
+          <a:bodyPr wrap="square" lIns="0" tIns="0" rIns="0" bIns="0" rtlCol="0" anchor="ctr">
+            <a:normAutofit/>
+          </a:bodyPr>
           <a:lstStyle/>
           <a:p>
             <a:pPr indent="0" marL="0">
               <a:buNone/>
             </a:pPr>
             <a:r>
-              <a:rPr lang="en-US" sz="1450" dirty="0">
-                <a:solidFill>
-                  <a:schemeClr val="tx1"/>
-                </a:solidFill>
+              <a:rPr lang="ja-JP" altLang="en-US" sz="1400" b="1" dirty="0">
+                <a:solidFill>
+                  <a:srgbClr val="1A1A1A"/>
+                </a:solidFill>
+                <a:latin typeface="Noto Sans JP" pitchFamily="34" charset="0"/>
+                <a:ea typeface="Noto Sans JP" pitchFamily="34" charset="-122"/>
+                <a:cs typeface="Noto Sans JP" pitchFamily="34" charset="-120"/>
               </a:rPr>
               <a:t>設計シートのDocsを「01」に移動する</a:t>
             </a:r>
-            <a:endParaRPr lang="en-US" sz="1450" dirty="0"/>
-          </a:p>
-        </p:txBody>
-      </p:sp>
-      <p:sp>
-        <p:nvSpPr>
-          <p:cNvPr id="15" name="step-num"/>
+            <a:endParaRPr lang="ja-JP" sz="1400" dirty="0"/>
+          </a:p>
+        </p:txBody>
+      </p:sp>
+      <p:sp>
+        <p:nvSpPr>
+          <p:cNvPr id="14" name="card"/>
           <p:cNvSpPr/>
           <p:nvPr/>
         </p:nvSpPr>
         <p:spPr>
           <a:xfrm>
-            <a:off x="548640" y="3616452"/>
-            <a:ext cx="384048" cy="384048"/>
-          </a:xfrm>
-          <a:prstGeom prst="ellipse">
-            <a:avLst/>
+            <a:off x="502920" y="3685032"/>
+            <a:ext cx="8138160" cy="566928"/>
+          </a:xfrm>
+          <a:prstGeom prst="roundRect">
+            <a:avLst>
+              <a:gd name="adj" fmla="val 16129"/>
+            </a:avLst>
           </a:prstGeom>
           <a:solidFill>
-            <a:schemeClr val="accent1"/>
+            <a:srgbClr val="FFFFFF"/>
           </a:solidFill>
-          <a:ln w="15875">
+          <a:ln w="25400">
             <a:solidFill>
               <a:srgbClr val="1A1A1A"/>
             </a:solidFill>
             <a:prstDash val="solid"/>
           </a:ln>
-        </p:spPr>
-      </p:sp>
-      <p:sp>
-        <p:nvSpPr>
-          <p:cNvPr id="16" name="step-num-text"/>
+          <a:effectLst>
+            <a:outerShdw sx="100000" sy="100000" kx="0" ky="0" algn="bl" rotWithShape="0" blurRad="101600" dist="38100" dir="2700000">
+              <a:srgbClr val="1A1A1A">
+                <a:alpha val="100000"/>
+              </a:srgbClr>
+            </a:outerShdw>
+          </a:effectLst>
+        </p:spPr>
+      </p:sp>
+      <p:sp>
+        <p:nvSpPr>
+          <p:cNvPr id="15" name="Text 12"/>
           <p:cNvSpPr txBox="1"/>
           <p:nvPr/>
         </p:nvSpPr>
         <p:spPr>
           <a:xfrm>
-            <a:off x="548640" y="3616452"/>
-            <a:ext cx="384048" cy="384048"/>
-          </a:xfrm>
-          <a:prstGeom prst="rect">
-            <a:avLst/>
-          </a:prstGeom>
-          <a:noFill/>
-          <a:ln/>
+            <a:off x="640080" y="3767328"/>
+            <a:ext cx="402336" cy="402336"/>
+          </a:xfrm>
+          <a:prstGeom prst="ellipse">
+            <a:avLst/>
+          </a:prstGeom>
+          <a:solidFill>
+            <a:srgbClr val="DD6420"/>
+          </a:solidFill>
+          <a:ln w="19050">
+            <a:solidFill>
+              <a:srgbClr val="1A1A1A"/>
+            </a:solidFill>
+          </a:ln>
         </p:spPr>
         <p:txBody>
           <a:bodyPr wrap="square" lIns="0" tIns="0" rIns="0" bIns="0" rtlCol="0" anchor="ctr"/>
@@ -6463,27 +6634,30 @@
               <a:buNone/>
             </a:pPr>
             <a:r>
-              <a:rPr lang="en-US" sz="1400" b="1" dirty="0">
-                <a:solidFill>
-                  <a:schemeClr val="tx1"/>
-                </a:solidFill>
+              <a:rPr lang="ja-JP" altLang="en-US" sz="1500" dirty="0">
+                <a:solidFill>
+                  <a:srgbClr val="FFFFFF"/>
+                </a:solidFill>
+                <a:latin typeface="Dela Gothic One" pitchFamily="34" charset="0"/>
+                <a:ea typeface="けいふぉんと" pitchFamily="34" charset="-122"/>
+                <a:cs typeface="Dela Gothic One" pitchFamily="34" charset="-120"/>
               </a:rPr>
               <a:t>4</a:t>
             </a:r>
-            <a:endParaRPr lang="en-US" sz="1400" dirty="0"/>
-          </a:p>
-        </p:txBody>
-      </p:sp>
-      <p:sp>
-        <p:nvSpPr>
-          <p:cNvPr id="17" name="step-text"/>
+            <a:endParaRPr lang="ja-JP" sz="1500" dirty="0"/>
+          </a:p>
+        </p:txBody>
+      </p:sp>
+      <p:sp>
+        <p:nvSpPr>
+          <p:cNvPr id="16" name="step-text"/>
           <p:cNvSpPr txBox="1"/>
           <p:nvPr/>
         </p:nvSpPr>
         <p:spPr>
           <a:xfrm>
-            <a:off x="1097280" y="3506724"/>
-            <a:ext cx="7498080" cy="603504"/>
+            <a:off x="1234440" y="3685032"/>
+            <a:ext cx="7269480" cy="566928"/>
           </a:xfrm>
           <a:prstGeom prst="rect">
             <a:avLst/>
@@ -6492,21 +6666,26 @@
           <a:ln/>
         </p:spPr>
         <p:txBody>
-          <a:bodyPr wrap="square" lIns="0" tIns="0" rIns="0" bIns="0" rtlCol="0" anchor="ctr"/>
+          <a:bodyPr wrap="square" lIns="0" tIns="0" rIns="0" bIns="0" rtlCol="0" anchor="ctr">
+            <a:normAutofit/>
+          </a:bodyPr>
           <a:lstStyle/>
           <a:p>
             <a:pPr indent="0" marL="0">
               <a:buNone/>
             </a:pPr>
             <a:r>
-              <a:rPr lang="en-US" sz="1450" dirty="0">
-                <a:solidFill>
-                  <a:schemeClr val="tx1"/>
-                </a:solidFill>
+              <a:rPr lang="ja-JP" altLang="en-US" sz="1400" b="1" dirty="0">
+                <a:solidFill>
+                  <a:srgbClr val="1A1A1A"/>
+                </a:solidFill>
+                <a:latin typeface="Noto Sans JP" pitchFamily="34" charset="0"/>
+                <a:ea typeface="Noto Sans JP" pitchFamily="34" charset="-122"/>
+                <a:cs typeface="Noto Sans JP" pitchFamily="34" charset="-120"/>
               </a:rPr>
               <a:t>AIに「00 はじめに」を下書きしてもらい、貼り付ける</a:t>
             </a:r>
-            <a:endParaRPr lang="en-US" sz="1450" dirty="0"/>
+            <a:endParaRPr lang="ja-JP" sz="1400" dirty="0"/>
           </a:p>
         </p:txBody>
       </p:sp>
@@ -6522,8 +6701,8 @@
         </p:nvSpPr>
         <p:spPr>
           <a:xfrm>
-            <a:off x="8229600" y="4773168"/>
-            <a:ext cx="365760" cy="228600"/>
+            <a:off x="8366760" y="4754880"/>
+            <a:ext cx="365760" cy="274320"/>
           </a:xfrm>
           <a:prstGeom prst="rect">
             <a:avLst/>
@@ -6535,20 +6714,23 @@
           </a:extLst>
         </p:spPr>
         <p:txBody>
-          <a:bodyPr/>
+          <a:bodyPr anchor="ctr"/>
           <a:lstStyle>
             <a:lvl1pPr>
-              <a:defRPr sz="900">
-                <a:solidFill>
-                  <a:srgbClr val="5A6872"/>
-                </a:solidFill>
+              <a:defRPr sz="850">
+                <a:solidFill>
+                  <a:srgbClr val="FFFFFF"/>
+                </a:solidFill>
+                <a:latin typeface="Noto Sans JP"/>
+                <a:ea typeface="Noto Sans JP"/>
+                <a:cs typeface="Noto Sans JP"/>
               </a:defRPr>
             </a:lvl1pPr>
           </a:lstStyle>
           <a:p>
             <a:pPr algn="r"/>
             <a:fld id="{F7021451-1387-4CA6-816F-3879F97B5CBC}" type="slidenum">
-              <a:rPr b="0" lang="en-US"/>
+              <a:rPr b="1" lang="en-US"/>
               <a:t>6</a:t>
             </a:fld>
             <a:endParaRPr lang="en-US"/>
@@ -6583,15 +6765,58 @@
       <p:sp>
         <p:nvSpPr>
           <p:cNvPr id="2" name="Text 0"/>
-          <p:cNvSpPr/>
-          <p:nvPr>
-            <p:ph idx="100" type="title" hasCustomPrompt="1"/>
-          </p:nvPr>
-        </p:nvSpPr>
-        <p:spPr>
-          <a:xfrm>
-            <a:off x="548640" y="658368"/>
-            <a:ext cx="8046720" cy="566928"/>
+          <p:cNvSpPr txBox="1"/>
+          <p:nvPr/>
+        </p:nvSpPr>
+        <p:spPr>
+          <a:xfrm rot="-180000">
+            <a:off x="411480" y="201168"/>
+            <a:ext cx="894740" cy="352044"/>
+          </a:xfrm>
+          <a:prstGeom prst="rect">
+            <a:avLst/>
+          </a:prstGeom>
+          <a:solidFill>
+            <a:srgbClr val="1A1A1A"/>
+          </a:solidFill>
+          <a:ln>
+            <a:solidFill>
+              <a:srgbClr val="1A1A1A"/>
+            </a:solidFill>
+          </a:ln>
+        </p:spPr>
+        <p:txBody>
+          <a:bodyPr wrap="square" lIns="0" tIns="0" rIns="0" bIns="0" rtlCol="0" anchor="ctr"/>
+          <a:lstStyle/>
+          <a:p>
+            <a:pPr algn="ctr" indent="0" marL="0">
+              <a:buNone/>
+            </a:pPr>
+            <a:r>
+              <a:rPr lang="ja-JP" altLang="en-US" sz="1100" dirty="0">
+                <a:solidFill>
+                  <a:srgbClr val="FFFFFF"/>
+                </a:solidFill>
+                <a:latin typeface="Dela Gothic One" pitchFamily="34" charset="0"/>
+                <a:ea typeface="けいふぉんと" pitchFamily="34" charset="-122"/>
+                <a:cs typeface="Dela Gothic One" pitchFamily="34" charset="-120"/>
+              </a:rPr>
+              <a:t>まとめ</a:t>
+            </a:r>
+            <a:endParaRPr lang="ja-JP" sz="1100" dirty="0"/>
+          </a:p>
+        </p:txBody>
+      </p:sp>
+      <p:sp>
+        <p:nvSpPr>
+          <p:cNvPr id="3" name="Text 1"/>
+          <p:cNvSpPr txBox="1"/>
+          <p:nvPr/>
+        </p:nvSpPr>
+        <p:spPr>
+          <a:xfrm>
+            <a:off x="411480" y="502920"/>
+            <a:ext cx="8321040" cy="685800"/>
           </a:xfrm>
           <a:prstGeom prst="rect">
             <a:avLst/>
@@ -6600,105 +6825,79 @@
           <a:ln/>
         </p:spPr>
         <p:txBody>
-          <a:bodyPr wrap="square" lIns="0" tIns="0" rIns="0" bIns="0" rtlCol="0" anchor="ctr"/>
+          <a:bodyPr wrap="square" lIns="0" tIns="0" rIns="0" bIns="0" rtlCol="0" anchor="ctr">
+            <a:normAutofit/>
+          </a:bodyPr>
           <a:lstStyle/>
           <a:p>
-            <a:pPr algn="l" indent="0" marL="0">
+            <a:pPr indent="0" marL="0">
               <a:buNone/>
             </a:pPr>
             <a:r>
-              <a:rPr lang="en-US" sz="2400" b="1" dirty="0">
-                <a:solidFill>
-                  <a:schemeClr val="tx1"/>
-                </a:solidFill>
+              <a:rPr lang="ja-JP" altLang="en-US" sz="2600" dirty="0">
+                <a:solidFill>
+                  <a:srgbClr val="1A1A1A"/>
+                </a:solidFill>
+                <a:latin typeface="Dela Gothic One" pitchFamily="34" charset="0"/>
+                <a:ea typeface="けいふぉんと" pitchFamily="34" charset="-122"/>
+                <a:cs typeface="Dela Gothic One" pitchFamily="34" charset="-120"/>
               </a:rPr>
               <a:t>宿題と、今日のチェック</a:t>
             </a:r>
-            <a:endParaRPr lang="en-US" sz="2400" dirty="0"/>
-          </a:p>
-        </p:txBody>
-      </p:sp>
-      <p:sp>
-        <p:nvSpPr>
-          <p:cNvPr id="3" name="chip"/>
+            <a:endParaRPr lang="ja-JP" sz="2600" dirty="0"/>
+          </a:p>
+        </p:txBody>
+      </p:sp>
+      <p:sp>
+        <p:nvSpPr>
+          <p:cNvPr id="4" name="card"/>
           <p:cNvSpPr/>
           <p:nvPr/>
         </p:nvSpPr>
         <p:spPr>
           <a:xfrm>
-            <a:off x="548640" y="292608"/>
-            <a:ext cx="795528" cy="292608"/>
+            <a:off x="502920" y="1417320"/>
+            <a:ext cx="3931920" cy="3108960"/>
           </a:xfrm>
           <a:prstGeom prst="roundRect">
             <a:avLst>
-              <a:gd name="adj" fmla="val 50000"/>
+              <a:gd name="adj" fmla="val 2941"/>
             </a:avLst>
           </a:prstGeom>
           <a:solidFill>
-            <a:schemeClr val="tx1"/>
+            <a:srgbClr val="FFFFFF"/>
           </a:solidFill>
-          <a:ln w="12700">
+          <a:ln w="25400">
             <a:solidFill>
-              <a:schemeClr val="tx1"/>
+              <a:srgbClr val="1A1A1A"/>
             </a:solidFill>
             <a:prstDash val="solid"/>
           </a:ln>
-        </p:spPr>
-      </p:sp>
-      <p:sp>
-        <p:nvSpPr>
-          <p:cNvPr id="4" name="chip-text"/>
-          <p:cNvSpPr txBox="1"/>
-          <p:nvPr/>
-        </p:nvSpPr>
-        <p:spPr>
-          <a:xfrm>
-            <a:off x="548640" y="292608"/>
-            <a:ext cx="795528" cy="292608"/>
-          </a:xfrm>
-          <a:prstGeom prst="rect">
-            <a:avLst/>
-          </a:prstGeom>
-          <a:noFill/>
-          <a:ln/>
-        </p:spPr>
-        <p:txBody>
-          <a:bodyPr wrap="square" lIns="0" tIns="0" rIns="0" bIns="0" rtlCol="0" anchor="ctr"/>
-          <a:lstStyle/>
-          <a:p>
-            <a:pPr algn="ctr" indent="0" marL="0">
-              <a:buNone/>
-            </a:pPr>
-            <a:r>
-              <a:rPr lang="en-US" sz="1100" b="1" dirty="0">
-                <a:solidFill>
-                  <a:schemeClr val="accent1"/>
-                </a:solidFill>
-              </a:rPr>
-              <a:t>まとめ</a:t>
-            </a:r>
-            <a:endParaRPr lang="en-US" sz="1100" dirty="0"/>
-          </a:p>
-        </p:txBody>
-      </p:sp>
-      <p:sp>
-        <p:nvSpPr>
-          <p:cNvPr id="5" name="card"/>
+          <a:effectLst>
+            <a:outerShdw sx="100000" sy="100000" kx="0" ky="0" algn="bl" rotWithShape="0" blurRad="101600" dist="50800" dir="2700000">
+              <a:srgbClr val="1A1A1A">
+                <a:alpha val="100000"/>
+              </a:srgbClr>
+            </a:outerShdw>
+          </a:effectLst>
+        </p:spPr>
+      </p:sp>
+      <p:sp>
+        <p:nvSpPr>
+          <p:cNvPr id="5" name="icon-circle"/>
           <p:cNvSpPr/>
           <p:nvPr/>
         </p:nvSpPr>
         <p:spPr>
           <a:xfrm>
-            <a:off x="548640" y="1463040"/>
-            <a:ext cx="3886200" cy="3017520"/>
-          </a:xfrm>
-          <a:prstGeom prst="roundRect">
-            <a:avLst>
-              <a:gd name="adj" fmla="val 3636"/>
-            </a:avLst>
+            <a:off x="704088" y="1600200"/>
+            <a:ext cx="457200" cy="457200"/>
+          </a:xfrm>
+          <a:prstGeom prst="ellipse">
+            <a:avLst/>
           </a:prstGeom>
           <a:solidFill>
-            <a:schemeClr val="bg2"/>
+            <a:srgbClr val="DD6420"/>
           </a:solidFill>
           <a:ln w="19050">
             <a:solidFill>
@@ -6706,43 +6905,11 @@
             </a:solidFill>
             <a:prstDash val="solid"/>
           </a:ln>
-          <a:effectLst>
-            <a:outerShdw sx="100000" sy="100000" kx="0" ky="0" algn="bl" rotWithShape="0" blurRad="101600" dist="38100" dir="2700000">
-              <a:srgbClr val="000000">
-                <a:alpha val="18000"/>
-              </a:srgbClr>
-            </a:outerShdw>
-          </a:effectLst>
-        </p:spPr>
-      </p:sp>
-      <p:sp>
-        <p:nvSpPr>
-          <p:cNvPr id="6" name="icon-circle"/>
-          <p:cNvSpPr/>
-          <p:nvPr/>
-        </p:nvSpPr>
-        <p:spPr>
-          <a:xfrm>
-            <a:off x="777240" y="1645920"/>
-            <a:ext cx="457200" cy="457200"/>
-          </a:xfrm>
-          <a:prstGeom prst="ellipse">
-            <a:avLst/>
-          </a:prstGeom>
-          <a:solidFill>
-            <a:schemeClr val="accent1"/>
-          </a:solidFill>
-          <a:ln w="15875">
-            <a:solidFill>
-              <a:srgbClr val="1A1A1A"/>
-            </a:solidFill>
-            <a:prstDash val="solid"/>
-          </a:ln>
         </p:spPr>
       </p:sp>
       <p:pic>
         <p:nvPicPr>
-          <p:cNvPr id="7" name="icon" descr="preencoded.png">    </p:cNvPr>
+          <p:cNvPr id="6" name="icon" descr="preencoded.png">    </p:cNvPr>
           <p:cNvPicPr>
             <a:picLocks noChangeAspect="1"/>
           </p:cNvPicPr>
@@ -6756,8 +6923,8 @@
         </p:blipFill>
         <p:spPr>
           <a:xfrm>
-            <a:off x="896112" y="1764792"/>
-            <a:ext cx="219456" cy="219456"/>
+            <a:off x="818388" y="1714500"/>
+            <a:ext cx="228600" cy="228600"/>
           </a:xfrm>
           <a:prstGeom prst="rect">
             <a:avLst/>
@@ -6766,13 +6933,13 @@
       </p:pic>
       <p:sp>
         <p:nvSpPr>
-          <p:cNvPr id="8" name="Text 5"/>
+          <p:cNvPr id="7" name="Text 4"/>
           <p:cNvSpPr txBox="1"/>
           <p:nvPr/>
         </p:nvSpPr>
         <p:spPr>
           <a:xfrm>
-            <a:off x="1371600" y="1645920"/>
+            <a:off x="1280160" y="1600200"/>
             <a:ext cx="2743200" cy="457200"/>
           </a:xfrm>
           <a:prstGeom prst="rect">
@@ -6789,27 +6956,30 @@
               <a:buNone/>
             </a:pPr>
             <a:r>
-              <a:rPr lang="en-US" sz="1700" b="1" dirty="0">
-                <a:solidFill>
-                  <a:schemeClr val="tx1"/>
-                </a:solidFill>
+              <a:rPr lang="ja-JP" altLang="en-US" sz="1800" dirty="0">
+                <a:solidFill>
+                  <a:srgbClr val="1A1A1A"/>
+                </a:solidFill>
+                <a:latin typeface="Dela Gothic One" pitchFamily="34" charset="0"/>
+                <a:ea typeface="けいふぉんと" pitchFamily="34" charset="-122"/>
+                <a:cs typeface="Dela Gothic One" pitchFamily="34" charset="-120"/>
               </a:rPr>
               <a:t>宿題</a:t>
             </a:r>
-            <a:endParaRPr lang="en-US" sz="1700" dirty="0"/>
-          </a:p>
-        </p:txBody>
-      </p:sp>
-      <p:sp>
-        <p:nvSpPr>
-          <p:cNvPr id="9" name="Text 6"/>
+            <a:endParaRPr lang="ja-JP" sz="1800" dirty="0"/>
+          </a:p>
+        </p:txBody>
+      </p:sp>
+      <p:sp>
+        <p:nvSpPr>
+          <p:cNvPr id="8" name="Text 5"/>
           <p:cNvSpPr txBox="1"/>
           <p:nvPr/>
         </p:nvSpPr>
         <p:spPr>
           <a:xfrm>
-            <a:off x="777240" y="2286000"/>
-            <a:ext cx="3474720" cy="2057400"/>
+            <a:off x="731520" y="2240280"/>
+            <a:ext cx="3474720" cy="2148840"/>
           </a:xfrm>
           <a:prstGeom prst="rect">
             <a:avLst/>
@@ -6818,7 +6988,9 @@
           <a:ln/>
         </p:spPr>
         <p:txBody>
-          <a:bodyPr wrap="square" lIns="0" tIns="0" rIns="0" bIns="0" rtlCol="0" anchor="t"/>
+          <a:bodyPr wrap="square" lIns="0" tIns="0" rIns="0" bIns="0" rtlCol="0" anchor="t">
+            <a:normAutofit/>
+          </a:bodyPr>
           <a:lstStyle/>
           <a:p>
             <a:pPr marL="342900" indent="-342900">
@@ -6826,38 +6998,73 @@
                 <a:spcPts val="800"/>
               </a:spcAft>
               <a:buSzPct val="100000"/>
-              <a:buChar char="•"/>
+              <a:buChar char="●"/>
             </a:pPr>
             <a:r>
-              <a:rPr lang="en-US" sz="1350" dirty="0">
-                <a:solidFill>
-                  <a:schemeClr val="tx1"/>
-                </a:solidFill>
+              <a:rPr lang="ja-JP" altLang="en-US" sz="1350" b="1" dirty="0">
+                <a:solidFill>
+                  <a:srgbClr val="1A1A1A"/>
+                </a:solidFill>
+                <a:latin typeface="Noto Sans JP" pitchFamily="34" charset="0"/>
+                <a:ea typeface="Noto Sans JP" pitchFamily="34" charset="-122"/>
+                <a:cs typeface="Noto Sans JP" pitchFamily="34" charset="-120"/>
               </a:rPr>
               <a:t>社内で使っているExcel・紙の帳票を1つ集めてくる（第4回で取り込みます）</a:t>
             </a:r>
-            <a:endParaRPr lang="en-US" sz="1350" dirty="0"/>
-          </a:p>
-        </p:txBody>
-      </p:sp>
-      <p:sp>
-        <p:nvSpPr>
-          <p:cNvPr id="10" name="card"/>
+            <a:endParaRPr lang="ja-JP" sz="1350" dirty="0"/>
+          </a:p>
+        </p:txBody>
+      </p:sp>
+      <p:sp>
+        <p:nvSpPr>
+          <p:cNvPr id="9" name="card"/>
           <p:cNvSpPr/>
           <p:nvPr/>
         </p:nvSpPr>
         <p:spPr>
           <a:xfrm>
-            <a:off x="4709160" y="1463040"/>
-            <a:ext cx="3886200" cy="3017520"/>
+            <a:off x="4709160" y="1417320"/>
+            <a:ext cx="3931920" cy="3108960"/>
           </a:xfrm>
           <a:prstGeom prst="roundRect">
             <a:avLst>
-              <a:gd name="adj" fmla="val 3636"/>
+              <a:gd name="adj" fmla="val 2941"/>
             </a:avLst>
           </a:prstGeom>
           <a:solidFill>
-            <a:schemeClr val="bg1"/>
+            <a:srgbClr val="FFFFFF"/>
+          </a:solidFill>
+          <a:ln w="25400">
+            <a:solidFill>
+              <a:srgbClr val="1A1A1A"/>
+            </a:solidFill>
+            <a:prstDash val="solid"/>
+          </a:ln>
+          <a:effectLst>
+            <a:outerShdw sx="100000" sy="100000" kx="0" ky="0" algn="bl" rotWithShape="0" blurRad="101600" dist="50800" dir="2700000">
+              <a:srgbClr val="1A1A1A">
+                <a:alpha val="100000"/>
+              </a:srgbClr>
+            </a:outerShdw>
+          </a:effectLst>
+        </p:spPr>
+      </p:sp>
+      <p:sp>
+        <p:nvSpPr>
+          <p:cNvPr id="10" name="icon-circle"/>
+          <p:cNvSpPr/>
+          <p:nvPr/>
+        </p:nvSpPr>
+        <p:spPr>
+          <a:xfrm>
+            <a:off x="4910328" y="1600200"/>
+            <a:ext cx="457200" cy="457200"/>
+          </a:xfrm>
+          <a:prstGeom prst="ellipse">
+            <a:avLst/>
+          </a:prstGeom>
+          <a:solidFill>
+            <a:srgbClr val="DD6420"/>
           </a:solidFill>
           <a:ln w="19050">
             <a:solidFill>
@@ -6865,43 +7072,11 @@
             </a:solidFill>
             <a:prstDash val="solid"/>
           </a:ln>
-          <a:effectLst>
-            <a:outerShdw sx="100000" sy="100000" kx="0" ky="0" algn="bl" rotWithShape="0" blurRad="101600" dist="38100" dir="2700000">
-              <a:srgbClr val="000000">
-                <a:alpha val="18000"/>
-              </a:srgbClr>
-            </a:outerShdw>
-          </a:effectLst>
-        </p:spPr>
-      </p:sp>
-      <p:sp>
-        <p:nvSpPr>
-          <p:cNvPr id="11" name="icon-circle"/>
-          <p:cNvSpPr/>
-          <p:nvPr/>
-        </p:nvSpPr>
-        <p:spPr>
-          <a:xfrm>
-            <a:off x="4937760" y="1645920"/>
-            <a:ext cx="457200" cy="457200"/>
-          </a:xfrm>
-          <a:prstGeom prst="ellipse">
-            <a:avLst/>
-          </a:prstGeom>
-          <a:solidFill>
-            <a:schemeClr val="accent1"/>
-          </a:solidFill>
-          <a:ln w="15875">
-            <a:solidFill>
-              <a:srgbClr val="1A1A1A"/>
-            </a:solidFill>
-            <a:prstDash val="solid"/>
-          </a:ln>
         </p:spPr>
       </p:sp>
       <p:pic>
         <p:nvPicPr>
-          <p:cNvPr id="12" name="icon" descr="preencoded.png">    </p:cNvPr>
+          <p:cNvPr id="11" name="icon" descr="preencoded.png">    </p:cNvPr>
           <p:cNvPicPr>
             <a:picLocks noChangeAspect="1"/>
           </p:cNvPicPr>
@@ -6915,8 +7090,8 @@
         </p:blipFill>
         <p:spPr>
           <a:xfrm>
-            <a:off x="5056632" y="1764792"/>
-            <a:ext cx="219456" cy="219456"/>
+            <a:off x="5024628" y="1714500"/>
+            <a:ext cx="228600" cy="228600"/>
           </a:xfrm>
           <a:prstGeom prst="rect">
             <a:avLst/>
@@ -6925,13 +7100,13 @@
       </p:pic>
       <p:sp>
         <p:nvSpPr>
-          <p:cNvPr id="13" name="Text 9"/>
+          <p:cNvPr id="12" name="Text 8"/>
           <p:cNvSpPr txBox="1"/>
           <p:nvPr/>
         </p:nvSpPr>
         <p:spPr>
           <a:xfrm>
-            <a:off x="5532120" y="1645920"/>
+            <a:off x="5486400" y="1600200"/>
             <a:ext cx="2743200" cy="457200"/>
           </a:xfrm>
           <a:prstGeom prst="rect">
@@ -6948,27 +7123,30 @@
               <a:buNone/>
             </a:pPr>
             <a:r>
-              <a:rPr lang="en-US" sz="1700" b="1" dirty="0">
-                <a:solidFill>
-                  <a:schemeClr val="tx1"/>
-                </a:solidFill>
+              <a:rPr lang="ja-JP" altLang="en-US" sz="1800" dirty="0">
+                <a:solidFill>
+                  <a:srgbClr val="1A1A1A"/>
+                </a:solidFill>
+                <a:latin typeface="Dela Gothic One" pitchFamily="34" charset="0"/>
+                <a:ea typeface="けいふぉんと" pitchFamily="34" charset="-122"/>
+                <a:cs typeface="Dela Gothic One" pitchFamily="34" charset="-120"/>
               </a:rPr>
               <a:t>できたらチェック</a:t>
             </a:r>
-            <a:endParaRPr lang="en-US" sz="1700" dirty="0"/>
-          </a:p>
-        </p:txBody>
-      </p:sp>
-      <p:sp>
-        <p:nvSpPr>
-          <p:cNvPr id="14" name="Text 10"/>
+            <a:endParaRPr lang="ja-JP" sz="1800" dirty="0"/>
+          </a:p>
+        </p:txBody>
+      </p:sp>
+      <p:sp>
+        <p:nvSpPr>
+          <p:cNvPr id="13" name="Text 9"/>
           <p:cNvSpPr txBox="1"/>
           <p:nvPr/>
         </p:nvSpPr>
         <p:spPr>
           <a:xfrm>
-            <a:off x="4937760" y="2286000"/>
-            <a:ext cx="3474720" cy="2057400"/>
+            <a:off x="4937760" y="2240280"/>
+            <a:ext cx="3474720" cy="2148840"/>
           </a:xfrm>
           <a:prstGeom prst="rect">
             <a:avLst/>
@@ -6977,7 +7155,9 @@
           <a:ln/>
         </p:spPr>
         <p:txBody>
-          <a:bodyPr wrap="square" lIns="0" tIns="0" rIns="0" bIns="0" rtlCol="0" anchor="t"/>
+          <a:bodyPr wrap="square" lIns="0" tIns="0" rIns="0" bIns="0" rtlCol="0" anchor="t">
+            <a:normAutofit/>
+          </a:bodyPr>
           <a:lstStyle/>
           <a:p>
             <a:pPr indent="0" marL="0">
@@ -6987,14 +7167,17 @@
               <a:buNone/>
             </a:pPr>
             <a:r>
-              <a:rPr lang="en-US" sz="1350" dirty="0">
-                <a:solidFill>
-                  <a:schemeClr val="tx1"/>
-                </a:solidFill>
+              <a:rPr lang="ja-JP" altLang="en-US" sz="1350" b="1" dirty="0">
+                <a:solidFill>
+                  <a:srgbClr val="1A1A1A"/>
+                </a:solidFill>
+                <a:latin typeface="Noto Sans JP" pitchFamily="34" charset="0"/>
+                <a:ea typeface="Noto Sans JP" pitchFamily="34" charset="-122"/>
+                <a:cs typeface="Noto Sans JP" pitchFamily="34" charset="-120"/>
               </a:rPr>
               <a:t>☐ グループ・Docs・Wikiの使い分けを説明できる</a:t>
             </a:r>
-            <a:endParaRPr lang="en-US" sz="1350" dirty="0"/>
+            <a:endParaRPr lang="ja-JP" sz="1350" dirty="0"/>
           </a:p>
           <a:p>
             <a:pPr indent="0" marL="0">
@@ -7004,14 +7187,17 @@
               <a:buNone/>
             </a:pPr>
             <a:r>
-              <a:rPr lang="en-US" sz="1350" dirty="0">
-                <a:solidFill>
-                  <a:schemeClr val="tx1"/>
-                </a:solidFill>
+              <a:rPr lang="ja-JP" altLang="en-US" sz="1350" b="1" dirty="0">
+                <a:solidFill>
+                  <a:srgbClr val="1A1A1A"/>
+                </a:solidFill>
+                <a:latin typeface="Noto Sans JP" pitchFamily="34" charset="0"/>
+                <a:ea typeface="Noto Sans JP" pitchFamily="34" charset="-122"/>
+                <a:cs typeface="Noto Sans JP" pitchFamily="34" charset="-120"/>
               </a:rPr>
               <a:t>☐ Wikiスペースに設計シートが置いてある</a:t>
             </a:r>
-            <a:endParaRPr lang="en-US" sz="1350" dirty="0"/>
+            <a:endParaRPr lang="ja-JP" sz="1350" dirty="0"/>
           </a:p>
         </p:txBody>
       </p:sp>
@@ -7027,8 +7213,8 @@
         </p:nvSpPr>
         <p:spPr>
           <a:xfrm>
-            <a:off x="8229600" y="4773168"/>
-            <a:ext cx="365760" cy="228600"/>
+            <a:off x="8366760" y="4754880"/>
+            <a:ext cx="365760" cy="274320"/>
           </a:xfrm>
           <a:prstGeom prst="rect">
             <a:avLst/>
@@ -7040,20 +7226,23 @@
           </a:extLst>
         </p:spPr>
         <p:txBody>
-          <a:bodyPr/>
+          <a:bodyPr anchor="ctr"/>
           <a:lstStyle>
             <a:lvl1pPr>
-              <a:defRPr sz="900">
-                <a:solidFill>
-                  <a:srgbClr val="5A6872"/>
-                </a:solidFill>
+              <a:defRPr sz="850">
+                <a:solidFill>
+                  <a:srgbClr val="FFFFFF"/>
+                </a:solidFill>
+                <a:latin typeface="Noto Sans JP"/>
+                <a:ea typeface="Noto Sans JP"/>
+                <a:cs typeface="Noto Sans JP"/>
               </a:defRPr>
             </a:lvl1pPr>
           </a:lstStyle>
           <a:p>
             <a:pPr algn="r"/>
             <a:fld id="{F7021451-1387-4CA6-816F-3879F97B5CBC}" type="slidenum">
-              <a:rPr b="0" lang="en-US"/>
+              <a:rPr b="1" lang="en-US"/>
               <a:t>7</a:t>
             </a:fld>
             <a:endParaRPr lang="en-US"/>
@@ -7085,18 +7274,92 @@
           <a:chExt cx="0" cy="0"/>
         </a:xfrm>
       </p:grpSpPr>
-      <p:sp>
-        <p:nvSpPr>
-          <p:cNvPr id="2" name="Text 0"/>
-          <p:cNvSpPr/>
-          <p:nvPr>
-            <p:ph idx="100" type="title" hasCustomPrompt="1"/>
-          </p:nvPr>
-        </p:nvSpPr>
-        <p:spPr>
-          <a:xfrm>
-            <a:off x="548640" y="1463040"/>
-            <a:ext cx="8046720" cy="1005840"/>
+      <p:pic>
+        <p:nvPicPr>
+          <p:cNvPr id="2" name="portrait" descr="講師 笹原彰朗">    </p:cNvPr>
+          <p:cNvPicPr>
+            <a:picLocks noChangeAspect="1"/>
+          </p:cNvPicPr>
+          <p:nvPr/>
+        </p:nvPicPr>
+        <p:blipFill>
+          <a:blip r:embed="rId1"/>
+          <a:stretch>
+            <a:fillRect/>
+          </a:stretch>
+        </p:blipFill>
+        <p:spPr>
+          <a:xfrm>
+            <a:off x="6003588" y="1211580"/>
+            <a:ext cx="2866092" cy="3931920"/>
+          </a:xfrm>
+          <a:prstGeom prst="rect">
+            <a:avLst/>
+          </a:prstGeom>
+        </p:spPr>
+      </p:pic>
+      <p:sp>
+        <p:nvSpPr>
+          <p:cNvPr id="3" name="Text 0"/>
+          <p:cNvSpPr txBox="1"/>
+          <p:nvPr/>
+        </p:nvSpPr>
+        <p:spPr>
+          <a:xfrm rot="-240000">
+            <a:off x="457200" y="548640"/>
+            <a:ext cx="1280160" cy="548640"/>
+          </a:xfrm>
+          <a:prstGeom prst="rect">
+            <a:avLst/>
+          </a:prstGeom>
+          <a:solidFill>
+            <a:srgbClr val="1A1A1A"/>
+          </a:solidFill>
+          <a:ln>
+            <a:solidFill>
+              <a:srgbClr val="1A1A1A"/>
+            </a:solidFill>
+          </a:ln>
+          <a:effectLst>
+            <a:outerShdw sx="100000" sy="100000" kx="0" ky="0" algn="bl" rotWithShape="0" blurRad="101600" dist="38100" dir="2700000">
+              <a:srgbClr val="1A1A1A">
+                <a:alpha val="100000"/>
+              </a:srgbClr>
+            </a:outerShdw>
+          </a:effectLst>
+        </p:spPr>
+        <p:txBody>
+          <a:bodyPr wrap="square" lIns="0" tIns="0" rIns="0" bIns="0" rtlCol="0" anchor="ctr"/>
+          <a:lstStyle/>
+          <a:p>
+            <a:pPr algn="ctr" indent="0" marL="0">
+              <a:buNone/>
+            </a:pPr>
+            <a:r>
+              <a:rPr lang="ja-JP" altLang="en-US" sz="2000" dirty="0">
+                <a:solidFill>
+                  <a:srgbClr val="FFD600"/>
+                </a:solidFill>
+                <a:latin typeface="Dela Gothic One" pitchFamily="34" charset="0"/>
+                <a:ea typeface="けいふぉんと" pitchFamily="34" charset="-122"/>
+                <a:cs typeface="Dela Gothic One" pitchFamily="34" charset="-120"/>
+              </a:rPr>
+              <a:t>次回</a:t>
+            </a:r>
+            <a:endParaRPr lang="ja-JP" sz="2000" dirty="0"/>
+          </a:p>
+        </p:txBody>
+      </p:sp>
+      <p:sp>
+        <p:nvSpPr>
+          <p:cNvPr id="4" name="Text 1"/>
+          <p:cNvSpPr txBox="1"/>
+          <p:nvPr/>
+        </p:nvSpPr>
+        <p:spPr>
+          <a:xfrm>
+            <a:off x="457200" y="1280160"/>
+            <a:ext cx="5852160" cy="1554480"/>
           </a:xfrm>
           <a:prstGeom prst="rect">
             <a:avLst/>
@@ -7105,73 +7368,141 @@
           <a:ln/>
         </p:spPr>
         <p:txBody>
-          <a:bodyPr wrap="square" lIns="0" tIns="0" rIns="0" bIns="0" rtlCol="0" anchor="t"/>
-          <a:lstStyle/>
-          <a:p>
-            <a:pPr algn="l" indent="0" marL="0">
-              <a:buNone/>
-            </a:pPr>
-            <a:r>
-              <a:rPr lang="en-US" sz="3000" b="1" dirty="0">
-                <a:solidFill>
-                  <a:schemeClr val="accent1"/>
-                </a:solidFill>
-              </a:rPr>
-              <a:t>次回：第4回 BASEでデータの入れ物を設計する</a:t>
-            </a:r>
-            <a:endParaRPr lang="en-US" sz="3000" dirty="0"/>
-          </a:p>
-        </p:txBody>
-      </p:sp>
-      <p:sp>
-        <p:nvSpPr>
-          <p:cNvPr id="3" name="Text 0"/>
-          <p:cNvSpPr/>
-          <p:nvPr>
-            <p:ph idx="101" type="body" hasCustomPrompt="1"/>
-          </p:nvPr>
-        </p:nvSpPr>
-        <p:spPr>
-          <a:xfrm>
-            <a:off x="548640" y="2606040"/>
-            <a:ext cx="8046720" cy="1097280"/>
-          </a:xfrm>
-          <a:prstGeom prst="rect">
-            <a:avLst/>
-          </a:prstGeom>
-          <a:noFill/>
-          <a:ln/>
-        </p:spPr>
-        <p:txBody>
-          <a:bodyPr wrap="square" lIns="0" tIns="0" rIns="0" bIns="0" rtlCol="0" anchor="t"/>
+          <a:bodyPr wrap="square" lIns="0" tIns="0" rIns="0" bIns="0" rtlCol="0" anchor="ctr">
+            <a:normAutofit/>
+          </a:bodyPr>
           <a:lstStyle/>
           <a:p>
             <a:pPr indent="0" marL="0">
               <a:buNone/>
             </a:pPr>
             <a:r>
-              <a:rPr lang="en-US" sz="1500" dirty="0">
-                <a:solidFill>
-                  <a:schemeClr val="bg1"/>
-                </a:solidFill>
+              <a:rPr lang="ja-JP" altLang="en-US" sz="2700" dirty="0">
+                <a:solidFill>
+                  <a:srgbClr val="1A1A1A"/>
+                </a:solidFill>
+                <a:latin typeface="Dela Gothic One" pitchFamily="34" charset="0"/>
+                <a:ea typeface="けいふぉんと" pitchFamily="34" charset="-122"/>
+                <a:cs typeface="Dela Gothic One" pitchFamily="34" charset="-120"/>
               </a:rPr>
-              <a:t>わからないところは、講座グループでいつでも質問してください。</a:t>
-            </a:r>
-            <a:endParaRPr lang="en-US" sz="1500" dirty="0"/>
+              <a:t>第4回</a:t>
+            </a:r>
+            <a:endParaRPr lang="ja-JP" sz="2700" dirty="0"/>
           </a:p>
           <a:p>
             <a:pPr indent="0" marL="0">
               <a:buNone/>
             </a:pPr>
             <a:r>
-              <a:rPr lang="en-US" sz="1500" dirty="0">
-                <a:solidFill>
-                  <a:schemeClr val="bg1"/>
-                </a:solidFill>
+              <a:rPr lang="ja-JP" altLang="en-US" sz="2700" dirty="0">
+                <a:solidFill>
+                  <a:srgbClr val="1A1A1A"/>
+                </a:solidFill>
+                <a:latin typeface="Dela Gothic One" pitchFamily="34" charset="0"/>
+                <a:ea typeface="けいふぉんと" pitchFamily="34" charset="-122"/>
+                <a:cs typeface="Dela Gothic One" pitchFamily="34" charset="-120"/>
+              </a:rPr>
+              <a:t>BASEでデータの入れ物を設計する</a:t>
+            </a:r>
+            <a:endParaRPr lang="ja-JP" sz="2700" dirty="0"/>
+          </a:p>
+        </p:txBody>
+      </p:sp>
+      <p:sp>
+        <p:nvSpPr>
+          <p:cNvPr id="5" name="card"/>
+          <p:cNvSpPr/>
+          <p:nvPr/>
+        </p:nvSpPr>
+        <p:spPr>
+          <a:xfrm>
+            <a:off x="457200" y="3108960"/>
+            <a:ext cx="5394960" cy="1325880"/>
+          </a:xfrm>
+          <a:prstGeom prst="roundRect">
+            <a:avLst>
+              <a:gd name="adj" fmla="val 6897"/>
+            </a:avLst>
+          </a:prstGeom>
+          <a:solidFill>
+            <a:srgbClr val="FFFFFF"/>
+          </a:solidFill>
+          <a:ln w="25400">
+            <a:solidFill>
+              <a:srgbClr val="1A1A1A"/>
+            </a:solidFill>
+            <a:prstDash val="solid"/>
+          </a:ln>
+          <a:effectLst>
+            <a:outerShdw sx="100000" sy="100000" kx="0" ky="0" algn="bl" rotWithShape="0" blurRad="101600" dist="50800" dir="2700000">
+              <a:srgbClr val="1A1A1A">
+                <a:alpha val="100000"/>
+              </a:srgbClr>
+            </a:outerShdw>
+          </a:effectLst>
+        </p:spPr>
+      </p:sp>
+      <p:sp>
+        <p:nvSpPr>
+          <p:cNvPr id="6" name="Text 3"/>
+          <p:cNvSpPr txBox="1"/>
+          <p:nvPr/>
+        </p:nvSpPr>
+        <p:spPr>
+          <a:xfrm>
+            <a:off x="685800" y="3200400"/>
+            <a:ext cx="4937760" cy="1143000"/>
+          </a:xfrm>
+          <a:prstGeom prst="rect">
+            <a:avLst/>
+          </a:prstGeom>
+          <a:noFill/>
+          <a:ln/>
+        </p:spPr>
+        <p:txBody>
+          <a:bodyPr wrap="square" lIns="0" tIns="0" rIns="0" bIns="0" rtlCol="0" anchor="ctr">
+            <a:normAutofit/>
+          </a:bodyPr>
+          <a:lstStyle/>
+          <a:p>
+            <a:pPr indent="0" marL="0">
+              <a:spcAft>
+                <a:spcPts val="400"/>
+              </a:spcAft>
+              <a:buNone/>
+            </a:pPr>
+            <a:r>
+              <a:rPr lang="ja-JP" altLang="en-US" sz="1400" b="1" dirty="0">
+                <a:solidFill>
+                  <a:srgbClr val="1A1A1A"/>
+                </a:solidFill>
+                <a:latin typeface="Noto Sans JP" pitchFamily="34" charset="0"/>
+                <a:ea typeface="Noto Sans JP" pitchFamily="34" charset="-122"/>
+                <a:cs typeface="Noto Sans JP" pitchFamily="34" charset="-120"/>
+              </a:rPr>
+              <a:t>わからないところは、講座グループでいつでも質問してください。</a:t>
+            </a:r>
+            <a:endParaRPr lang="ja-JP" sz="1400" dirty="0"/>
+          </a:p>
+          <a:p>
+            <a:pPr indent="0" marL="0">
+              <a:spcAft>
+                <a:spcPts val="400"/>
+              </a:spcAft>
+              <a:buNone/>
+            </a:pPr>
+            <a:r>
+              <a:rPr lang="ja-JP" altLang="en-US" sz="1400" b="1" dirty="0">
+                <a:solidFill>
+                  <a:srgbClr val="1A1A1A"/>
+                </a:solidFill>
+                <a:latin typeface="Noto Sans JP" pitchFamily="34" charset="0"/>
+                <a:ea typeface="Noto Sans JP" pitchFamily="34" charset="-122"/>
+                <a:cs typeface="Noto Sans JP" pitchFamily="34" charset="-120"/>
               </a:rPr>
               <a:t>APIキーやパスワードは送らないでください。</a:t>
             </a:r>
-            <a:endParaRPr lang="en-US" sz="1500" dirty="0"/>
+            <a:endParaRPr lang="ja-JP" sz="1400" dirty="0"/>
           </a:p>
         </p:txBody>
       </p:sp>
@@ -7184,9 +7515,9 @@
 </file>
 
 <file path=ppt/theme/theme1.xml><?xml version="1.0" encoding="utf-8"?>
-<a:theme xmlns:a="http://schemas.openxmlformats.org/drawingml/2006/main" name="Manaberu">
+<a:theme xmlns:a="http://schemas.openxmlformats.org/drawingml/2006/main" name="SasaYell">
   <a:themeElements>
-    <a:clrScheme name="Manaberu">
+    <a:clrScheme name="SasaYell">
       <a:dk1>
         <a:srgbClr val="1A1A1A"/>
       </a:dk1>
@@ -7194,10 +7525,10 @@
         <a:srgbClr val="FFFFFF"/>
       </a:lt1>
       <a:dk2>
-        <a:srgbClr val="5A6872"/>
+        <a:srgbClr val="1A1A1A"/>
       </a:dk2>
       <a:lt2>
-        <a:srgbClr val="FFF6CC"/>
+        <a:srgbClr val="FFD600"/>
       </a:lt2>
       <a:accent1>
         <a:srgbClr val="FFD600"/>
@@ -7206,128 +7537,34 @@
         <a:srgbClr val="DD6420"/>
       </a:accent2>
       <a:accent3>
-        <a:srgbClr val="3370FF"/>
+        <a:srgbClr val="F5A623"/>
       </a:accent3>
       <a:accent4>
-        <a:srgbClr val="06C755"/>
+        <a:srgbClr val="1A1A1A"/>
       </a:accent4>
       <a:accent5>
-        <a:srgbClr val="E53935"/>
+        <a:srgbClr val="FFFFFF"/>
       </a:accent5>
       <a:accent6>
-        <a:srgbClr val="F5A623"/>
+        <a:srgbClr val="DD6420"/>
       </a:accent6>
       <a:hlink>
-        <a:srgbClr val="3370FF"/>
+        <a:srgbClr val="DD6420"/>
       </a:hlink>
       <a:folHlink>
-        <a:srgbClr val="6B4FBB"/>
+        <a:srgbClr val="F5A623"/>
       </a:folHlink>
     </a:clrScheme>
-    <a:fontScheme name="Manaberu">
+    <a:fontScheme name="SasaYell">
       <a:majorFont>
-        <a:latin typeface="Yu Gothic"/>
-        <a:ea typeface=""/>
+        <a:latin typeface="Dela Gothic One"/>
+        <a:ea typeface="けいふぉんと"/>
         <a:cs typeface=""/>
-        <a:font script="Jpan" typeface="游ゴシック Light"/>
-        <a:font script="Hang" typeface="맑은 고딕"/>
-        <a:font script="Hans" typeface="等线 Light"/>
-        <a:font script="Hant" typeface="新細明體"/>
-        <a:font script="Arab" typeface="Times New Roman"/>
-        <a:font script="Hebr" typeface="Times New Roman"/>
-        <a:font script="Thai" typeface="Angsana New"/>
-        <a:font script="Ethi" typeface="Nyala"/>
-        <a:font script="Beng" typeface="Vrinda"/>
-        <a:font script="Gujr" typeface="Shruti"/>
-        <a:font script="Khmr" typeface="MoolBoran"/>
-        <a:font script="Knda" typeface="Tunga"/>
-        <a:font script="Guru" typeface="Raavi"/>
-        <a:font script="Cans" typeface="Euphemia"/>
-        <a:font script="Cher" typeface="Plantagenet Cherokee"/>
-        <a:font script="Yiii" typeface="Microsoft Yi Baiti"/>
-        <a:font script="Tibt" typeface="Microsoft Himalaya"/>
-        <a:font script="Thaa" typeface="MV Boli"/>
-        <a:font script="Deva" typeface="Mangal"/>
-        <a:font script="Telu" typeface="Gautami"/>
-        <a:font script="Taml" typeface="Latha"/>
-        <a:font script="Syrc" typeface="Estrangelo Edessa"/>
-        <a:font script="Orya" typeface="Kalinga"/>
-        <a:font script="Mlym" typeface="Kartika"/>
-        <a:font script="Laoo" typeface="DokChampa"/>
-        <a:font script="Sinh" typeface="Iskoola Pota"/>
-        <a:font script="Mong" typeface="Mongolian Baiti"/>
-        <a:font script="Viet" typeface="Times New Roman"/>
-        <a:font script="Uigh" typeface="Microsoft Uighur"/>
-        <a:font script="Geor" typeface="Sylfaen"/>
-        <a:font script="Armn" typeface="Arial"/>
-        <a:font script="Bugi" typeface="Leelawadee UI"/>
-        <a:font script="Bopo" typeface="Microsoft JhengHei"/>
-        <a:font script="Java" typeface="Javanese Text"/>
-        <a:font script="Lisu" typeface="Segoe UI"/>
-        <a:font script="Mymr" typeface="Myanmar Text"/>
-        <a:font script="Nkoo" typeface="Ebrima"/>
-        <a:font script="Olck" typeface="Nirmala UI"/>
-        <a:font script="Osma" typeface="Ebrima"/>
-        <a:font script="Phag" typeface="Phagspa"/>
-        <a:font script="Syrn" typeface="Estrangelo Edessa"/>
-        <a:font script="Syrj" typeface="Estrangelo Edessa"/>
-        <a:font script="Syre" typeface="Estrangelo Edessa"/>
-        <a:font script="Sora" typeface="Nirmala UI"/>
-        <a:font script="Tale" typeface="Microsoft Tai Le"/>
-        <a:font script="Talu" typeface="Microsoft New Tai Lue"/>
-        <a:font script="Tfng" typeface="Ebrima"/>
       </a:majorFont>
       <a:minorFont>
-        <a:latin typeface="Yu Gothic"/>
-        <a:ea typeface=""/>
+        <a:latin typeface="Noto Sans JP"/>
+        <a:ea typeface="Noto Sans JP"/>
         <a:cs typeface=""/>
-        <a:font script="Jpan" typeface="游ゴシック"/>
-        <a:font script="Hang" typeface="맑은 고딕"/>
-        <a:font script="Hans" typeface="等线"/>
-        <a:font script="Hant" typeface="新細明體"/>
-        <a:font script="Arab" typeface="Arial"/>
-        <a:font script="Hebr" typeface="Arial"/>
-        <a:font script="Thai" typeface="Cordia New"/>
-        <a:font script="Ethi" typeface="Nyala"/>
-        <a:font script="Beng" typeface="Vrinda"/>
-        <a:font script="Gujr" typeface="Shruti"/>
-        <a:font script="Khmr" typeface="DaunPenh"/>
-        <a:font script="Knda" typeface="Tunga"/>
-        <a:font script="Guru" typeface="Raavi"/>
-        <a:font script="Cans" typeface="Euphemia"/>
-        <a:font script="Cher" typeface="Plantagenet Cherokee"/>
-        <a:font script="Yiii" typeface="Microsoft Yi Baiti"/>
-        <a:font script="Tibt" typeface="Microsoft Himalaya"/>
-        <a:font script="Thaa" typeface="MV Boli"/>
-        <a:font script="Deva" typeface="Mangal"/>
-        <a:font script="Telu" typeface="Gautami"/>
-        <a:font script="Taml" typeface="Latha"/>
-        <a:font script="Syrc" typeface="Estrangelo Edessa"/>
-        <a:font script="Orya" typeface="Kalinga"/>
-        <a:font script="Mlym" typeface="Kartika"/>
-        <a:font script="Laoo" typeface="DokChampa"/>
-        <a:font script="Sinh" typeface="Iskoola Pota"/>
-        <a:font script="Mong" typeface="Mongolian Baiti"/>
-        <a:font script="Viet" typeface="Arial"/>
-        <a:font script="Uigh" typeface="Microsoft Uighur"/>
-        <a:font script="Geor" typeface="Sylfaen"/>
-        <a:font script="Armn" typeface="Arial"/>
-        <a:font script="Bugi" typeface="Leelawadee UI"/>
-        <a:font script="Bopo" typeface="Microsoft JhengHei"/>
-        <a:font script="Java" typeface="Javanese Text"/>
-        <a:font script="Lisu" typeface="Segoe UI"/>
-        <a:font script="Mymr" typeface="Myanmar Text"/>
-        <a:font script="Nkoo" typeface="Ebrima"/>
-        <a:font script="Olck" typeface="Nirmala UI"/>
-        <a:font script="Osma" typeface="Ebrima"/>
-        <a:font script="Phag" typeface="Phagspa"/>
-        <a:font script="Syrn" typeface="Estrangelo Edessa"/>
-        <a:font script="Syrj" typeface="Estrangelo Edessa"/>
-        <a:font script="Syre" typeface="Estrangelo Edessa"/>
-        <a:font script="Sora" typeface="Nirmala UI"/>
-        <a:font script="Tale" typeface="Microsoft Tai Le"/>
-        <a:font script="Talu" typeface="Microsoft New Tai Lue"/>
-        <a:font script="Tfng" typeface="Ebrima"/>
       </a:minorFont>
     </a:fontScheme>
     <a:fmtScheme name="Office">
